--- a/HCCJP_71/AI時代の「本当の」ハイブリッドクラウド — エージェントが実現した、あの頃の夢.pptx
+++ b/HCCJP_71/AI時代の「本当の」ハイブリッドクラウド — エージェントが実現した、あの頃の夢.pptx
@@ -3250,6 +3250,7 @@
                   <a:srgbClr val="0078D4"/>
                 </a:solidFill>
                 <a:latin typeface="Meiryo"/>
+                <a:ea typeface="Meiryo"/>
               </a:rPr>
               <a:t>HCCJP 第71回勉強会</a:t>
             </a:r>
@@ -3266,6 +3267,7 @@
                   <a:srgbClr val="0078D4"/>
                 </a:solidFill>
                 <a:latin typeface="Meiryo"/>
+                <a:ea typeface="Meiryo"/>
               </a:rPr>
               <a:t>ハイブリッドクラウド研究会</a:t>
             </a:r>
@@ -3282,6 +3284,7 @@
                   <a:srgbClr val="323130"/>
                 </a:solidFill>
                 <a:latin typeface="Meiryo"/>
+                <a:ea typeface="Meiryo"/>
               </a:rPr>
               <a:t>2026年3月13日（金）14:00開始</a:t>
             </a:r>
@@ -3417,6 +3420,7 @@
                   <a:srgbClr val="0078D4"/>
                 </a:solidFill>
                 <a:latin typeface="Meiryo"/>
+                <a:ea typeface="Meiryo"/>
               </a:rPr>
               <a:t>Part 1</a:t>
             </a:r>
@@ -3433,6 +3437,7 @@
                   <a:srgbClr val="0078D4"/>
                 </a:solidFill>
                 <a:latin typeface="Meiryo"/>
+                <a:ea typeface="Meiryo"/>
               </a:rPr>
               <a:t>HCCJPの原点と「あの頃の夢」</a:t>
             </a:r>
@@ -3563,6 +3568,7 @@
                   <a:srgbClr val="0078D4"/>
                 </a:solidFill>
                 <a:latin typeface="Meiryo"/>
+                <a:ea typeface="Meiryo"/>
               </a:rPr>
               <a:t>問いかけ</a:t>
             </a:r>
@@ -3645,6 +3651,7 @@
                   <a:srgbClr val="0078D4"/>
                 </a:solidFill>
                 <a:latin typeface="Meiryo"/>
+                <a:ea typeface="Meiryo"/>
               </a:rPr>
               <a:t>「ハイブリッドクラウド」「マルチクラウド」</a:t>
             </a:r>
@@ -3661,6 +3668,7 @@
                   <a:srgbClr val="0078D4"/>
                 </a:solidFill>
                 <a:latin typeface="Meiryo"/>
+                <a:ea typeface="Meiryo"/>
               </a:rPr>
               <a:t>本当に実現してましたか？</a:t>
             </a:r>
@@ -3791,6 +3799,7 @@
                   <a:srgbClr val="0078D4"/>
                 </a:solidFill>
                 <a:latin typeface="Meiryo"/>
+                <a:ea typeface="Meiryo"/>
               </a:rPr>
               <a:t>2018年〜 HCCJP立ち上げの頃</a:t>
             </a:r>
@@ -3873,6 +3882,7 @@
                   <a:srgbClr val="323130"/>
                 </a:solidFill>
                 <a:latin typeface="Meiryo"/>
+                <a:ea typeface="Meiryo"/>
               </a:rPr>
               <a:t>• 「ハイブリッドクラウド」は</a:t>
             </a:r>
@@ -3882,6 +3892,7 @@
                   <a:srgbClr val="323130"/>
                 </a:solidFill>
                 <a:latin typeface="Meiryo"/>
+                <a:ea typeface="Meiryo"/>
               </a:rPr>
               <a:t>ホットワード</a:t>
             </a:r>
@@ -3891,6 +3902,7 @@
                   <a:srgbClr val="323130"/>
                 </a:solidFill>
                 <a:latin typeface="Meiryo"/>
+                <a:ea typeface="Meiryo"/>
               </a:rPr>
               <a:t>だった</a:t>
             </a:r>
@@ -3907,6 +3919,7 @@
                   <a:srgbClr val="323130"/>
                 </a:solidFill>
                 <a:latin typeface="Meiryo"/>
+                <a:ea typeface="Meiryo"/>
               </a:rPr>
               <a:t>• Azure Stack (HUB)、AWS Outposts、Google Anthos…</a:t>
             </a:r>
@@ -3923,6 +3936,7 @@
                   <a:srgbClr val="323130"/>
                 </a:solidFill>
                 <a:latin typeface="Meiryo"/>
+                <a:ea typeface="Meiryo"/>
               </a:rPr>
               <a:t>• 各ベンダーが「ハイブリッドこそ未来」と言っていた</a:t>
             </a:r>
@@ -3939,6 +3953,7 @@
                   <a:srgbClr val="323130"/>
                 </a:solidFill>
                 <a:latin typeface="Meiryo"/>
+                <a:ea typeface="Meiryo"/>
               </a:rPr>
               <a:t>でも…</a:t>
             </a:r>
@@ -4069,6 +4084,7 @@
                   <a:srgbClr val="0078D4"/>
                 </a:solidFill>
                 <a:latin typeface="Meiryo"/>
+                <a:ea typeface="Meiryo"/>
               </a:rPr>
               <a:t>正直なところ</a:t>
             </a:r>
@@ -4151,6 +4167,7 @@
                   <a:srgbClr val="323130"/>
                 </a:solidFill>
                 <a:latin typeface="Meiryo"/>
+                <a:ea typeface="Meiryo"/>
               </a:rPr>
               <a:t>• 1つのシステムは</a:t>
             </a:r>
@@ -4160,6 +4177,7 @@
                   <a:srgbClr val="323130"/>
                 </a:solidFill>
                 <a:latin typeface="Meiryo"/>
+                <a:ea typeface="Meiryo"/>
               </a:rPr>
               <a:t>1箇所にまとまって動く</a:t>
             </a:r>
@@ -4169,6 +4187,7 @@
                   <a:srgbClr val="323130"/>
                 </a:solidFill>
                 <a:latin typeface="Meiryo"/>
+                <a:ea typeface="Meiryo"/>
               </a:rPr>
               <a:t>のが普通</a:t>
             </a:r>
@@ -4185,6 +4204,7 @@
                   <a:srgbClr val="323130"/>
                 </a:solidFill>
                 <a:latin typeface="Meiryo"/>
+                <a:ea typeface="Meiryo"/>
               </a:rPr>
               <a:t>• オンプレはオンプレ、クラウドはクラウド</a:t>
             </a:r>
@@ -4201,6 +4221,7 @@
                   <a:srgbClr val="323130"/>
                 </a:solidFill>
                 <a:latin typeface="Meiryo"/>
+                <a:ea typeface="Meiryo"/>
               </a:rPr>
               <a:t>• 「ハイブリッド」はネットワーク接続がメイン。管理コンソールの統合...までもなかなか行けなかった</a:t>
             </a:r>
@@ -4217,6 +4238,7 @@
                   <a:srgbClr val="323130"/>
                 </a:solidFill>
                 <a:latin typeface="Meiryo"/>
+                <a:ea typeface="Meiryo"/>
               </a:rPr>
               <a:t>• 1システム内でのワークロードの分散配置や移動ではなかった</a:t>
             </a:r>
@@ -4233,6 +4255,7 @@
                   <a:srgbClr val="323130"/>
                 </a:solidFill>
                 <a:latin typeface="Meiryo"/>
+                <a:ea typeface="Meiryo"/>
               </a:rPr>
               <a:t>→ </a:t>
             </a:r>
@@ -4242,6 +4265,7 @@
                   <a:srgbClr val="323130"/>
                 </a:solidFill>
                 <a:latin typeface="Meiryo"/>
+                <a:ea typeface="Meiryo"/>
               </a:rPr>
               <a:t>本当にハイブリッドに跨って動くシステムは少なかった</a:t>
             </a:r>
@@ -4377,6 +4401,7 @@
                   <a:srgbClr val="0078D4"/>
                 </a:solidFill>
                 <a:latin typeface="Meiryo"/>
+                <a:ea typeface="Meiryo"/>
               </a:rPr>
               <a:t>Part 2</a:t>
             </a:r>
@@ -4393,6 +4418,7 @@
                   <a:srgbClr val="0078D4"/>
                 </a:solidFill>
                 <a:latin typeface="Meiryo"/>
+                <a:ea typeface="Meiryo"/>
               </a:rPr>
               <a:t>時代は変わった</a:t>
             </a:r>
@@ -4523,6 +4549,7 @@
                   <a:srgbClr val="0078D4"/>
                 </a:solidFill>
                 <a:latin typeface="Meiryo"/>
+                <a:ea typeface="Meiryo"/>
               </a:rPr>
               <a:t>2025-2026年、AIエージェントの時代</a:t>
             </a:r>
@@ -4605,6 +4632,7 @@
                   <a:srgbClr val="323130"/>
                 </a:solidFill>
                 <a:latin typeface="Meiryo"/>
+                <a:ea typeface="Meiryo"/>
               </a:rPr>
               <a:t>• AIエージェント多数登場&amp;進化中 （Claude Code, Codex, Gemini CLI, GitHub Copilot CLI, Devin…）</a:t>
             </a:r>
@@ -4621,6 +4649,7 @@
                   <a:srgbClr val="323130"/>
                 </a:solidFill>
                 <a:latin typeface="Meiryo"/>
+                <a:ea typeface="Meiryo"/>
               </a:rPr>
               <a:t>• </a:t>
             </a:r>
@@ -4630,6 +4659,7 @@
                   <a:srgbClr val="323130"/>
                 </a:solidFill>
                 <a:latin typeface="Meiryo"/>
+                <a:ea typeface="Meiryo"/>
               </a:rPr>
               <a:t>1つのAIエージェントが、複数の場所を跨いで動く</a:t>
             </a:r>
@@ -4646,6 +4676,7 @@
                   <a:srgbClr val="323130"/>
                 </a:solidFill>
                 <a:latin typeface="Meiryo"/>
+                <a:ea typeface="Meiryo"/>
               </a:rPr>
               <a:t>→ これ、</a:t>
             </a:r>
@@ -4655,6 +4686,7 @@
                   <a:srgbClr val="323130"/>
                 </a:solidFill>
                 <a:latin typeface="Meiryo"/>
+                <a:ea typeface="Meiryo"/>
               </a:rPr>
               <a:t>本当のハイブリッドクラウド</a:t>
             </a:r>
@@ -4664,6 +4696,7 @@
                   <a:srgbClr val="323130"/>
                 </a:solidFill>
                 <a:latin typeface="Meiryo"/>
+                <a:ea typeface="Meiryo"/>
               </a:rPr>
               <a:t>じゃない？</a:t>
             </a:r>
@@ -4799,6 +4832,7 @@
                   <a:srgbClr val="0078D4"/>
                 </a:solidFill>
                 <a:latin typeface="Meiryo"/>
+                <a:ea typeface="Meiryo"/>
               </a:rPr>
               <a:t>Part 3</a:t>
             </a:r>
@@ -4815,6 +4849,7 @@
                   <a:srgbClr val="0078D4"/>
                 </a:solidFill>
                 <a:latin typeface="Meiryo"/>
+                <a:ea typeface="Meiryo"/>
               </a:rPr>
               <a:t>3つの要素 × 3つの配置先</a:t>
             </a:r>
@@ -4945,6 +4980,7 @@
                   <a:srgbClr val="0078D4"/>
                 </a:solidFill>
                 <a:latin typeface="Meiryo"/>
+                <a:ea typeface="Meiryo"/>
               </a:rPr>
               <a:t>⚠️ 今日一番伝えたいことの１つ！</a:t>
             </a:r>
@@ -5027,6 +5063,7 @@
                   <a:srgbClr val="0078D4"/>
                 </a:solidFill>
                 <a:latin typeface="Meiryo"/>
+                <a:ea typeface="Meiryo"/>
               </a:rPr>
               <a:t>難しいけどよく理解が必要！</a:t>
             </a:r>
@@ -5043,6 +5080,7 @@
                   <a:srgbClr val="323130"/>
                 </a:solidFill>
                 <a:latin typeface="Meiryo"/>
+                <a:ea typeface="Meiryo"/>
               </a:rPr>
               <a:t>※製品名・サービス名は覚えなくてOK。</a:t>
             </a:r>
@@ -5059,6 +5097,7 @@
                   <a:srgbClr val="323130"/>
                 </a:solidFill>
                 <a:latin typeface="Meiryo"/>
+                <a:ea typeface="Meiryo"/>
               </a:rPr>
               <a:t>注目してほしいのは表の中身ではなく「表の構造」そのもの。</a:t>
             </a:r>
@@ -5189,6 +5228,7 @@
                   <a:srgbClr val="0078D4"/>
                 </a:solidFill>
                 <a:latin typeface="Meiryo"/>
+                <a:ea typeface="Meiryo"/>
               </a:rPr>
               <a:t>AIエージェント時代のハイブリッドを整理する</a:t>
             </a:r>
@@ -5271,6 +5311,7 @@
                   <a:srgbClr val="0078D4"/>
                 </a:solidFill>
                 <a:latin typeface="Meiryo"/>
+                <a:ea typeface="Meiryo"/>
               </a:rPr>
               <a:t>3つの要素が、それぞれ自由な場所に配置される</a:t>
             </a:r>
@@ -5325,6 +5366,7 @@
                             <a:srgbClr val="243A5E"/>
                           </a:solidFill>
                           <a:latin typeface="Meiryo"/>
+                          <a:ea typeface="Meiryo"/>
                         </a:rPr>
                         <a:t>オンプレ</a:t>
                       </a:r>
@@ -5347,6 +5389,7 @@
                             <a:srgbClr val="243A5E"/>
                           </a:solidFill>
                           <a:latin typeface="Meiryo"/>
+                          <a:ea typeface="Meiryo"/>
                         </a:rPr>
                         <a:t>クラウド基盤（IaaS/PaaS）</a:t>
                       </a:r>
@@ -5369,6 +5412,7 @@
                             <a:srgbClr val="243A5E"/>
                           </a:solidFill>
                           <a:latin typeface="Meiryo"/>
+                          <a:ea typeface="Meiryo"/>
                         </a:rPr>
                         <a:t>SaaS</a:t>
                       </a:r>
@@ -5393,6 +5437,7 @@
                             <a:srgbClr val="323130"/>
                           </a:solidFill>
                           <a:latin typeface="Meiryo"/>
+                          <a:ea typeface="Meiryo"/>
                         </a:rPr>
                         <a:t>モデル(実行基盤)</a:t>
                       </a:r>
@@ -5411,6 +5456,7 @@
                             <a:srgbClr val="323130"/>
                           </a:solidFill>
                           <a:latin typeface="Meiryo"/>
+                          <a:ea typeface="Meiryo"/>
                         </a:rPr>
                         <a:t>Ollama, vLLM等</a:t>
                       </a:r>
@@ -5429,6 +5475,7 @@
                             <a:srgbClr val="323130"/>
                           </a:solidFill>
                           <a:latin typeface="Meiryo"/>
+                          <a:ea typeface="Meiryo"/>
                         </a:rPr>
                         <a:t>Microsoft Foundry等</a:t>
                       </a:r>
@@ -5447,6 +5494,7 @@
                             <a:srgbClr val="323130"/>
                           </a:solidFill>
                           <a:latin typeface="Meiryo"/>
+                          <a:ea typeface="Meiryo"/>
                         </a:rPr>
                         <a:t>OpenAI API, Anthropic API, Google AI API等</a:t>
                       </a:r>
@@ -5467,6 +5515,7 @@
                             <a:srgbClr val="323130"/>
                           </a:solidFill>
                           <a:latin typeface="Meiryo"/>
+                          <a:ea typeface="Meiryo"/>
                         </a:rPr>
                         <a:t>エージェントソフト</a:t>
                       </a:r>
@@ -5485,6 +5534,7 @@
                             <a:srgbClr val="323130"/>
                           </a:solidFill>
                           <a:latin typeface="Meiryo"/>
+                          <a:ea typeface="Meiryo"/>
                         </a:rPr>
                         <a:t>自作, Claude Code, Codex, Gemini CLI, GitHub Copilot CLI　など</a:t>
                       </a:r>
@@ -5511,6 +5561,7 @@
                             <a:srgbClr val="323130"/>
                           </a:solidFill>
                           <a:latin typeface="Meiryo"/>
+                          <a:ea typeface="Meiryo"/>
                         </a:rPr>
                         <a:t>GitHub Copilot Coding Agent, Claude Code on the Web, Devin　など</a:t>
                       </a:r>
@@ -5531,6 +5582,7 @@
                             <a:srgbClr val="323130"/>
                           </a:solidFill>
                           <a:latin typeface="Meiryo"/>
+                          <a:ea typeface="Meiryo"/>
                         </a:rPr>
                         <a:t>コンテキスト</a:t>
                       </a:r>
@@ -5549,6 +5601,7 @@
                             <a:srgbClr val="323130"/>
                           </a:solidFill>
                           <a:latin typeface="Meiryo"/>
+                          <a:ea typeface="Meiryo"/>
                         </a:rPr>
                         <a:t>ファイル（CLAUDE.md, フォルダ構造で工夫）/ Gitレポジトリ, GitLab / DB・ベクトルストア など</a:t>
                       </a:r>
@@ -5575,6 +5628,7 @@
                             <a:srgbClr val="323130"/>
                           </a:solidFill>
                           <a:latin typeface="Meiryo"/>
+                          <a:ea typeface="Meiryo"/>
                         </a:rPr>
                         <a:t>GitHubレポジトリ, Copilot Spaces, M365, WorkIQ, Google Workspaces, Notion 等(※API, MCP経由でどこでもつながる)</a:t>
                       </a:r>
@@ -5620,6 +5674,7 @@
                   <a:srgbClr val="323130"/>
                 </a:solidFill>
                 <a:latin typeface="Meiryo"/>
+                <a:ea typeface="Meiryo"/>
               </a:rPr>
               <a:t>• </a:t>
             </a:r>
@@ -5629,6 +5684,7 @@
                   <a:srgbClr val="323130"/>
                 </a:solidFill>
                 <a:latin typeface="Meiryo"/>
+                <a:ea typeface="Meiryo"/>
               </a:rPr>
               <a:t>3要素(それぞれ選択肢膨大) × 3配置先 = 無数の組み合わせ</a:t>
             </a:r>
@@ -5645,6 +5701,7 @@
                   <a:srgbClr val="323130"/>
                 </a:solidFill>
                 <a:latin typeface="Meiryo"/>
+                <a:ea typeface="Meiryo"/>
               </a:rPr>
               <a:t>• それぞれが別々の場所にあっていい</a:t>
             </a:r>
@@ -5780,6 +5837,7 @@
                   <a:srgbClr val="0078D4"/>
                 </a:solidFill>
                 <a:latin typeface="Meiryo"/>
+                <a:ea typeface="Meiryo"/>
               </a:rPr>
               <a:t>Part 4</a:t>
             </a:r>
@@ -5796,6 +5854,7 @@
                   <a:srgbClr val="0078D4"/>
                 </a:solidFill>
                 <a:latin typeface="Meiryo"/>
+                <a:ea typeface="Meiryo"/>
               </a:rPr>
               <a:t>具体例で見てみよう</a:t>
             </a:r>
@@ -5931,6 +5990,7 @@
                   <a:srgbClr val="0078D4"/>
                 </a:solidFill>
                 <a:latin typeface="Meiryo"/>
+                <a:ea typeface="Meiryo"/>
               </a:rPr>
               <a:t>AI時代の</a:t>
             </a:r>
@@ -5947,6 +6007,7 @@
                   <a:srgbClr val="0078D4"/>
                 </a:solidFill>
                 <a:latin typeface="Meiryo"/>
+                <a:ea typeface="Meiryo"/>
               </a:rPr>
               <a:t>「本当の」ハイブリッドクラウド</a:t>
             </a:r>
@@ -5963,6 +6024,7 @@
                   <a:srgbClr val="0078D4"/>
                 </a:solidFill>
                 <a:latin typeface="Meiryo"/>
+                <a:ea typeface="Meiryo"/>
               </a:rPr>
               <a:t>エージェントが実現した、あの頃の夢</a:t>
             </a:r>
@@ -6093,6 +6155,7 @@
                   <a:srgbClr val="0078D4"/>
                 </a:solidFill>
                 <a:latin typeface="Meiryo"/>
+                <a:ea typeface="Meiryo"/>
               </a:rPr>
               <a:t>例1: M365 Copilot — フルSaaS構成</a:t>
             </a:r>
@@ -6183,11 +6246,12 @@
           <a:p>
             <a:pPr algn="ctr"/>
             <a:r>
-              <a:rPr sz="1900">
+              <a:rPr sz="1900" kern="0" spc="0">
                 <a:solidFill>
                   <a:srgbClr val="323130"/>
                 </a:solidFill>
                 <a:latin typeface="MS Gothic"/>
+                <a:ea typeface="MS Gothic"/>
               </a:rPr>
               <a:t>+-------------------------------------------------------+
 |                  Microsoft 365 (SaaS)                 |
@@ -6235,6 +6299,7 @@
                   <a:srgbClr val="323130"/>
                 </a:solidFill>
                 <a:latin typeface="Meiryo"/>
+                <a:ea typeface="Meiryo"/>
               </a:rPr>
               <a:t>• </a:t>
             </a:r>
@@ -6244,6 +6309,7 @@
                   <a:srgbClr val="323130"/>
                 </a:solidFill>
                 <a:latin typeface="Meiryo"/>
+                <a:ea typeface="Meiryo"/>
               </a:rPr>
               <a:t>モデル</a:t>
             </a:r>
@@ -6253,6 +6319,7 @@
                   <a:srgbClr val="323130"/>
                 </a:solidFill>
                 <a:latin typeface="Meiryo"/>
+                <a:ea typeface="Meiryo"/>
               </a:rPr>
               <a:t> </a:t>
             </a:r>
@@ -6262,6 +6329,7 @@
                   <a:srgbClr val="C62828"/>
                 </a:solidFill>
                 <a:latin typeface="Meiryo"/>
+                <a:ea typeface="Meiryo"/>
               </a:rPr>
               <a:t>SaaS</a:t>
             </a:r>
@@ -6271,6 +6339,7 @@
                   <a:srgbClr val="323130"/>
                 </a:solidFill>
                 <a:latin typeface="Meiryo"/>
+                <a:ea typeface="Meiryo"/>
               </a:rPr>
               <a:t> / </a:t>
             </a:r>
@@ -6280,6 +6349,7 @@
                   <a:srgbClr val="323130"/>
                 </a:solidFill>
                 <a:latin typeface="Meiryo"/>
+                <a:ea typeface="Meiryo"/>
               </a:rPr>
               <a:t>エージェントソフト</a:t>
             </a:r>
@@ -6289,6 +6359,7 @@
                   <a:srgbClr val="323130"/>
                 </a:solidFill>
                 <a:latin typeface="Meiryo"/>
+                <a:ea typeface="Meiryo"/>
               </a:rPr>
               <a:t> </a:t>
             </a:r>
@@ -6298,6 +6369,7 @@
                   <a:srgbClr val="C62828"/>
                 </a:solidFill>
                 <a:latin typeface="Meiryo"/>
+                <a:ea typeface="Meiryo"/>
               </a:rPr>
               <a:t>SaaS</a:t>
             </a:r>
@@ -6307,6 +6379,7 @@
                   <a:srgbClr val="323130"/>
                 </a:solidFill>
                 <a:latin typeface="Meiryo"/>
+                <a:ea typeface="Meiryo"/>
               </a:rPr>
               <a:t> / </a:t>
             </a:r>
@@ -6316,6 +6389,7 @@
                   <a:srgbClr val="323130"/>
                 </a:solidFill>
                 <a:latin typeface="Meiryo"/>
+                <a:ea typeface="Meiryo"/>
               </a:rPr>
               <a:t>コンテキスト</a:t>
             </a:r>
@@ -6325,6 +6399,7 @@
                   <a:srgbClr val="323130"/>
                 </a:solidFill>
                 <a:latin typeface="Meiryo"/>
+                <a:ea typeface="Meiryo"/>
               </a:rPr>
               <a:t> </a:t>
             </a:r>
@@ -6334,6 +6409,7 @@
                   <a:srgbClr val="C62828"/>
                 </a:solidFill>
                 <a:latin typeface="Meiryo"/>
+                <a:ea typeface="Meiryo"/>
               </a:rPr>
               <a:t>SaaS</a:t>
             </a:r>
@@ -6350,6 +6426,7 @@
                   <a:srgbClr val="323130"/>
                 </a:solidFill>
                 <a:latin typeface="Meiryo"/>
+                <a:ea typeface="Meiryo"/>
               </a:rPr>
               <a:t>• → </a:t>
             </a:r>
@@ -6359,6 +6436,7 @@
                   <a:srgbClr val="323130"/>
                 </a:solidFill>
                 <a:latin typeface="Meiryo"/>
+                <a:ea typeface="Meiryo"/>
               </a:rPr>
               <a:t>すべてSaaS。多くの企業が最初に触れるAIエージェント体験</a:t>
             </a:r>
@@ -6489,6 +6567,7 @@
                   <a:srgbClr val="0078D4"/>
                 </a:solidFill>
                 <a:latin typeface="Meiryo"/>
+                <a:ea typeface="Meiryo"/>
               </a:rPr>
               <a:t>例2: 典型的なRAG構成（Azure）</a:t>
             </a:r>
@@ -6579,11 +6658,12 @@
           <a:p>
             <a:pPr algn="ctr"/>
             <a:r>
-              <a:rPr sz="1400">
+              <a:rPr sz="1400" kern="0" spc="0">
                 <a:solidFill>
                   <a:srgbClr val="323130"/>
                 </a:solidFill>
                 <a:latin typeface="MS Gothic"/>
+                <a:ea typeface="MS Gothic"/>
               </a:rPr>
               <a:t>+----------------------------------------------------+ 
 |                   Azure (クラウド基盤)              |
@@ -6636,6 +6716,7 @@
                   <a:srgbClr val="323130"/>
                 </a:solidFill>
                 <a:latin typeface="Meiryo"/>
+                <a:ea typeface="Meiryo"/>
               </a:rPr>
               <a:t>• </a:t>
             </a:r>
@@ -6645,6 +6726,7 @@
                   <a:srgbClr val="323130"/>
                 </a:solidFill>
                 <a:latin typeface="Meiryo"/>
+                <a:ea typeface="Meiryo"/>
               </a:rPr>
               <a:t>モデル</a:t>
             </a:r>
@@ -6654,6 +6736,7 @@
                   <a:srgbClr val="323130"/>
                 </a:solidFill>
                 <a:latin typeface="Meiryo"/>
+                <a:ea typeface="Meiryo"/>
               </a:rPr>
               <a:t> </a:t>
             </a:r>
@@ -6663,6 +6746,7 @@
                   <a:srgbClr val="1565C0"/>
                 </a:solidFill>
                 <a:latin typeface="Meiryo"/>
+                <a:ea typeface="Meiryo"/>
               </a:rPr>
               <a:t>クラウド基盤</a:t>
             </a:r>
@@ -6672,6 +6756,7 @@
                   <a:srgbClr val="323130"/>
                 </a:solidFill>
                 <a:latin typeface="Meiryo"/>
+                <a:ea typeface="Meiryo"/>
               </a:rPr>
               <a:t> / </a:t>
             </a:r>
@@ -6681,6 +6766,7 @@
                   <a:srgbClr val="323130"/>
                 </a:solidFill>
                 <a:latin typeface="Meiryo"/>
+                <a:ea typeface="Meiryo"/>
               </a:rPr>
               <a:t>エージェントソフト</a:t>
             </a:r>
@@ -6690,6 +6776,7 @@
                   <a:srgbClr val="323130"/>
                 </a:solidFill>
                 <a:latin typeface="Meiryo"/>
+                <a:ea typeface="Meiryo"/>
               </a:rPr>
               <a:t> </a:t>
             </a:r>
@@ -6699,6 +6786,7 @@
                   <a:srgbClr val="1565C0"/>
                 </a:solidFill>
                 <a:latin typeface="Meiryo"/>
+                <a:ea typeface="Meiryo"/>
               </a:rPr>
               <a:t>クラウド基盤</a:t>
             </a:r>
@@ -6708,6 +6796,7 @@
                   <a:srgbClr val="323130"/>
                 </a:solidFill>
                 <a:latin typeface="Meiryo"/>
+                <a:ea typeface="Meiryo"/>
               </a:rPr>
               <a:t> / </a:t>
             </a:r>
@@ -6717,6 +6806,7 @@
                   <a:srgbClr val="323130"/>
                 </a:solidFill>
                 <a:latin typeface="Meiryo"/>
+                <a:ea typeface="Meiryo"/>
               </a:rPr>
               <a:t>コンテキスト</a:t>
             </a:r>
@@ -6726,6 +6816,7 @@
                   <a:srgbClr val="323130"/>
                 </a:solidFill>
                 <a:latin typeface="Meiryo"/>
+                <a:ea typeface="Meiryo"/>
               </a:rPr>
               <a:t> </a:t>
             </a:r>
@@ -6735,6 +6826,7 @@
                   <a:srgbClr val="1565C0"/>
                 </a:solidFill>
                 <a:latin typeface="Meiryo"/>
+                <a:ea typeface="Meiryo"/>
               </a:rPr>
               <a:t>クラウド基盤</a:t>
             </a:r>
@@ -6751,6 +6843,7 @@
                   <a:srgbClr val="323130"/>
                 </a:solidFill>
                 <a:latin typeface="Meiryo"/>
+                <a:ea typeface="Meiryo"/>
               </a:rPr>
               <a:t>• → </a:t>
             </a:r>
@@ -6760,6 +6853,7 @@
                   <a:srgbClr val="323130"/>
                 </a:solidFill>
                 <a:latin typeface="Meiryo"/>
+                <a:ea typeface="Meiryo"/>
               </a:rPr>
               <a:t>すべてクラウド基盤。自前で構築・管理する典型的なエンタープライズ構成</a:t>
             </a:r>
@@ -6890,6 +6984,7 @@
                   <a:srgbClr val="0078D4"/>
                 </a:solidFill>
                 <a:latin typeface="Meiryo"/>
+                <a:ea typeface="Meiryo"/>
               </a:rPr>
               <a:t>例3: 典型的なRAG構成（オンプレ）</a:t>
             </a:r>
@@ -6980,11 +7075,12 @@
           <a:p>
             <a:pPr algn="ctr"/>
             <a:r>
-              <a:rPr sz="1400">
+              <a:rPr sz="1400" kern="0" spc="0">
                 <a:solidFill>
                   <a:srgbClr val="323130"/>
                 </a:solidFill>
                 <a:latin typeface="MS Gothic"/>
+                <a:ea typeface="MS Gothic"/>
               </a:rPr>
               <a:t>+----------------------------------------------------+  
 |                 社内データセンター (オンプレ)        |
@@ -7037,6 +7133,7 @@
                   <a:srgbClr val="323130"/>
                 </a:solidFill>
                 <a:latin typeface="Meiryo"/>
+                <a:ea typeface="Meiryo"/>
               </a:rPr>
               <a:t>• </a:t>
             </a:r>
@@ -7046,6 +7143,7 @@
                   <a:srgbClr val="323130"/>
                 </a:solidFill>
                 <a:latin typeface="Meiryo"/>
+                <a:ea typeface="Meiryo"/>
               </a:rPr>
               <a:t>モデル</a:t>
             </a:r>
@@ -7055,6 +7153,7 @@
                   <a:srgbClr val="323130"/>
                 </a:solidFill>
                 <a:latin typeface="Meiryo"/>
+                <a:ea typeface="Meiryo"/>
               </a:rPr>
               <a:t> </a:t>
             </a:r>
@@ -7064,6 +7163,7 @@
                   <a:srgbClr val="2E7D32"/>
                 </a:solidFill>
                 <a:latin typeface="Meiryo"/>
+                <a:ea typeface="Meiryo"/>
               </a:rPr>
               <a:t>オンプレ</a:t>
             </a:r>
@@ -7073,6 +7173,7 @@
                   <a:srgbClr val="323130"/>
                 </a:solidFill>
                 <a:latin typeface="Meiryo"/>
+                <a:ea typeface="Meiryo"/>
               </a:rPr>
               <a:t> / </a:t>
             </a:r>
@@ -7082,6 +7183,7 @@
                   <a:srgbClr val="323130"/>
                 </a:solidFill>
                 <a:latin typeface="Meiryo"/>
+                <a:ea typeface="Meiryo"/>
               </a:rPr>
               <a:t>エージェントソフト</a:t>
             </a:r>
@@ -7091,6 +7193,7 @@
                   <a:srgbClr val="323130"/>
                 </a:solidFill>
                 <a:latin typeface="Meiryo"/>
+                <a:ea typeface="Meiryo"/>
               </a:rPr>
               <a:t> </a:t>
             </a:r>
@@ -7100,6 +7203,7 @@
                   <a:srgbClr val="2E7D32"/>
                 </a:solidFill>
                 <a:latin typeface="Meiryo"/>
+                <a:ea typeface="Meiryo"/>
               </a:rPr>
               <a:t>オンプレ</a:t>
             </a:r>
@@ -7109,6 +7213,7 @@
                   <a:srgbClr val="323130"/>
                 </a:solidFill>
                 <a:latin typeface="Meiryo"/>
+                <a:ea typeface="Meiryo"/>
               </a:rPr>
               <a:t> / </a:t>
             </a:r>
@@ -7118,6 +7223,7 @@
                   <a:srgbClr val="323130"/>
                 </a:solidFill>
                 <a:latin typeface="Meiryo"/>
+                <a:ea typeface="Meiryo"/>
               </a:rPr>
               <a:t>コンテキスト</a:t>
             </a:r>
@@ -7127,6 +7233,7 @@
                   <a:srgbClr val="323130"/>
                 </a:solidFill>
                 <a:latin typeface="Meiryo"/>
+                <a:ea typeface="Meiryo"/>
               </a:rPr>
               <a:t> </a:t>
             </a:r>
@@ -7136,6 +7243,7 @@
                   <a:srgbClr val="2E7D32"/>
                 </a:solidFill>
                 <a:latin typeface="Meiryo"/>
+                <a:ea typeface="Meiryo"/>
               </a:rPr>
               <a:t>オンプレ</a:t>
             </a:r>
@@ -7152,6 +7260,7 @@
                   <a:srgbClr val="323130"/>
                 </a:solidFill>
                 <a:latin typeface="Meiryo"/>
+                <a:ea typeface="Meiryo"/>
               </a:rPr>
               <a:t>• → </a:t>
             </a:r>
@@ -7161,6 +7270,7 @@
                   <a:srgbClr val="323130"/>
                 </a:solidFill>
                 <a:latin typeface="Meiryo"/>
+                <a:ea typeface="Meiryo"/>
               </a:rPr>
               <a:t>すべてオンプレ。データを外に出せない要件がある場合の構成</a:t>
             </a:r>
@@ -7291,6 +7401,7 @@
                   <a:srgbClr val="0078D4"/>
                 </a:solidFill>
                 <a:latin typeface="Meiryo"/>
+                <a:ea typeface="Meiryo"/>
               </a:rPr>
               <a:t>例4: GitHub Copilot CLI</a:t>
             </a:r>
@@ -7381,11 +7492,12 @@
           <a:p>
             <a:pPr algn="ctr"/>
             <a:r>
-              <a:rPr sz="1400">
+              <a:rPr sz="1400" kern="0" spc="0">
                 <a:solidFill>
                   <a:srgbClr val="323130"/>
                 </a:solidFill>
                 <a:latin typeface="MS Gothic"/>
+                <a:ea typeface="MS Gothic"/>
               </a:rPr>
               <a:t>+-------------------+          +------------------------+
 |    ローカル       |          |    GitHub (クラウド)   |
@@ -7436,6 +7548,7 @@
                   <a:srgbClr val="323130"/>
                 </a:solidFill>
                 <a:latin typeface="Meiryo"/>
+                <a:ea typeface="Meiryo"/>
               </a:rPr>
               <a:t>• </a:t>
             </a:r>
@@ -7445,6 +7558,7 @@
                   <a:srgbClr val="323130"/>
                 </a:solidFill>
                 <a:latin typeface="Meiryo"/>
+                <a:ea typeface="Meiryo"/>
               </a:rPr>
               <a:t>モデル</a:t>
             </a:r>
@@ -7454,6 +7568,7 @@
                   <a:srgbClr val="323130"/>
                 </a:solidFill>
                 <a:latin typeface="Meiryo"/>
+                <a:ea typeface="Meiryo"/>
               </a:rPr>
               <a:t> </a:t>
             </a:r>
@@ -7463,6 +7578,7 @@
                   <a:srgbClr val="C62828"/>
                 </a:solidFill>
                 <a:latin typeface="Meiryo"/>
+                <a:ea typeface="Meiryo"/>
               </a:rPr>
               <a:t>SaaS</a:t>
             </a:r>
@@ -7472,6 +7588,7 @@
                   <a:srgbClr val="323130"/>
                 </a:solidFill>
                 <a:latin typeface="Meiryo"/>
+                <a:ea typeface="Meiryo"/>
               </a:rPr>
               <a:t> GPT / Claude / Gemini（選択可）</a:t>
             </a:r>
@@ -7488,6 +7605,7 @@
                   <a:srgbClr val="323130"/>
                 </a:solidFill>
                 <a:latin typeface="Meiryo"/>
+                <a:ea typeface="Meiryo"/>
               </a:rPr>
               <a:t>• </a:t>
             </a:r>
@@ -7497,6 +7615,7 @@
                   <a:srgbClr val="323130"/>
                 </a:solidFill>
                 <a:latin typeface="Meiryo"/>
+                <a:ea typeface="Meiryo"/>
               </a:rPr>
               <a:t>エージェントソフト</a:t>
             </a:r>
@@ -7506,6 +7625,7 @@
                   <a:srgbClr val="323130"/>
                 </a:solidFill>
                 <a:latin typeface="Meiryo"/>
+                <a:ea typeface="Meiryo"/>
               </a:rPr>
               <a:t> </a:t>
             </a:r>
@@ -7515,6 +7635,7 @@
                   <a:srgbClr val="2E7D32"/>
                 </a:solidFill>
                 <a:latin typeface="Meiryo"/>
+                <a:ea typeface="Meiryo"/>
               </a:rPr>
               <a:t>オンプレ</a:t>
             </a:r>
@@ -7524,6 +7645,7 @@
                   <a:srgbClr val="323130"/>
                 </a:solidFill>
                 <a:latin typeface="Meiryo"/>
+                <a:ea typeface="Meiryo"/>
               </a:rPr>
               <a:t> Copilot CLI（ローカルPC）</a:t>
             </a:r>
@@ -7540,6 +7662,7 @@
                   <a:srgbClr val="323130"/>
                 </a:solidFill>
                 <a:latin typeface="Meiryo"/>
+                <a:ea typeface="Meiryo"/>
               </a:rPr>
               <a:t>• </a:t>
             </a:r>
@@ -7549,6 +7672,7 @@
                   <a:srgbClr val="323130"/>
                 </a:solidFill>
                 <a:latin typeface="Meiryo"/>
+                <a:ea typeface="Meiryo"/>
               </a:rPr>
               <a:t>コンテキスト</a:t>
             </a:r>
@@ -7558,6 +7682,7 @@
                   <a:srgbClr val="323130"/>
                 </a:solidFill>
                 <a:latin typeface="Meiryo"/>
+                <a:ea typeface="Meiryo"/>
               </a:rPr>
               <a:t> </a:t>
             </a:r>
@@ -7567,6 +7692,7 @@
                   <a:srgbClr val="2E7D32"/>
                 </a:solidFill>
                 <a:latin typeface="Meiryo"/>
+                <a:ea typeface="Meiryo"/>
               </a:rPr>
               <a:t>オンプレ</a:t>
             </a:r>
@@ -7576,6 +7702,7 @@
                   <a:srgbClr val="323130"/>
                 </a:solidFill>
                 <a:latin typeface="Meiryo"/>
+                <a:ea typeface="Meiryo"/>
               </a:rPr>
               <a:t> ソースコード等 + </a:t>
             </a:r>
@@ -7585,6 +7712,7 @@
                   <a:srgbClr val="C62828"/>
                 </a:solidFill>
                 <a:latin typeface="Meiryo"/>
+                <a:ea typeface="Meiryo"/>
               </a:rPr>
               <a:t>SaaS</a:t>
             </a:r>
@@ -7594,6 +7722,7 @@
                   <a:srgbClr val="323130"/>
                 </a:solidFill>
                 <a:latin typeface="Meiryo"/>
+                <a:ea typeface="Meiryo"/>
               </a:rPr>
               <a:t> GitHub Issues, Copilot Spaces</a:t>
             </a:r>
@@ -7724,6 +7853,7 @@
                   <a:srgbClr val="0078D4"/>
                 </a:solidFill>
                 <a:latin typeface="Meiryo"/>
+                <a:ea typeface="Meiryo"/>
               </a:rPr>
               <a:t>例5: 私の環境（Claude Code）</a:t>
             </a:r>
@@ -7814,11 +7944,12 @@
           <a:p>
             <a:pPr algn="ctr"/>
             <a:r>
-              <a:rPr sz="1200">
+              <a:rPr sz="1200" kern="0" spc="0">
                 <a:solidFill>
                   <a:srgbClr val="323130"/>
                 </a:solidFill>
                 <a:latin typeface="MS Gothic"/>
+                <a:ea typeface="MS Gothic"/>
               </a:rPr>
               <a:t>+-------------------+          +------------------------+
 |    ローカル       |          |       クラウド         |
@@ -7870,6 +8001,7 @@
                   <a:srgbClr val="323130"/>
                 </a:solidFill>
                 <a:latin typeface="Meiryo"/>
+                <a:ea typeface="Meiryo"/>
               </a:rPr>
               <a:t>• </a:t>
             </a:r>
@@ -7879,6 +8011,7 @@
                   <a:srgbClr val="323130"/>
                 </a:solidFill>
                 <a:latin typeface="Meiryo"/>
+                <a:ea typeface="Meiryo"/>
               </a:rPr>
               <a:t>モデル</a:t>
             </a:r>
@@ -7888,6 +8021,7 @@
                   <a:srgbClr val="323130"/>
                 </a:solidFill>
                 <a:latin typeface="Meiryo"/>
+                <a:ea typeface="Meiryo"/>
               </a:rPr>
               <a:t> </a:t>
             </a:r>
@@ -7897,6 +8031,7 @@
                   <a:srgbClr val="C62828"/>
                 </a:solidFill>
                 <a:latin typeface="Meiryo"/>
+                <a:ea typeface="Meiryo"/>
               </a:rPr>
               <a:t>SaaS</a:t>
             </a:r>
@@ -7906,6 +8041,7 @@
                   <a:srgbClr val="323130"/>
                 </a:solidFill>
                 <a:latin typeface="Meiryo"/>
+                <a:ea typeface="Meiryo"/>
               </a:rPr>
               <a:t> Anthropic API</a:t>
             </a:r>
@@ -7922,6 +8058,7 @@
                   <a:srgbClr val="323130"/>
                 </a:solidFill>
                 <a:latin typeface="Meiryo"/>
+                <a:ea typeface="Meiryo"/>
               </a:rPr>
               <a:t>• </a:t>
             </a:r>
@@ -7931,6 +8068,7 @@
                   <a:srgbClr val="323130"/>
                 </a:solidFill>
                 <a:latin typeface="Meiryo"/>
+                <a:ea typeface="Meiryo"/>
               </a:rPr>
               <a:t>エージェントソフト</a:t>
             </a:r>
@@ -7940,6 +8078,7 @@
                   <a:srgbClr val="323130"/>
                 </a:solidFill>
                 <a:latin typeface="Meiryo"/>
+                <a:ea typeface="Meiryo"/>
               </a:rPr>
               <a:t> </a:t>
             </a:r>
@@ -7949,6 +8088,7 @@
                   <a:srgbClr val="2E7D32"/>
                 </a:solidFill>
                 <a:latin typeface="Meiryo"/>
+                <a:ea typeface="Meiryo"/>
               </a:rPr>
               <a:t>オンプレ</a:t>
             </a:r>
@@ -7958,6 +8098,7 @@
                   <a:srgbClr val="323130"/>
                 </a:solidFill>
                 <a:latin typeface="Meiryo"/>
+                <a:ea typeface="Meiryo"/>
               </a:rPr>
               <a:t> Claude Code（ローカルPC）</a:t>
             </a:r>
@@ -7974,6 +8115,7 @@
                   <a:srgbClr val="323130"/>
                 </a:solidFill>
                 <a:latin typeface="Meiryo"/>
+                <a:ea typeface="Meiryo"/>
               </a:rPr>
               <a:t>• </a:t>
             </a:r>
@@ -7983,6 +8125,7 @@
                   <a:srgbClr val="323130"/>
                 </a:solidFill>
                 <a:latin typeface="Meiryo"/>
+                <a:ea typeface="Meiryo"/>
               </a:rPr>
               <a:t>コンテキスト</a:t>
             </a:r>
@@ -7992,6 +8135,7 @@
                   <a:srgbClr val="323130"/>
                 </a:solidFill>
                 <a:latin typeface="Meiryo"/>
+                <a:ea typeface="Meiryo"/>
               </a:rPr>
               <a:t> </a:t>
             </a:r>
@@ -8001,6 +8145,7 @@
                   <a:srgbClr val="2E7D32"/>
                 </a:solidFill>
                 <a:latin typeface="Meiryo"/>
+                <a:ea typeface="Meiryo"/>
               </a:rPr>
               <a:t>オンプレ</a:t>
             </a:r>
@@ -8010,6 +8155,7 @@
                   <a:srgbClr val="323130"/>
                 </a:solidFill>
                 <a:latin typeface="Meiryo"/>
+                <a:ea typeface="Meiryo"/>
               </a:rPr>
               <a:t> CLAUDE.md, Obsidian等 + </a:t>
             </a:r>
@@ -8019,6 +8165,7 @@
                   <a:srgbClr val="C62828"/>
                 </a:solidFill>
                 <a:latin typeface="Meiryo"/>
+                <a:ea typeface="Meiryo"/>
               </a:rPr>
               <a:t>SaaS</a:t>
             </a:r>
@@ -8028,6 +8175,7 @@
                   <a:srgbClr val="323130"/>
                 </a:solidFill>
                 <a:latin typeface="Meiryo"/>
+                <a:ea typeface="Meiryo"/>
               </a:rPr>
               <a:t> GitHub, Todoist等</a:t>
             </a:r>
@@ -8044,6 +8192,7 @@
                   <a:srgbClr val="323130"/>
                 </a:solidFill>
                 <a:latin typeface="Meiryo"/>
+                <a:ea typeface="Meiryo"/>
               </a:rPr>
               <a:t>    • 必要な情報はClaude Code自体が必要に応じてエージェンティックに取得する</a:t>
             </a:r>
@@ -8174,6 +8323,7 @@
                   <a:srgbClr val="0078D4"/>
                 </a:solidFill>
                 <a:latin typeface="Meiryo"/>
+                <a:ea typeface="Meiryo"/>
               </a:rPr>
               <a:t>例6: 前回(第70回)の勉強会の例（DGX Spark × Azure）</a:t>
             </a:r>
@@ -8264,11 +8414,12 @@
           <a:p>
             <a:pPr algn="ctr"/>
             <a:r>
-              <a:rPr sz="1000">
+              <a:rPr sz="1000" kern="0" spc="0">
                 <a:solidFill>
                   <a:srgbClr val="323130"/>
                 </a:solidFill>
                 <a:latin typeface="MS Gothic"/>
+                <a:ea typeface="MS Gothic"/>
               </a:rPr>
               <a:t>+------------------------+       +----------------------------+
 |         Azure          |       |       オンプレミス         |
@@ -8322,6 +8473,7 @@
                   <a:srgbClr val="323130"/>
                 </a:solidFill>
                 <a:latin typeface="Meiryo"/>
+                <a:ea typeface="Meiryo"/>
               </a:rPr>
               <a:t>• </a:t>
             </a:r>
@@ -8331,6 +8483,7 @@
                   <a:srgbClr val="323130"/>
                 </a:solidFill>
                 <a:latin typeface="Meiryo"/>
+                <a:ea typeface="Meiryo"/>
               </a:rPr>
               <a:t>モデル</a:t>
             </a:r>
@@ -8340,6 +8493,7 @@
                   <a:srgbClr val="323130"/>
                 </a:solidFill>
                 <a:latin typeface="Meiryo"/>
+                <a:ea typeface="Meiryo"/>
               </a:rPr>
               <a:t> </a:t>
             </a:r>
@@ -8349,6 +8503,7 @@
                   <a:srgbClr val="2E7D32"/>
                 </a:solidFill>
                 <a:latin typeface="Meiryo"/>
+                <a:ea typeface="Meiryo"/>
               </a:rPr>
               <a:t>オンプレ</a:t>
             </a:r>
@@ -8358,6 +8513,7 @@
                   <a:srgbClr val="323130"/>
                 </a:solidFill>
                 <a:latin typeface="Meiryo"/>
+                <a:ea typeface="Meiryo"/>
               </a:rPr>
               <a:t> DGX Spark + </a:t>
             </a:r>
@@ -8367,6 +8523,7 @@
                   <a:srgbClr val="1565C0"/>
                 </a:solidFill>
                 <a:latin typeface="Meiryo"/>
+                <a:ea typeface="Meiryo"/>
               </a:rPr>
               <a:t>クラウド基盤</a:t>
             </a:r>
@@ -8376,6 +8533,7 @@
                   <a:srgbClr val="323130"/>
                 </a:solidFill>
                 <a:latin typeface="Meiryo"/>
+                <a:ea typeface="Meiryo"/>
               </a:rPr>
               <a:t> Microsoft Foundry（フォールバック）</a:t>
             </a:r>
@@ -8392,6 +8550,7 @@
                   <a:srgbClr val="323130"/>
                 </a:solidFill>
                 <a:latin typeface="Meiryo"/>
+                <a:ea typeface="Meiryo"/>
               </a:rPr>
               <a:t>• </a:t>
             </a:r>
@@ -8401,6 +8560,7 @@
                   <a:srgbClr val="323130"/>
                 </a:solidFill>
                 <a:latin typeface="Meiryo"/>
+                <a:ea typeface="Meiryo"/>
               </a:rPr>
               <a:t>エージェントソフト</a:t>
             </a:r>
@@ -8410,6 +8570,7 @@
                   <a:srgbClr val="323130"/>
                 </a:solidFill>
                 <a:latin typeface="Meiryo"/>
+                <a:ea typeface="Meiryo"/>
               </a:rPr>
               <a:t> </a:t>
             </a:r>
@@ -8419,6 +8580,7 @@
                   <a:srgbClr val="1565C0"/>
                 </a:solidFill>
                 <a:latin typeface="Meiryo"/>
+                <a:ea typeface="Meiryo"/>
               </a:rPr>
               <a:t>クラウド基盤</a:t>
             </a:r>
@@ -8428,6 +8590,7 @@
                   <a:srgbClr val="323130"/>
                 </a:solidFill>
                 <a:latin typeface="Meiryo"/>
+                <a:ea typeface="Meiryo"/>
               </a:rPr>
               <a:t> 自作（Azure Agent SDK on App Service）</a:t>
             </a:r>
@@ -8444,6 +8607,7 @@
                   <a:srgbClr val="323130"/>
                 </a:solidFill>
                 <a:latin typeface="Meiryo"/>
+                <a:ea typeface="Meiryo"/>
               </a:rPr>
               <a:t>• </a:t>
             </a:r>
@@ -8453,6 +8617,7 @@
                   <a:srgbClr val="323130"/>
                 </a:solidFill>
                 <a:latin typeface="Meiryo"/>
+                <a:ea typeface="Meiryo"/>
               </a:rPr>
               <a:t>コンテキスト</a:t>
             </a:r>
@@ -8462,6 +8627,7 @@
                   <a:srgbClr val="323130"/>
                 </a:solidFill>
                 <a:latin typeface="Meiryo"/>
+                <a:ea typeface="Meiryo"/>
               </a:rPr>
               <a:t> </a:t>
             </a:r>
@@ -8471,6 +8637,7 @@
                   <a:srgbClr val="C62828"/>
                 </a:solidFill>
                 <a:latin typeface="Meiryo"/>
+                <a:ea typeface="Meiryo"/>
               </a:rPr>
               <a:t>SaaS</a:t>
             </a:r>
@@ -8480,6 +8647,7 @@
                   <a:srgbClr val="323130"/>
                 </a:solidFill>
                 <a:latin typeface="Meiryo"/>
+                <a:ea typeface="Meiryo"/>
               </a:rPr>
               <a:t> SharePoint内の社内ドキュメント</a:t>
             </a:r>
@@ -8615,6 +8783,7 @@
                   <a:srgbClr val="323130"/>
                 </a:solidFill>
                 <a:latin typeface="Meiryo"/>
+                <a:ea typeface="Meiryo"/>
               </a:rPr>
               <a:t>同じモデルでも、エージェントソフトが違えば動きが違う。</a:t>
             </a:r>
@@ -8624,6 +8793,7 @@
                   <a:srgbClr val="323130"/>
                 </a:solidFill>
                 <a:latin typeface="Meiryo"/>
+                <a:ea typeface="Meiryo"/>
               </a:rPr>
               <a:t>
 </a:t>
@@ -8634,6 +8804,7 @@
                   <a:srgbClr val="323130"/>
                 </a:solidFill>
                 <a:latin typeface="Meiryo"/>
+                <a:ea typeface="Meiryo"/>
               </a:rPr>
               <a:t>同じエージェントソフトでも、配置先が違えば使い方が変わる。</a:t>
             </a:r>
@@ -8769,6 +8940,7 @@
                   <a:srgbClr val="0078D4"/>
                 </a:solidFill>
                 <a:latin typeface="Meiryo"/>
+                <a:ea typeface="Meiryo"/>
               </a:rPr>
               <a:t>Part 5</a:t>
             </a:r>
@@ -8785,6 +8957,7 @@
                   <a:srgbClr val="0078D4"/>
                 </a:solidFill>
                 <a:latin typeface="Meiryo"/>
+                <a:ea typeface="Meiryo"/>
               </a:rPr>
               <a:t>AIエージェントにおける「引き継ぎ」</a:t>
             </a:r>
@@ -8915,6 +9088,7 @@
                   <a:srgbClr val="0078D4"/>
                 </a:solidFill>
                 <a:latin typeface="Meiryo"/>
+                <a:ea typeface="Meiryo"/>
               </a:rPr>
               <a:t>問いかけ</a:t>
             </a:r>
@@ -8997,6 +9171,7 @@
                   <a:srgbClr val="0078D4"/>
                 </a:solidFill>
                 <a:latin typeface="Meiryo"/>
+                <a:ea typeface="Meiryo"/>
               </a:rPr>
               <a:t>エージェントの「作業」を</a:t>
             </a:r>
@@ -9013,6 +9188,7 @@
                   <a:srgbClr val="0078D4"/>
                 </a:solidFill>
                 <a:latin typeface="Meiryo"/>
+                <a:ea typeface="Meiryo"/>
               </a:rPr>
               <a:t>別の場所に持っていけるとしたら？</a:t>
             </a:r>
@@ -9029,6 +9205,7 @@
                   <a:srgbClr val="323130"/>
                 </a:solidFill>
                 <a:latin typeface="Meiryo"/>
+                <a:ea typeface="Meiryo"/>
               </a:rPr>
               <a:t>VM時代は「移行」に数時間〜数日かかった</a:t>
             </a:r>
@@ -9045,6 +9222,7 @@
                   <a:srgbClr val="323130"/>
                 </a:solidFill>
                 <a:latin typeface="Meiryo"/>
+                <a:ea typeface="Meiryo"/>
               </a:rPr>
               <a:t>AIエージェント時代は？</a:t>
             </a:r>
@@ -9175,6 +9353,7 @@
                   <a:srgbClr val="0078D4"/>
                 </a:solidFill>
                 <a:latin typeface="Meiryo"/>
+                <a:ea typeface="Meiryo"/>
               </a:rPr>
               <a:t>Remote Control — UIだけリモート</a:t>
             </a:r>
@@ -9257,6 +9436,7 @@
                   <a:srgbClr val="0078D4"/>
                 </a:solidFill>
                 <a:latin typeface="Meiryo"/>
+                <a:ea typeface="Meiryo"/>
               </a:rPr>
               <a:t>（2026/02/24 発表 · Max/Proプラン）</a:t>
             </a:r>
@@ -9304,11 +9484,12 @@
           <a:p>
             <a:pPr algn="ctr"/>
             <a:r>
-              <a:rPr sz="1200">
+              <a:rPr sz="1200" kern="0" spc="0">
                 <a:solidFill>
                   <a:srgbClr val="323130"/>
                 </a:solidFill>
                 <a:latin typeface="MS Gothic"/>
+                <a:ea typeface="MS Gothic"/>
               </a:rPr>
               <a:t>+-----------------------+             +------------------+
 |     ローカルPC        |             |    claude.ai     |
@@ -9356,6 +9537,7 @@
                   <a:srgbClr val="323130"/>
                 </a:solidFill>
                 <a:latin typeface="Meiryo"/>
+                <a:ea typeface="Meiryo"/>
               </a:rPr>
               <a:t>• </a:t>
             </a:r>
@@ -9365,6 +9547,7 @@
                   <a:srgbClr val="C7254E"/>
                 </a:solidFill>
                 <a:latin typeface="Consolas"/>
+                <a:ea typeface="Consolas"/>
               </a:rPr>
               <a:t>claude remote-control</a:t>
             </a:r>
@@ -9374,6 +9557,7 @@
                   <a:srgbClr val="323130"/>
                 </a:solidFill>
                 <a:latin typeface="Meiryo"/>
+                <a:ea typeface="Meiryo"/>
               </a:rPr>
               <a:t> または </a:t>
             </a:r>
@@ -9383,6 +9567,7 @@
                   <a:srgbClr val="C7254E"/>
                 </a:solidFill>
                 <a:latin typeface="Consolas"/>
+                <a:ea typeface="Consolas"/>
               </a:rPr>
               <a:t>/rc</a:t>
             </a:r>
@@ -9392,6 +9577,7 @@
                   <a:srgbClr val="323130"/>
                 </a:solidFill>
                 <a:latin typeface="Meiryo"/>
+                <a:ea typeface="Meiryo"/>
               </a:rPr>
               <a:t> で起動</a:t>
             </a:r>
@@ -9408,6 +9594,7 @@
                   <a:srgbClr val="323130"/>
                 </a:solidFill>
                 <a:latin typeface="Meiryo"/>
+                <a:ea typeface="Meiryo"/>
               </a:rPr>
               <a:t>• 受信ポートは一切開かない（アウトバウンドHTTPSのみ）</a:t>
             </a:r>
@@ -9424,6 +9611,7 @@
                   <a:srgbClr val="323130"/>
                 </a:solidFill>
                 <a:latin typeface="Meiryo"/>
+                <a:ea typeface="Meiryo"/>
               </a:rPr>
               <a:t>• </a:t>
             </a:r>
@@ -9433,6 +9621,7 @@
                   <a:srgbClr val="323130"/>
                 </a:solidFill>
                 <a:latin typeface="Meiryo"/>
+                <a:ea typeface="Meiryo"/>
               </a:rPr>
               <a:t>モデル</a:t>
             </a:r>
@@ -9442,6 +9631,7 @@
                   <a:srgbClr val="323130"/>
                 </a:solidFill>
                 <a:latin typeface="Meiryo"/>
+                <a:ea typeface="Meiryo"/>
               </a:rPr>
               <a:t> </a:t>
             </a:r>
@@ -9451,6 +9641,7 @@
                   <a:srgbClr val="C62828"/>
                 </a:solidFill>
                 <a:latin typeface="Meiryo"/>
+                <a:ea typeface="Meiryo"/>
               </a:rPr>
               <a:t>SaaS</a:t>
             </a:r>
@@ -9460,6 +9651,7 @@
                   <a:srgbClr val="323130"/>
                 </a:solidFill>
                 <a:latin typeface="Meiryo"/>
+                <a:ea typeface="Meiryo"/>
               </a:rPr>
               <a:t> / </a:t>
             </a:r>
@@ -9469,6 +9661,7 @@
                   <a:srgbClr val="323130"/>
                 </a:solidFill>
                 <a:latin typeface="Meiryo"/>
+                <a:ea typeface="Meiryo"/>
               </a:rPr>
               <a:t>エージェントソフト</a:t>
             </a:r>
@@ -9478,6 +9671,7 @@
                   <a:srgbClr val="323130"/>
                 </a:solidFill>
                 <a:latin typeface="Meiryo"/>
+                <a:ea typeface="Meiryo"/>
               </a:rPr>
               <a:t> </a:t>
             </a:r>
@@ -9487,6 +9681,7 @@
                   <a:srgbClr val="2E7D32"/>
                 </a:solidFill>
                 <a:latin typeface="Meiryo"/>
+                <a:ea typeface="Meiryo"/>
               </a:rPr>
               <a:t>オンプレ</a:t>
             </a:r>
@@ -9496,6 +9691,7 @@
                   <a:srgbClr val="323130"/>
                 </a:solidFill>
                 <a:latin typeface="Meiryo"/>
+                <a:ea typeface="Meiryo"/>
               </a:rPr>
               <a:t> / </a:t>
             </a:r>
@@ -9505,6 +9701,7 @@
                   <a:srgbClr val="323130"/>
                 </a:solidFill>
                 <a:latin typeface="Meiryo"/>
+                <a:ea typeface="Meiryo"/>
               </a:rPr>
               <a:t>コンテキスト</a:t>
             </a:r>
@@ -9514,6 +9711,7 @@
                   <a:srgbClr val="323130"/>
                 </a:solidFill>
                 <a:latin typeface="Meiryo"/>
+                <a:ea typeface="Meiryo"/>
               </a:rPr>
               <a:t> </a:t>
             </a:r>
@@ -9523,6 +9721,7 @@
                   <a:srgbClr val="2E7D32"/>
                 </a:solidFill>
                 <a:latin typeface="Meiryo"/>
+                <a:ea typeface="Meiryo"/>
               </a:rPr>
               <a:t>オンプレ</a:t>
             </a:r>
@@ -9539,6 +9738,7 @@
                   <a:srgbClr val="323130"/>
                 </a:solidFill>
                 <a:latin typeface="Meiryo"/>
+                <a:ea typeface="Meiryo"/>
               </a:rPr>
               <a:t>• </a:t>
             </a:r>
@@ -9548,6 +9748,7 @@
                   <a:srgbClr val="323130"/>
                 </a:solidFill>
                 <a:latin typeface="Meiryo"/>
+                <a:ea typeface="Meiryo"/>
               </a:rPr>
               <a:t>操作UI</a:t>
             </a:r>
@@ -9557,6 +9758,7 @@
                   <a:srgbClr val="323130"/>
                 </a:solidFill>
                 <a:latin typeface="Meiryo"/>
+                <a:ea typeface="Meiryo"/>
               </a:rPr>
               <a:t> </a:t>
             </a:r>
@@ -9566,6 +9768,7 @@
                   <a:srgbClr val="C62828"/>
                 </a:solidFill>
                 <a:latin typeface="Meiryo"/>
+                <a:ea typeface="Meiryo"/>
               </a:rPr>
               <a:t>SaaS</a:t>
             </a:r>
@@ -9575,6 +9778,7 @@
                   <a:srgbClr val="323130"/>
                 </a:solidFill>
                 <a:latin typeface="Meiryo"/>
+                <a:ea typeface="Meiryo"/>
               </a:rPr>
               <a:t> claude.ai（Web / モバイル）← 実行はオンプレのまま</a:t>
             </a:r>
@@ -9734,6 +9938,7 @@
                   <a:srgbClr val="0078D4"/>
                 </a:solidFill>
                 <a:latin typeface="Meiryo"/>
+                <a:ea typeface="Meiryo"/>
               </a:rPr>
               <a:t>オープニング</a:t>
             </a:r>
@@ -9750,6 +9955,7 @@
                   <a:srgbClr val="323130"/>
                 </a:solidFill>
                 <a:latin typeface="Meiryo"/>
+                <a:ea typeface="Meiryo"/>
               </a:rPr>
               <a:t>司会：胡田 昌彦</a:t>
             </a:r>
@@ -9766,6 +9972,7 @@
                   <a:srgbClr val="606060"/>
                 </a:solidFill>
                 <a:latin typeface="Meiryo"/>
+                <a:ea typeface="Meiryo"/>
               </a:rPr>
               <a:t>日本ビジネスシステムズ株式会社
 Microsoft MVP for Cloud and Datacenter Management, Microsoft Azure</a:t>
@@ -9897,6 +10104,7 @@
                   <a:srgbClr val="0078D4"/>
                 </a:solidFill>
                 <a:latin typeface="Meiryo"/>
+                <a:ea typeface="Meiryo"/>
               </a:rPr>
               <a:t>Claude Code on the Web — クラウドで自律実行</a:t>
             </a:r>
@@ -9987,11 +10195,12 @@
           <a:p>
             <a:pPr algn="ctr"/>
             <a:r>
-              <a:rPr sz="1100">
+              <a:rPr sz="1100" kern="0" spc="0">
                 <a:solidFill>
                   <a:srgbClr val="323130"/>
                 </a:solidFill>
                 <a:latin typeface="MS Gothic"/>
+                <a:ea typeface="MS Gothic"/>
               </a:rPr>
               <a:t>PC Terminal:
   claude --remote "認証バグを修正して"
@@ -10042,6 +10251,7 @@
                   <a:srgbClr val="323130"/>
                 </a:solidFill>
                 <a:latin typeface="Meiryo"/>
+                <a:ea typeface="Meiryo"/>
               </a:rPr>
               <a:t>• </a:t>
             </a:r>
@@ -10051,6 +10261,7 @@
                   <a:srgbClr val="323130"/>
                 </a:solidFill>
                 <a:latin typeface="Meiryo"/>
+                <a:ea typeface="Meiryo"/>
               </a:rPr>
               <a:t>並列実行可能</a:t>
             </a:r>
@@ -10060,6 +10271,7 @@
                   <a:srgbClr val="323130"/>
                 </a:solidFill>
                 <a:latin typeface="Meiryo"/>
+                <a:ea typeface="Meiryo"/>
               </a:rPr>
               <a:t>：</a:t>
             </a:r>
@@ -10069,6 +10281,7 @@
                   <a:srgbClr val="C7254E"/>
                 </a:solidFill>
                 <a:latin typeface="Consolas"/>
+                <a:ea typeface="Consolas"/>
               </a:rPr>
               <a:t>--remote</a:t>
             </a:r>
@@ -10078,6 +10291,7 @@
                   <a:srgbClr val="323130"/>
                 </a:solidFill>
                 <a:latin typeface="Meiryo"/>
+                <a:ea typeface="Meiryo"/>
               </a:rPr>
               <a:t> を複数回叩けばタスクが並走</a:t>
             </a:r>
@@ -10094,6 +10308,7 @@
                   <a:srgbClr val="323130"/>
                 </a:solidFill>
                 <a:latin typeface="Meiryo"/>
+                <a:ea typeface="Meiryo"/>
               </a:rPr>
               <a:t>• Web → ローカルの一方向ハンドオフ（逆は新規セッション）</a:t>
             </a:r>
@@ -10110,6 +10325,7 @@
                   <a:srgbClr val="323130"/>
                 </a:solidFill>
                 <a:latin typeface="Meiryo"/>
+                <a:ea typeface="Meiryo"/>
               </a:rPr>
               <a:t>• </a:t>
             </a:r>
@@ -10119,6 +10335,7 @@
                   <a:srgbClr val="323130"/>
                 </a:solidFill>
                 <a:latin typeface="Meiryo"/>
+                <a:ea typeface="Meiryo"/>
               </a:rPr>
               <a:t>クラウド実行時</a:t>
             </a:r>
@@ -10128,6 +10345,7 @@
                   <a:srgbClr val="323130"/>
                 </a:solidFill>
                 <a:latin typeface="Meiryo"/>
+                <a:ea typeface="Meiryo"/>
               </a:rPr>
               <a:t>: </a:t>
             </a:r>
@@ -10137,6 +10355,7 @@
                   <a:srgbClr val="323130"/>
                 </a:solidFill>
                 <a:latin typeface="Meiryo"/>
+                <a:ea typeface="Meiryo"/>
               </a:rPr>
               <a:t>モデル</a:t>
             </a:r>
@@ -10146,6 +10365,7 @@
                   <a:srgbClr val="323130"/>
                 </a:solidFill>
                 <a:latin typeface="Meiryo"/>
+                <a:ea typeface="Meiryo"/>
               </a:rPr>
               <a:t> </a:t>
             </a:r>
@@ -10155,6 +10375,7 @@
                   <a:srgbClr val="C62828"/>
                 </a:solidFill>
                 <a:latin typeface="Meiryo"/>
+                <a:ea typeface="Meiryo"/>
               </a:rPr>
               <a:t>SaaS</a:t>
             </a:r>
@@ -10164,6 +10385,7 @@
                   <a:srgbClr val="323130"/>
                 </a:solidFill>
                 <a:latin typeface="Meiryo"/>
+                <a:ea typeface="Meiryo"/>
               </a:rPr>
               <a:t> / </a:t>
             </a:r>
@@ -10173,6 +10395,7 @@
                   <a:srgbClr val="323130"/>
                 </a:solidFill>
                 <a:latin typeface="Meiryo"/>
+                <a:ea typeface="Meiryo"/>
               </a:rPr>
               <a:t>エージェントソフト</a:t>
             </a:r>
@@ -10182,6 +10405,7 @@
                   <a:srgbClr val="323130"/>
                 </a:solidFill>
                 <a:latin typeface="Meiryo"/>
+                <a:ea typeface="Meiryo"/>
               </a:rPr>
               <a:t> </a:t>
             </a:r>
@@ -10191,6 +10415,7 @@
                   <a:srgbClr val="C62828"/>
                 </a:solidFill>
                 <a:latin typeface="Meiryo"/>
+                <a:ea typeface="Meiryo"/>
               </a:rPr>
               <a:t>SaaS</a:t>
             </a:r>
@@ -10200,6 +10425,7 @@
                   <a:srgbClr val="323130"/>
                 </a:solidFill>
                 <a:latin typeface="Meiryo"/>
+                <a:ea typeface="Meiryo"/>
               </a:rPr>
               <a:t> / </a:t>
             </a:r>
@@ -10209,6 +10435,7 @@
                   <a:srgbClr val="323130"/>
                 </a:solidFill>
                 <a:latin typeface="Meiryo"/>
+                <a:ea typeface="Meiryo"/>
               </a:rPr>
               <a:t>コンテキスト</a:t>
             </a:r>
@@ -10218,6 +10445,7 @@
                   <a:srgbClr val="323130"/>
                 </a:solidFill>
                 <a:latin typeface="Meiryo"/>
+                <a:ea typeface="Meiryo"/>
               </a:rPr>
               <a:t> </a:t>
             </a:r>
@@ -10227,6 +10455,7 @@
                   <a:srgbClr val="C62828"/>
                 </a:solidFill>
                 <a:latin typeface="Meiryo"/>
+                <a:ea typeface="Meiryo"/>
               </a:rPr>
               <a:t>SaaS</a:t>
             </a:r>
@@ -10236,6 +10465,7 @@
                   <a:srgbClr val="323130"/>
                 </a:solidFill>
                 <a:latin typeface="Meiryo"/>
+                <a:ea typeface="Meiryo"/>
               </a:rPr>
               <a:t>（GitHub経由のみ）</a:t>
             </a:r>
@@ -10252,6 +10482,7 @@
                   <a:srgbClr val="323130"/>
                 </a:solidFill>
                 <a:latin typeface="Meiryo"/>
+                <a:ea typeface="Meiryo"/>
               </a:rPr>
               <a:t>• </a:t>
             </a:r>
@@ -10261,6 +10492,7 @@
                   <a:srgbClr val="323130"/>
                 </a:solidFill>
                 <a:latin typeface="Meiryo"/>
+                <a:ea typeface="Meiryo"/>
               </a:rPr>
               <a:t>teleport後</a:t>
             </a:r>
@@ -10270,6 +10502,7 @@
                   <a:srgbClr val="323130"/>
                 </a:solidFill>
                 <a:latin typeface="Meiryo"/>
+                <a:ea typeface="Meiryo"/>
               </a:rPr>
               <a:t>: </a:t>
             </a:r>
@@ -10279,6 +10512,7 @@
                   <a:srgbClr val="323130"/>
                 </a:solidFill>
                 <a:latin typeface="Meiryo"/>
+                <a:ea typeface="Meiryo"/>
               </a:rPr>
               <a:t>モデル</a:t>
             </a:r>
@@ -10288,6 +10522,7 @@
                   <a:srgbClr val="323130"/>
                 </a:solidFill>
                 <a:latin typeface="Meiryo"/>
+                <a:ea typeface="Meiryo"/>
               </a:rPr>
               <a:t> </a:t>
             </a:r>
@@ -10297,6 +10532,7 @@
                   <a:srgbClr val="C62828"/>
                 </a:solidFill>
                 <a:latin typeface="Meiryo"/>
+                <a:ea typeface="Meiryo"/>
               </a:rPr>
               <a:t>SaaS</a:t>
             </a:r>
@@ -10306,6 +10542,7 @@
                   <a:srgbClr val="323130"/>
                 </a:solidFill>
                 <a:latin typeface="Meiryo"/>
+                <a:ea typeface="Meiryo"/>
               </a:rPr>
               <a:t> / </a:t>
             </a:r>
@@ -10315,6 +10552,7 @@
                   <a:srgbClr val="323130"/>
                 </a:solidFill>
                 <a:latin typeface="Meiryo"/>
+                <a:ea typeface="Meiryo"/>
               </a:rPr>
               <a:t>エージェントソフト</a:t>
             </a:r>
@@ -10324,6 +10562,7 @@
                   <a:srgbClr val="323130"/>
                 </a:solidFill>
                 <a:latin typeface="Meiryo"/>
+                <a:ea typeface="Meiryo"/>
               </a:rPr>
               <a:t> </a:t>
             </a:r>
@@ -10333,6 +10572,7 @@
                   <a:srgbClr val="2E7D32"/>
                 </a:solidFill>
                 <a:latin typeface="Meiryo"/>
+                <a:ea typeface="Meiryo"/>
               </a:rPr>
               <a:t>オンプレ</a:t>
             </a:r>
@@ -10342,6 +10582,7 @@
                   <a:srgbClr val="323130"/>
                 </a:solidFill>
                 <a:latin typeface="Meiryo"/>
+                <a:ea typeface="Meiryo"/>
               </a:rPr>
               <a:t> / </a:t>
             </a:r>
@@ -10351,6 +10592,7 @@
                   <a:srgbClr val="323130"/>
                 </a:solidFill>
                 <a:latin typeface="Meiryo"/>
+                <a:ea typeface="Meiryo"/>
               </a:rPr>
               <a:t>コンテキスト</a:t>
             </a:r>
@@ -10360,6 +10602,7 @@
                   <a:srgbClr val="323130"/>
                 </a:solidFill>
                 <a:latin typeface="Meiryo"/>
+                <a:ea typeface="Meiryo"/>
               </a:rPr>
               <a:t> </a:t>
             </a:r>
@@ -10369,6 +10612,7 @@
                   <a:srgbClr val="2E7D32"/>
                 </a:solidFill>
                 <a:latin typeface="Meiryo"/>
+                <a:ea typeface="Meiryo"/>
               </a:rPr>
               <a:t>オンプレ</a:t>
             </a:r>
@@ -10378,6 +10622,7 @@
                   <a:srgbClr val="323130"/>
                 </a:solidFill>
                 <a:latin typeface="Meiryo"/>
+                <a:ea typeface="Meiryo"/>
               </a:rPr>
               <a:t> + </a:t>
             </a:r>
@@ -10387,6 +10632,7 @@
                   <a:srgbClr val="C62828"/>
                 </a:solidFill>
                 <a:latin typeface="Meiryo"/>
+                <a:ea typeface="Meiryo"/>
               </a:rPr>
               <a:t>SaaS</a:t>
             </a:r>
@@ -10403,6 +10649,7 @@
                   <a:srgbClr val="323130"/>
                 </a:solidFill>
                 <a:latin typeface="Meiryo"/>
+                <a:ea typeface="Meiryo"/>
               </a:rPr>
               <a:t>    • ローカルファイル・MCP・認証情報が加わり、コンテキストを大幅に拡張できる</a:t>
             </a:r>
@@ -10533,6 +10780,7 @@
                   <a:srgbClr val="0078D4"/>
                 </a:solidFill>
                 <a:latin typeface="Meiryo"/>
+                <a:ea typeface="Meiryo"/>
               </a:rPr>
               <a:t>2つの「引き継ぎ」パターン</a:t>
             </a:r>
@@ -10630,6 +10878,7 @@
                             <a:srgbClr val="243A5E"/>
                           </a:solidFill>
                           <a:latin typeface="Meiryo"/>
+                          <a:ea typeface="Meiryo"/>
                         </a:rPr>
                         <a:t>Remote Control</a:t>
                       </a:r>
@@ -10652,6 +10901,7 @@
                             <a:srgbClr val="243A5E"/>
                           </a:solidFill>
                           <a:latin typeface="Meiryo"/>
+                          <a:ea typeface="Meiryo"/>
                         </a:rPr>
                         <a:t>Cloud on the Web
 （クラウド実行時）</a:t>
@@ -10675,6 +10925,7 @@
                             <a:srgbClr val="243A5E"/>
                           </a:solidFill>
                           <a:latin typeface="Meiryo"/>
+                          <a:ea typeface="Meiryo"/>
                         </a:rPr>
                         <a:t>Cloud on the Web
 （teleport後）</a:t>
@@ -10700,6 +10951,7 @@
                             <a:srgbClr val="323130"/>
                           </a:solidFill>
                           <a:latin typeface="Meiryo"/>
+                          <a:ea typeface="Meiryo"/>
                         </a:rPr>
                         <a:t>実行場所</a:t>
                       </a:r>
@@ -10718,6 +10970,7 @@
                             <a:srgbClr val="323130"/>
                           </a:solidFill>
                           <a:latin typeface="Meiryo"/>
+                          <a:ea typeface="Meiryo"/>
                         </a:rPr>
                         <a:t>ローカルPC</a:t>
                       </a:r>
@@ -10736,6 +10989,7 @@
                             <a:srgbClr val="323130"/>
                           </a:solidFill>
                           <a:latin typeface="Meiryo"/>
+                          <a:ea typeface="Meiryo"/>
                         </a:rPr>
                         <a:t>クラウドVM</a:t>
                       </a:r>
@@ -10754,6 +11008,7 @@
                             <a:srgbClr val="323130"/>
                           </a:solidFill>
                           <a:latin typeface="Meiryo"/>
+                          <a:ea typeface="Meiryo"/>
                         </a:rPr>
                         <a:t>→ ローカルPC</a:t>
                       </a:r>
@@ -10774,6 +11029,7 @@
                             <a:srgbClr val="323130"/>
                           </a:solidFill>
                           <a:latin typeface="Meiryo"/>
+                          <a:ea typeface="Meiryo"/>
                         </a:rPr>
                         <a:t>会話履歴</a:t>
                       </a:r>
@@ -10792,6 +11048,7 @@
                             <a:srgbClr val="323130"/>
                           </a:solidFill>
                           <a:latin typeface="Meiryo"/>
+                          <a:ea typeface="Meiryo"/>
                         </a:rPr>
                         <a:t>そのまま継続</a:t>
                       </a:r>
@@ -10810,6 +11067,7 @@
                             <a:srgbClr val="323130"/>
                           </a:solidFill>
                           <a:latin typeface="Meiryo"/>
+                          <a:ea typeface="Meiryo"/>
                         </a:rPr>
                         <a:t>クラウドに蓄積</a:t>
                       </a:r>
@@ -10828,6 +11086,7 @@
                             <a:srgbClr val="323130"/>
                           </a:solidFill>
                           <a:latin typeface="Meiryo"/>
+                          <a:ea typeface="Meiryo"/>
                         </a:rPr>
                         <a:t>✅ ローカルに引き継ぎ</a:t>
                       </a:r>
@@ -10848,6 +11107,7 @@
                             <a:srgbClr val="323130"/>
                           </a:solidFill>
                           <a:latin typeface="Meiryo"/>
+                          <a:ea typeface="Meiryo"/>
                         </a:rPr>
                         <a:t>コンテキスト</a:t>
                       </a:r>
@@ -10866,6 +11126,7 @@
                             <a:srgbClr val="323130"/>
                           </a:solidFill>
                           <a:latin typeface="Meiryo"/>
+                          <a:ea typeface="Meiryo"/>
                         </a:rPr>
                         <a:t>✅ 全てアクセス可</a:t>
                       </a:r>
@@ -10884,6 +11145,7 @@
                             <a:srgbClr val="323130"/>
                           </a:solidFill>
                           <a:latin typeface="Meiryo"/>
+                          <a:ea typeface="Meiryo"/>
                         </a:rPr>
                         <a:t>❌ GitHub経由のみ</a:t>
                       </a:r>
@@ -10902,6 +11164,7 @@
                             <a:srgbClr val="323130"/>
                           </a:solidFill>
                           <a:latin typeface="Meiryo"/>
+                          <a:ea typeface="Meiryo"/>
                         </a:rPr>
                         <a:t>✅ 全て + 会話履歴も引き継ぎ</a:t>
                       </a:r>
@@ -10922,6 +11185,7 @@
                             <a:srgbClr val="323130"/>
                           </a:solidFill>
                           <a:latin typeface="Meiryo"/>
+                          <a:ea typeface="Meiryo"/>
                         </a:rPr>
                         <a:t>MCP サーバー</a:t>
                       </a:r>
@@ -10940,6 +11204,7 @@
                             <a:srgbClr val="323130"/>
                           </a:solidFill>
                           <a:latin typeface="Meiryo"/>
+                          <a:ea typeface="Meiryo"/>
                         </a:rPr>
                         <a:t>✅ 使える</a:t>
                       </a:r>
@@ -10958,6 +11223,7 @@
                             <a:srgbClr val="323130"/>
                           </a:solidFill>
                           <a:latin typeface="Meiryo"/>
+                          <a:ea typeface="Meiryo"/>
                         </a:rPr>
                         <a:t>❌ 使えない</a:t>
                       </a:r>
@@ -10976,6 +11242,7 @@
                             <a:srgbClr val="323130"/>
                           </a:solidFill>
                           <a:latin typeface="Meiryo"/>
+                          <a:ea typeface="Meiryo"/>
                         </a:rPr>
                         <a:t>✅ 使える</a:t>
                       </a:r>
@@ -10996,6 +11263,7 @@
                             <a:srgbClr val="323130"/>
                           </a:solidFill>
                           <a:latin typeface="Meiryo"/>
+                          <a:ea typeface="Meiryo"/>
                         </a:rPr>
                         <a:t>並列実行</a:t>
                       </a:r>
@@ -11014,6 +11282,7 @@
                             <a:srgbClr val="323130"/>
                           </a:solidFill>
                           <a:latin typeface="Meiryo"/>
+                          <a:ea typeface="Meiryo"/>
                         </a:rPr>
                         <a:t>❌ 1セッション</a:t>
                       </a:r>
@@ -11032,6 +11301,7 @@
                             <a:srgbClr val="323130"/>
                           </a:solidFill>
                           <a:latin typeface="Meiryo"/>
+                          <a:ea typeface="Meiryo"/>
                         </a:rPr>
                         <a:t>✅ 何タスクでも</a:t>
                       </a:r>
@@ -11050,6 +11320,7 @@
                             <a:srgbClr val="323130"/>
                           </a:solidFill>
                           <a:latin typeface="Meiryo"/>
+                          <a:ea typeface="Meiryo"/>
                         </a:rPr>
                         <a:t>—</a:t>
                       </a:r>
@@ -11095,6 +11366,7 @@
                   <a:srgbClr val="323130"/>
                 </a:solidFill>
                 <a:latin typeface="Meiryo"/>
+                <a:ea typeface="Meiryo"/>
               </a:rPr>
               <a:t>共通点: VMを引っ越すより圧倒的に軽い</a:t>
             </a:r>
@@ -11111,6 +11383,7 @@
                   <a:srgbClr val="323130"/>
                 </a:solidFill>
                 <a:latin typeface="Meiryo"/>
+                <a:ea typeface="Meiryo"/>
               </a:rPr>
               <a:t>→ これが「本当のハイブリッド」を可能にする</a:t>
             </a:r>
@@ -11246,6 +11519,7 @@
                   <a:srgbClr val="0078D4"/>
                 </a:solidFill>
                 <a:latin typeface="Meiryo"/>
+                <a:ea typeface="Meiryo"/>
               </a:rPr>
               <a:t>Part 6</a:t>
             </a:r>
@@ -11262,6 +11536,7 @@
                   <a:srgbClr val="0078D4"/>
                 </a:solidFill>
                 <a:latin typeface="Meiryo"/>
+                <a:ea typeface="Meiryo"/>
               </a:rPr>
               <a:t>なぜ今「本当のハイブリッド」なのか</a:t>
             </a:r>
@@ -11392,6 +11667,7 @@
                   <a:srgbClr val="0078D4"/>
                 </a:solidFill>
                 <a:latin typeface="Meiryo"/>
+                <a:ea typeface="Meiryo"/>
               </a:rPr>
               <a:t>昔と今の決定的な違い</a:t>
             </a:r>
@@ -11488,6 +11764,7 @@
                             <a:srgbClr val="243A5E"/>
                           </a:solidFill>
                           <a:latin typeface="Meiryo"/>
+                          <a:ea typeface="Meiryo"/>
                         </a:rPr>
                         <a:t>VM時代</a:t>
                       </a:r>
@@ -11510,6 +11787,7 @@
                             <a:srgbClr val="243A5E"/>
                           </a:solidFill>
                           <a:latin typeface="Meiryo"/>
+                          <a:ea typeface="Meiryo"/>
                         </a:rPr>
                         <a:t>AIエージェント時代</a:t>
                       </a:r>
@@ -11534,6 +11812,7 @@
                             <a:srgbClr val="323130"/>
                           </a:solidFill>
                           <a:latin typeface="Meiryo"/>
+                          <a:ea typeface="Meiryo"/>
                         </a:rPr>
                         <a:t>移動対象</a:t>
                       </a:r>
@@ -11552,6 +11831,7 @@
                             <a:srgbClr val="323130"/>
                           </a:solidFill>
                           <a:latin typeface="Meiryo"/>
+                          <a:ea typeface="Meiryo"/>
                         </a:rPr>
                         <a:t>VM（数十GB〜）</a:t>
                       </a:r>
@@ -11570,6 +11850,7 @@
                             <a:srgbClr val="323130"/>
                           </a:solidFill>
                           <a:latin typeface="Meiryo"/>
+                          <a:ea typeface="Meiryo"/>
                         </a:rPr>
                         <a:t>会話・設定ファイル（数KB〜MB）・コンテキスト</a:t>
                       </a:r>
@@ -11590,6 +11871,7 @@
                             <a:srgbClr val="323130"/>
                           </a:solidFill>
                           <a:latin typeface="Meiryo"/>
+                          <a:ea typeface="Meiryo"/>
                         </a:rPr>
                         <a:t>移動コスト</a:t>
                       </a:r>
@@ -11608,6 +11890,7 @@
                             <a:srgbClr val="323130"/>
                           </a:solidFill>
                           <a:latin typeface="Meiryo"/>
+                          <a:ea typeface="Meiryo"/>
                         </a:rPr>
                         <a:t>高い（ダウンタイム）</a:t>
                       </a:r>
@@ -11626,6 +11909,7 @@
                             <a:srgbClr val="323130"/>
                           </a:solidFill>
                           <a:latin typeface="Meiryo"/>
+                          <a:ea typeface="Meiryo"/>
                         </a:rPr>
                         <a:t>ほぼゼロ</a:t>
                       </a:r>
@@ -11646,6 +11930,7 @@
                             <a:srgbClr val="323130"/>
                           </a:solidFill>
                           <a:latin typeface="Meiryo"/>
+                          <a:ea typeface="Meiryo"/>
                         </a:rPr>
                         <a:t>構成の自由度</a:t>
                       </a:r>
@@ -11664,6 +11949,7 @@
                             <a:srgbClr val="323130"/>
                           </a:solidFill>
                           <a:latin typeface="Meiryo"/>
+                          <a:ea typeface="Meiryo"/>
                         </a:rPr>
                         <a:t>ベンダーロックイン</a:t>
                       </a:r>
@@ -11682,6 +11968,7 @@
                             <a:srgbClr val="323130"/>
                           </a:solidFill>
                           <a:latin typeface="Meiryo"/>
+                          <a:ea typeface="Meiryo"/>
                         </a:rPr>
                         <a:t>ツール・モデル・場所を自由選択</a:t>
                       </a:r>
@@ -11702,6 +11989,7 @@
                             <a:srgbClr val="323130"/>
                           </a:solidFill>
                           <a:latin typeface="Meiryo"/>
+                          <a:ea typeface="Meiryo"/>
                         </a:rPr>
                         <a:t>標準化</a:t>
                       </a:r>
@@ -11720,6 +12008,7 @@
                             <a:srgbClr val="323130"/>
                           </a:solidFill>
                           <a:latin typeface="Meiryo"/>
+                          <a:ea typeface="Meiryo"/>
                         </a:rPr>
                         <a:t>各社独自</a:t>
                       </a:r>
@@ -11738,6 +12027,7 @@
                             <a:srgbClr val="323130"/>
                           </a:solidFill>
                           <a:latin typeface="Meiryo"/>
+                          <a:ea typeface="Meiryo"/>
                         </a:rPr>
                         <a:t>MCP, OpenAI互換API等</a:t>
                       </a:r>
@@ -11758,6 +12048,7 @@
                             <a:srgbClr val="323130"/>
                           </a:solidFill>
                           <a:latin typeface="Meiryo"/>
+                          <a:ea typeface="Meiryo"/>
                         </a:rPr>
                         <a:t>最強の頭脳</a:t>
                       </a:r>
@@ -11776,6 +12067,7 @@
                             <a:srgbClr val="323130"/>
                           </a:solidFill>
                           <a:latin typeface="Meiryo"/>
+                          <a:ea typeface="Meiryo"/>
                         </a:rPr>
                         <a:t>自社で構築・運用可能</a:t>
                       </a:r>
@@ -11794,6 +12086,7 @@
                             <a:srgbClr val="323130"/>
                           </a:solidFill>
                           <a:latin typeface="Meiryo"/>
+                          <a:ea typeface="Meiryo"/>
                         </a:rPr>
                         <a:t>外部サービスに依存せざるを得ない</a:t>
                       </a:r>
@@ -11814,6 +12107,7 @@
                             <a:srgbClr val="323130"/>
                           </a:solidFill>
                           <a:latin typeface="Meiryo"/>
+                          <a:ea typeface="Meiryo"/>
                         </a:rPr>
                         <a:t>乗り換えコスト</a:t>
                       </a:r>
@@ -11832,6 +12126,7 @@
                             <a:srgbClr val="323130"/>
                           </a:solidFill>
                           <a:latin typeface="Meiryo"/>
+                          <a:ea typeface="Meiryo"/>
                         </a:rPr>
                         <a:t>高い（再構築・移行）</a:t>
                       </a:r>
@@ -11850,6 +12145,7 @@
                             <a:srgbClr val="323130"/>
                           </a:solidFill>
                           <a:latin typeface="Meiryo"/>
+                          <a:ea typeface="Meiryo"/>
                         </a:rPr>
                         <a:t>ほぼゼロ（モデル・ツールを即座に切替可）</a:t>
                       </a:r>
@@ -11895,6 +12191,7 @@
                   <a:srgbClr val="323130"/>
                 </a:solidFill>
                 <a:latin typeface="Meiryo"/>
+                <a:ea typeface="Meiryo"/>
               </a:rPr>
               <a:t>モビリティが高い + 最強モデルは外部 + 乗り換えコストほぼゼロ</a:t>
             </a:r>
@@ -11911,6 +12208,7 @@
                   <a:srgbClr val="323130"/>
                 </a:solidFill>
                 <a:latin typeface="Meiryo"/>
+                <a:ea typeface="Meiryo"/>
               </a:rPr>
               <a:t>→ ハイブリッド/マルチクラウドが「必然」になる</a:t>
             </a:r>
@@ -12041,6 +12339,7 @@
                   <a:srgbClr val="0078D4"/>
                 </a:solidFill>
                 <a:latin typeface="Meiryo"/>
+                <a:ea typeface="Meiryo"/>
               </a:rPr>
               <a:t>標準化の波</a:t>
             </a:r>
@@ -12123,6 +12422,7 @@
                   <a:srgbClr val="323130"/>
                 </a:solidFill>
                 <a:latin typeface="Meiryo"/>
+                <a:ea typeface="Meiryo"/>
               </a:rPr>
               <a:t>• </a:t>
             </a:r>
@@ -12132,6 +12432,7 @@
                   <a:srgbClr val="323130"/>
                 </a:solidFill>
                 <a:latin typeface="Meiryo"/>
+                <a:ea typeface="Meiryo"/>
               </a:rPr>
               <a:t>MCP</a:t>
             </a:r>
@@ -12141,6 +12442,7 @@
                   <a:srgbClr val="323130"/>
                 </a:solidFill>
                 <a:latin typeface="Meiryo"/>
+                <a:ea typeface="Meiryo"/>
               </a:rPr>
               <a:t>（Model Context Protocol） — エージェントとツール・データの接続標準</a:t>
             </a:r>
@@ -12157,6 +12459,7 @@
                   <a:srgbClr val="323130"/>
                 </a:solidFill>
                 <a:latin typeface="Meiryo"/>
+                <a:ea typeface="Meiryo"/>
               </a:rPr>
               <a:t>• </a:t>
             </a:r>
@@ -12166,6 +12469,7 @@
                   <a:srgbClr val="323130"/>
                 </a:solidFill>
                 <a:latin typeface="Meiryo"/>
+                <a:ea typeface="Meiryo"/>
               </a:rPr>
               <a:t>A2A</a:t>
             </a:r>
@@ -12175,6 +12479,7 @@
                   <a:srgbClr val="323130"/>
                 </a:solidFill>
                 <a:latin typeface="Meiryo"/>
+                <a:ea typeface="Meiryo"/>
               </a:rPr>
               <a:t>（Agent2Agent Protocol） — エージェント間の通信・タスク委任標準</a:t>
             </a:r>
@@ -12191,6 +12496,7 @@
                   <a:srgbClr val="323130"/>
                 </a:solidFill>
                 <a:latin typeface="Meiryo"/>
+                <a:ea typeface="Meiryo"/>
               </a:rPr>
               <a:t>• </a:t>
             </a:r>
@@ -12200,6 +12506,7 @@
                   <a:srgbClr val="323130"/>
                 </a:solidFill>
                 <a:latin typeface="Meiryo"/>
+                <a:ea typeface="Meiryo"/>
               </a:rPr>
               <a:t>CLAUDE.md / AGENTS.md / GEMINI.md</a:t>
             </a:r>
@@ -12209,6 +12516,7 @@
                   <a:srgbClr val="323130"/>
                 </a:solidFill>
                 <a:latin typeface="Meiryo"/>
+                <a:ea typeface="Meiryo"/>
               </a:rPr>
               <a:t> — エージェント設定のファイル化</a:t>
             </a:r>
@@ -12225,6 +12533,7 @@
                   <a:srgbClr val="323130"/>
                 </a:solidFill>
                 <a:latin typeface="Meiryo"/>
+                <a:ea typeface="Meiryo"/>
               </a:rPr>
               <a:t>• </a:t>
             </a:r>
@@ -12234,6 +12543,7 @@
                   <a:srgbClr val="323130"/>
                 </a:solidFill>
                 <a:latin typeface="Meiryo"/>
+                <a:ea typeface="Meiryo"/>
               </a:rPr>
               <a:t>Agent Skills</a:t>
             </a:r>
@@ -12243,6 +12553,7 @@
                   <a:srgbClr val="323130"/>
                 </a:solidFill>
                 <a:latin typeface="Meiryo"/>
+                <a:ea typeface="Meiryo"/>
               </a:rPr>
               <a:t> — 再利用可能な知識パッケージ（クロスプラットフォーム）</a:t>
             </a:r>
@@ -12259,6 +12570,7 @@
                   <a:srgbClr val="323130"/>
                 </a:solidFill>
                 <a:latin typeface="Meiryo"/>
+                <a:ea typeface="Meiryo"/>
               </a:rPr>
               <a:t>• </a:t>
             </a:r>
@@ -12268,6 +12580,7 @@
                   <a:srgbClr val="323130"/>
                 </a:solidFill>
                 <a:latin typeface="Meiryo"/>
+                <a:ea typeface="Meiryo"/>
               </a:rPr>
               <a:t>OpenAI互換API</a:t>
             </a:r>
@@ -12277,6 +12590,7 @@
                   <a:srgbClr val="323130"/>
                 </a:solidFill>
                 <a:latin typeface="Meiryo"/>
+                <a:ea typeface="Meiryo"/>
               </a:rPr>
               <a:t> — 異なるモデルプロバイダーを同じIFで</a:t>
             </a:r>
@@ -12293,6 +12607,7 @@
                   <a:srgbClr val="323130"/>
                 </a:solidFill>
                 <a:latin typeface="Meiryo"/>
+                <a:ea typeface="Meiryo"/>
               </a:rPr>
               <a:t>→ </a:t>
             </a:r>
@@ -12302,6 +12617,7 @@
                   <a:srgbClr val="323130"/>
                 </a:solidFill>
                 <a:latin typeface="Meiryo"/>
+                <a:ea typeface="Meiryo"/>
               </a:rPr>
               <a:t>Agentic AI Foundation</a:t>
             </a:r>
@@ -12311,6 +12627,7 @@
                   <a:srgbClr val="323130"/>
                 </a:solidFill>
                 <a:latin typeface="Meiryo"/>
+                <a:ea typeface="Meiryo"/>
               </a:rPr>
               <a:t>（Linux Foundation, 2025/12〜）で中立的に推進中</a:t>
             </a:r>
@@ -12327,6 +12644,7 @@
                   <a:srgbClr val="323130"/>
                 </a:solidFill>
                 <a:latin typeface="Meiryo"/>
+                <a:ea typeface="Meiryo"/>
               </a:rPr>
               <a:t>標準化 = ポータビリティ = ハイブリッド/マルチクラウドの基盤</a:t>
             </a:r>
@@ -12457,6 +12775,7 @@
                   <a:srgbClr val="0078D4"/>
                 </a:solidFill>
                 <a:latin typeface="Meiryo"/>
+                <a:ea typeface="Meiryo"/>
               </a:rPr>
               <a:t>人の数だけ構成がある</a:t>
             </a:r>
@@ -12539,6 +12858,7 @@
                   <a:srgbClr val="323130"/>
                 </a:solidFill>
                 <a:latin typeface="Meiryo"/>
+                <a:ea typeface="Meiryo"/>
               </a:rPr>
               <a:t>• Aさん: Claude Code + Obsidian + Azure</a:t>
             </a:r>
@@ -12555,6 +12875,7 @@
                   <a:srgbClr val="323130"/>
                 </a:solidFill>
                 <a:latin typeface="Meiryo"/>
+                <a:ea typeface="Meiryo"/>
               </a:rPr>
               <a:t>• Bさん: Copilot CLI + GitHub + AWS</a:t>
             </a:r>
@@ -12571,6 +12892,7 @@
                   <a:srgbClr val="323130"/>
                 </a:solidFill>
                 <a:latin typeface="Meiryo"/>
+                <a:ea typeface="Meiryo"/>
               </a:rPr>
               <a:t>• Cさん: Cursor + Notion + GCP</a:t>
             </a:r>
@@ -12587,6 +12909,7 @@
                   <a:srgbClr val="323130"/>
                 </a:solidFill>
                 <a:latin typeface="Meiryo"/>
+                <a:ea typeface="Meiryo"/>
               </a:rPr>
               <a:t>• Dさん: ローカルLLM + VS Code + オンプレ</a:t>
             </a:r>
@@ -12603,6 +12926,7 @@
                   <a:srgbClr val="323130"/>
                 </a:solidFill>
                 <a:latin typeface="Meiryo"/>
+                <a:ea typeface="Meiryo"/>
               </a:rPr>
               <a:t>同じ「AIでコーディング」でも構成は十人十色</a:t>
             </a:r>
@@ -12738,6 +13062,7 @@
                   <a:srgbClr val="0078D4"/>
                 </a:solidFill>
                 <a:latin typeface="Meiryo"/>
+                <a:ea typeface="Meiryo"/>
               </a:rPr>
               <a:t>🧠 頭の体操タイム</a:t>
             </a:r>
@@ -12868,6 +13193,7 @@
                   <a:srgbClr val="0078D4"/>
                 </a:solidFill>
                 <a:latin typeface="Meiryo"/>
+                <a:ea typeface="Meiryo"/>
               </a:rPr>
               <a:t>あなたの環境を整理してみよう</a:t>
             </a:r>
@@ -12950,6 +13276,7 @@
                   <a:srgbClr val="0078D4"/>
                 </a:solidFill>
                 <a:latin typeface="Meiryo"/>
+                <a:ea typeface="Meiryo"/>
               </a:rPr>
               <a:t>3つの要素で考えてみてください</a:t>
             </a:r>
@@ -12966,6 +13293,7 @@
                   <a:srgbClr val="323130"/>
                 </a:solidFill>
                 <a:latin typeface="Meiryo"/>
+                <a:ea typeface="Meiryo"/>
               </a:rPr>
               <a:t>• </a:t>
             </a:r>
@@ -12975,6 +13303,7 @@
                   <a:srgbClr val="323130"/>
                 </a:solidFill>
                 <a:latin typeface="Meiryo"/>
+                <a:ea typeface="Meiryo"/>
               </a:rPr>
               <a:t>モデル</a:t>
             </a:r>
@@ -12984,6 +13313,7 @@
                   <a:srgbClr val="323130"/>
                 </a:solidFill>
                 <a:latin typeface="Meiryo"/>
+                <a:ea typeface="Meiryo"/>
               </a:rPr>
               <a:t>: どのLLMを、どこで動かしている？</a:t>
             </a:r>
@@ -13000,6 +13330,7 @@
                   <a:srgbClr val="323130"/>
                 </a:solidFill>
                 <a:latin typeface="Meiryo"/>
+                <a:ea typeface="Meiryo"/>
               </a:rPr>
               <a:t>• </a:t>
             </a:r>
@@ -13009,6 +13340,7 @@
                   <a:srgbClr val="323130"/>
                 </a:solidFill>
                 <a:latin typeface="Meiryo"/>
+                <a:ea typeface="Meiryo"/>
               </a:rPr>
               <a:t>エージェントソフト</a:t>
             </a:r>
@@ -13018,6 +13350,7 @@
                   <a:srgbClr val="323130"/>
                 </a:solidFill>
                 <a:latin typeface="Meiryo"/>
+                <a:ea typeface="Meiryo"/>
               </a:rPr>
               <a:t>: どのソフトを使っている？ローカル？SaaS？</a:t>
             </a:r>
@@ -13034,6 +13367,7 @@
                   <a:srgbClr val="323130"/>
                 </a:solidFill>
                 <a:latin typeface="Meiryo"/>
+                <a:ea typeface="Meiryo"/>
               </a:rPr>
               <a:t>• </a:t>
             </a:r>
@@ -13043,6 +13377,7 @@
                   <a:srgbClr val="323130"/>
                 </a:solidFill>
                 <a:latin typeface="Meiryo"/>
+                <a:ea typeface="Meiryo"/>
               </a:rPr>
               <a:t>コンテキスト</a:t>
             </a:r>
@@ -13052,6 +13387,7 @@
                   <a:srgbClr val="323130"/>
                 </a:solidFill>
                 <a:latin typeface="Meiryo"/>
+                <a:ea typeface="Meiryo"/>
               </a:rPr>
               <a:t>: 情報はどこに、どんな形で持っている？何が使えれば便利？</a:t>
             </a:r>
@@ -13068,6 +13404,7 @@
                   <a:srgbClr val="323130"/>
                 </a:solidFill>
                 <a:latin typeface="Meiryo"/>
+                <a:ea typeface="Meiryo"/>
               </a:rPr>
               <a:t>もしも制約がないなら、どんな構成にしたいですか？</a:t>
             </a:r>
@@ -13203,6 +13540,7 @@
                   <a:srgbClr val="0078D4"/>
                 </a:solidFill>
                 <a:latin typeface="Meiryo"/>
+                <a:ea typeface="Meiryo"/>
               </a:rPr>
               <a:t>Part 7</a:t>
             </a:r>
@@ -13219,6 +13557,7 @@
                   <a:srgbClr val="0078D4"/>
                 </a:solidFill>
                 <a:latin typeface="Meiryo"/>
+                <a:ea typeface="Meiryo"/>
               </a:rPr>
               <a:t>AIエージェントの動力源 = API</a:t>
             </a:r>
@@ -13349,6 +13688,7 @@
                   <a:srgbClr val="0078D4"/>
                 </a:solidFill>
                 <a:latin typeface="Meiryo"/>
+                <a:ea typeface="Meiryo"/>
               </a:rPr>
               <a:t>AIエージェントは</a:t>
             </a:r>
@@ -13431,6 +13771,7 @@
                   <a:srgbClr val="0078D4"/>
                 </a:solidFill>
                 <a:latin typeface="Meiryo"/>
+                <a:ea typeface="Meiryo"/>
               </a:rPr>
               <a:t>APIがなければ</a:t>
             </a:r>
@@ -13447,6 +13788,7 @@
                   <a:srgbClr val="0078D4"/>
                 </a:solidFill>
                 <a:latin typeface="Meiryo"/>
+                <a:ea typeface="Meiryo"/>
               </a:rPr>
               <a:t>手も足も出ない</a:t>
             </a:r>
@@ -13577,6 +13919,7 @@
                   <a:srgbClr val="0078D4"/>
                 </a:solidFill>
                 <a:latin typeface="Meiryo"/>
+                <a:ea typeface="Meiryo"/>
               </a:rPr>
               <a:t>タイムテーブル</a:t>
             </a:r>
@@ -13661,6 +14004,7 @@
                             <a:srgbClr val="243A5E"/>
                           </a:solidFill>
                           <a:latin typeface="Meiryo"/>
+                          <a:ea typeface="Meiryo"/>
                         </a:rPr>
                         <a:t>時刻</a:t>
                       </a:r>
@@ -13683,6 +14027,7 @@
                             <a:srgbClr val="243A5E"/>
                           </a:solidFill>
                           <a:latin typeface="Meiryo"/>
+                          <a:ea typeface="Meiryo"/>
                         </a:rPr>
                         <a:t>内容</a:t>
                       </a:r>
@@ -13705,6 +14050,7 @@
                             <a:srgbClr val="243A5E"/>
                           </a:solidFill>
                           <a:latin typeface="Meiryo"/>
+                          <a:ea typeface="Meiryo"/>
                         </a:rPr>
                         <a:t>スピーカー</a:t>
                       </a:r>
@@ -13729,6 +14075,7 @@
                             <a:srgbClr val="323130"/>
                           </a:solidFill>
                           <a:latin typeface="Meiryo"/>
+                          <a:ea typeface="Meiryo"/>
                         </a:rPr>
                         <a:t>14:00 (5分)</a:t>
                       </a:r>
@@ -13747,6 +14094,7 @@
                             <a:srgbClr val="323130"/>
                           </a:solidFill>
                           <a:latin typeface="Meiryo"/>
+                          <a:ea typeface="Meiryo"/>
                         </a:rPr>
                         <a:t>オープニング</a:t>
                       </a:r>
@@ -13765,6 +14113,7 @@
                             <a:srgbClr val="323130"/>
                           </a:solidFill>
                           <a:latin typeface="Meiryo"/>
+                          <a:ea typeface="Meiryo"/>
                         </a:rPr>
                         <a:t>胡田 昌彦（JBS / MVP）</a:t>
                       </a:r>
@@ -13785,6 +14134,7 @@
                             <a:srgbClr val="323130"/>
                           </a:solidFill>
                           <a:latin typeface="Meiryo"/>
+                          <a:ea typeface="Meiryo"/>
                         </a:rPr>
                         <a:t>14:05 (40分)</a:t>
                       </a:r>
@@ -13803,6 +14153,7 @@
                             <a:srgbClr val="323130"/>
                           </a:solidFill>
                           <a:latin typeface="Meiryo"/>
+                          <a:ea typeface="Meiryo"/>
                         </a:rPr>
                         <a:t>AI時代の「本当の」ハイブリッドクラウド</a:t>
                       </a:r>
@@ -13821,6 +14172,7 @@
                             <a:srgbClr val="323130"/>
                           </a:solidFill>
                           <a:latin typeface="Meiryo"/>
+                          <a:ea typeface="Meiryo"/>
                         </a:rPr>
                         <a:t>胡田 昌彦</a:t>
                       </a:r>
@@ -13841,6 +14193,7 @@
                             <a:srgbClr val="323130"/>
                           </a:solidFill>
                           <a:latin typeface="Meiryo"/>
+                          <a:ea typeface="Meiryo"/>
                         </a:rPr>
                         <a:t>14:45 (10分)</a:t>
                       </a:r>
@@ -13859,6 +14212,7 @@
                             <a:srgbClr val="323130"/>
                           </a:solidFill>
                           <a:latin typeface="Meiryo"/>
+                          <a:ea typeface="Meiryo"/>
                         </a:rPr>
                         <a:t>Q&amp;A</a:t>
                       </a:r>
@@ -13877,6 +14231,7 @@
                             <a:srgbClr val="323130"/>
                           </a:solidFill>
                           <a:latin typeface="Meiryo"/>
+                          <a:ea typeface="Meiryo"/>
                         </a:rPr>
                         <a:t>全員</a:t>
                       </a:r>
@@ -13897,6 +14252,7 @@
                             <a:srgbClr val="323130"/>
                           </a:solidFill>
                           <a:latin typeface="Meiryo"/>
+                          <a:ea typeface="Meiryo"/>
                         </a:rPr>
                         <a:t>14:55 (20分)</a:t>
                       </a:r>
@@ -13915,6 +14271,7 @@
                             <a:srgbClr val="323130"/>
                           </a:solidFill>
                           <a:latin typeface="Meiryo"/>
+                          <a:ea typeface="Meiryo"/>
                         </a:rPr>
                         <a:t>Microsoft "Adaptive Cloud" 最新動向</a:t>
                       </a:r>
@@ -13933,6 +14290,7 @@
                             <a:srgbClr val="323130"/>
                           </a:solidFill>
                           <a:latin typeface="Meiryo"/>
+                          <a:ea typeface="Meiryo"/>
                         </a:rPr>
                         <a:t>高添 修 氏（日本マイクロソフト）</a:t>
                       </a:r>
@@ -13953,6 +14311,7 @@
                             <a:srgbClr val="323130"/>
                           </a:solidFill>
                           <a:latin typeface="Meiryo"/>
+                          <a:ea typeface="Meiryo"/>
                         </a:rPr>
                         <a:t>15:15 (10分)</a:t>
                       </a:r>
@@ -13971,6 +14330,7 @@
                             <a:srgbClr val="323130"/>
                           </a:solidFill>
                           <a:latin typeface="Meiryo"/>
+                          <a:ea typeface="Meiryo"/>
                         </a:rPr>
                         <a:t>Q&amp;A</a:t>
                       </a:r>
@@ -13989,6 +14349,7 @@
                             <a:srgbClr val="323130"/>
                           </a:solidFill>
                           <a:latin typeface="Meiryo"/>
+                          <a:ea typeface="Meiryo"/>
                         </a:rPr>
                         <a:t>高添 修 氏</a:t>
                       </a:r>
@@ -14009,6 +14370,7 @@
                             <a:srgbClr val="323130"/>
                           </a:solidFill>
                           <a:latin typeface="Meiryo"/>
+                          <a:ea typeface="Meiryo"/>
                         </a:rPr>
                         <a:t>15:25 (5分)</a:t>
                       </a:r>
@@ -14027,6 +14389,7 @@
                             <a:srgbClr val="323130"/>
                           </a:solidFill>
                           <a:latin typeface="Meiryo"/>
+                          <a:ea typeface="Meiryo"/>
                         </a:rPr>
                         <a:t>クロージング</a:t>
                       </a:r>
@@ -14045,6 +14408,7 @@
                             <a:srgbClr val="323130"/>
                           </a:solidFill>
                           <a:latin typeface="Meiryo"/>
+                          <a:ea typeface="Meiryo"/>
                         </a:rPr>
                         <a:t>胡田 昌彦</a:t>
                       </a:r>
@@ -14181,6 +14545,7 @@
                   <a:srgbClr val="0078D4"/>
                 </a:solidFill>
                 <a:latin typeface="Meiryo"/>
+                <a:ea typeface="Meiryo"/>
               </a:rPr>
               <a:t>エージェントが仕事をする仕組み</a:t>
             </a:r>
@@ -14263,6 +14628,7 @@
                   <a:srgbClr val="0078D4"/>
                 </a:solidFill>
                 <a:latin typeface="Meiryo"/>
+                <a:ea typeface="Meiryo"/>
               </a:rPr>
               <a:t>外部サービスへのアクセス = すべてAPI経由</a:t>
             </a:r>
@@ -14303,6 +14669,7 @@
                             <a:srgbClr val="243A5E"/>
                           </a:solidFill>
                           <a:latin typeface="Meiryo"/>
+                          <a:ea typeface="Meiryo"/>
                         </a:rPr>
                         <a:t>操作</a:t>
                       </a:r>
@@ -14325,6 +14692,7 @@
                             <a:srgbClr val="243A5E"/>
                           </a:solidFill>
                           <a:latin typeface="Meiryo"/>
+                          <a:ea typeface="Meiryo"/>
                         </a:rPr>
                         <a:t>手段</a:t>
                       </a:r>
@@ -14349,6 +14717,7 @@
                             <a:srgbClr val="323130"/>
                           </a:solidFill>
                           <a:latin typeface="Meiryo"/>
+                          <a:ea typeface="Meiryo"/>
                         </a:rPr>
                         <a:t>ファイル読み書き</a:t>
                       </a:r>
@@ -14367,6 +14736,7 @@
                             <a:srgbClr val="323130"/>
                           </a:solidFill>
                           <a:latin typeface="Meiryo"/>
+                          <a:ea typeface="Meiryo"/>
                         </a:rPr>
                         <a:t>OS API（ローカル）</a:t>
                       </a:r>
@@ -14387,6 +14757,7 @@
                             <a:srgbClr val="323130"/>
                           </a:solidFill>
                           <a:latin typeface="Meiryo"/>
+                          <a:ea typeface="Meiryo"/>
                         </a:rPr>
                         <a:t>コマンド実行</a:t>
                       </a:r>
@@ -14405,6 +14776,7 @@
                             <a:srgbClr val="323130"/>
                           </a:solidFill>
                           <a:latin typeface="Meiryo"/>
+                          <a:ea typeface="Meiryo"/>
                         </a:rPr>
                         <a:t>シェル = 広義のAPI</a:t>
                       </a:r>
@@ -14425,6 +14797,7 @@
                             <a:srgbClr val="323130"/>
                           </a:solidFill>
                           <a:latin typeface="Meiryo"/>
+                          <a:ea typeface="Meiryo"/>
                         </a:rPr>
                         <a:t>Git操作</a:t>
                       </a:r>
@@ -14443,6 +14816,7 @@
                             <a:srgbClr val="323130"/>
                           </a:solidFill>
                           <a:latin typeface="Meiryo"/>
+                          <a:ea typeface="Meiryo"/>
                         </a:rPr>
                         <a:t>git コマンド / GitHub API</a:t>
                       </a:r>
@@ -14463,6 +14837,7 @@
                             <a:srgbClr val="323130"/>
                           </a:solidFill>
                           <a:latin typeface="Meiryo"/>
+                          <a:ea typeface="Meiryo"/>
                         </a:rPr>
                         <a:t>カレンダー</a:t>
                       </a:r>
@@ -14481,6 +14856,7 @@
                             <a:srgbClr val="323130"/>
                           </a:solidFill>
                           <a:latin typeface="Meiryo"/>
+                          <a:ea typeface="Meiryo"/>
                         </a:rPr>
                         <a:t>Google Calendar API</a:t>
                       </a:r>
@@ -14501,6 +14877,7 @@
                             <a:srgbClr val="323130"/>
                           </a:solidFill>
                           <a:latin typeface="Meiryo"/>
+                          <a:ea typeface="Meiryo"/>
                         </a:rPr>
                         <a:t>Azureリソース</a:t>
                       </a:r>
@@ -14519,6 +14896,7 @@
                             <a:srgbClr val="323130"/>
                           </a:solidFill>
                           <a:latin typeface="Meiryo"/>
+                          <a:ea typeface="Meiryo"/>
                         </a:rPr>
                         <a:t>Azure Resource Manager API</a:t>
                       </a:r>
@@ -14539,6 +14917,7 @@
                             <a:srgbClr val="323130"/>
                           </a:solidFill>
                           <a:latin typeface="Meiryo"/>
+                          <a:ea typeface="Meiryo"/>
                         </a:rPr>
                         <a:t>複数ツール統合</a:t>
                       </a:r>
@@ -14557,6 +14936,7 @@
                             <a:srgbClr val="323130"/>
                           </a:solidFill>
                           <a:latin typeface="Meiryo"/>
+                          <a:ea typeface="Meiryo"/>
                         </a:rPr>
                         <a:t>MCP（内部でREST API等を呼び出し）</a:t>
                       </a:r>
@@ -14602,6 +14982,7 @@
                   <a:srgbClr val="323130"/>
                 </a:solidFill>
                 <a:latin typeface="Meiryo"/>
+                <a:ea typeface="Meiryo"/>
               </a:rPr>
               <a:t>MCPも結局は</a:t>
             </a:r>
@@ -14611,6 +14992,7 @@
                   <a:srgbClr val="323130"/>
                 </a:solidFill>
                 <a:latin typeface="Meiryo"/>
+                <a:ea typeface="Meiryo"/>
               </a:rPr>
               <a:t>裏でAPIを叩いている</a:t>
             </a:r>
@@ -14620,6 +15002,7 @@
                   <a:srgbClr val="323130"/>
                 </a:solidFill>
                 <a:latin typeface="Meiryo"/>
+                <a:ea typeface="Meiryo"/>
               </a:rPr>
               <a:t>。標準化で抽象化されても、土台はAPI。</a:t>
             </a:r>
@@ -14636,6 +15019,7 @@
                   <a:srgbClr val="323130"/>
                 </a:solidFill>
                 <a:latin typeface="Meiryo"/>
+                <a:ea typeface="Meiryo"/>
               </a:rPr>
               <a:t>APIがない場所 = エージェントが「触れない場所」</a:t>
             </a:r>
@@ -14766,6 +15150,7 @@
                   <a:srgbClr val="0078D4"/>
                 </a:solidFill>
                 <a:latin typeface="Meiryo"/>
+                <a:ea typeface="Meiryo"/>
               </a:rPr>
               <a:t>クラウドはAPIが当たり前</a:t>
             </a:r>
@@ -14848,6 +15233,7 @@
                   <a:srgbClr val="323130"/>
                 </a:solidFill>
                 <a:latin typeface="Meiryo"/>
+                <a:ea typeface="Meiryo"/>
               </a:rPr>
               <a:t>• Azure: Resource Manager API、Storage API、Kubernetes API…</a:t>
             </a:r>
@@ -14864,6 +15250,7 @@
                   <a:srgbClr val="323130"/>
                 </a:solidFill>
                 <a:latin typeface="Meiryo"/>
+                <a:ea typeface="Meiryo"/>
               </a:rPr>
               <a:t>• AWS / GCP: 全リソースがREST API経由</a:t>
             </a:r>
@@ -14880,6 +15267,7 @@
                   <a:srgbClr val="323130"/>
                 </a:solidFill>
                 <a:latin typeface="Meiryo"/>
+                <a:ea typeface="Meiryo"/>
               </a:rPr>
               <a:t>• </a:t>
             </a:r>
@@ -14889,6 +15277,7 @@
                   <a:srgbClr val="323130"/>
                 </a:solidFill>
                 <a:latin typeface="Meiryo"/>
+                <a:ea typeface="Meiryo"/>
               </a:rPr>
               <a:t>エージェントにとってクラウドは「天国」</a:t>
             </a:r>
@@ -14905,6 +15294,7 @@
                   <a:srgbClr val="323130"/>
                 </a:solidFill>
                 <a:latin typeface="Meiryo"/>
+                <a:ea typeface="Meiryo"/>
               </a:rPr>
               <a:t>    • 読める・作れる・消せる・設定できる → すべてAPIで自在に</a:t>
             </a:r>
@@ -15035,6 +15425,7 @@
                   <a:srgbClr val="0078D4"/>
                 </a:solidFill>
                 <a:latin typeface="Meiryo"/>
+                <a:ea typeface="Meiryo"/>
               </a:rPr>
               <a:t>💬 Kelsey Hightower（Google / Kubernetes）</a:t>
             </a:r>
@@ -15117,6 +15508,7 @@
                   <a:srgbClr val="0078D4"/>
                 </a:solidFill>
                 <a:latin typeface="Meiryo"/>
+                <a:ea typeface="Meiryo"/>
               </a:rPr>
               <a:t>"No one wants to manage infrastructure.
 They want to consume it via API."</a:t>
@@ -15134,6 +15526,7 @@
                   <a:srgbClr val="323130"/>
                 </a:solidFill>
                 <a:latin typeface="Meiryo"/>
+                <a:ea typeface="Meiryo"/>
               </a:rPr>
               <a:t>• Kubernetes の生みの親の一人</a:t>
             </a:r>
@@ -15150,6 +15543,7 @@
                   <a:srgbClr val="323130"/>
                 </a:solidFill>
                 <a:latin typeface="Meiryo"/>
+                <a:ea typeface="Meiryo"/>
               </a:rPr>
               <a:t>• 「インフラはAPIで消費するもの」という思想を一貫して主張</a:t>
             </a:r>
@@ -15166,6 +15560,7 @@
                   <a:srgbClr val="323130"/>
                 </a:solidFill>
                 <a:latin typeface="Meiryo"/>
+                <a:ea typeface="Meiryo"/>
               </a:rPr>
               <a:t>• KubernetesはオンプレをAPIで包む「プラットフォームのプラットフォーム」</a:t>
             </a:r>
@@ -15182,6 +15577,7 @@
                   <a:srgbClr val="323130"/>
                 </a:solidFill>
                 <a:latin typeface="Meiryo"/>
+                <a:ea typeface="Meiryo"/>
               </a:rPr>
               <a:t>この哲学がそのままAIエージェント時代の答えになっている</a:t>
             </a:r>
@@ -15312,6 +15708,7 @@
                   <a:srgbClr val="0078D4"/>
                 </a:solidFill>
                 <a:latin typeface="Meiryo"/>
+                <a:ea typeface="Meiryo"/>
               </a:rPr>
               <a:t>オンプレミスは？</a:t>
             </a:r>
@@ -15394,6 +15791,7 @@
                   <a:srgbClr val="0078D4"/>
                 </a:solidFill>
                 <a:latin typeface="Meiryo"/>
+                <a:ea typeface="Meiryo"/>
               </a:rPr>
               <a:t>APIが限定的だった</a:t>
             </a:r>
@@ -15410,6 +15808,7 @@
                   <a:srgbClr val="323130"/>
                 </a:solidFill>
                 <a:latin typeface="Meiryo"/>
+                <a:ea typeface="Meiryo"/>
               </a:rPr>
               <a:t>• 昔のシステム: GUIや独自プロトコルが中心</a:t>
             </a:r>
@@ -15426,6 +15825,7 @@
                   <a:srgbClr val="323130"/>
                 </a:solidFill>
                 <a:latin typeface="Meiryo"/>
+                <a:ea typeface="Meiryo"/>
               </a:rPr>
               <a:t>• 管理: 専用コンソールを人間が直接操作</a:t>
             </a:r>
@@ -15442,6 +15842,7 @@
                   <a:srgbClr val="323130"/>
                 </a:solidFill>
                 <a:latin typeface="Meiryo"/>
+                <a:ea typeface="Meiryo"/>
               </a:rPr>
               <a:t>• 自動化: スクリプト職人が個別に対応</a:t>
             </a:r>
@@ -15458,6 +15859,7 @@
                   <a:srgbClr val="323130"/>
                 </a:solidFill>
                 <a:latin typeface="Meiryo"/>
+                <a:ea typeface="Meiryo"/>
               </a:rPr>
               <a:t>「手作業で困っていない」が通用した時代</a:t>
             </a:r>
@@ -15588,6 +15990,7 @@
                   <a:srgbClr val="0078D4"/>
                 </a:solidFill>
                 <a:latin typeface="Meiryo"/>
+                <a:ea typeface="Meiryo"/>
               </a:rPr>
               <a:t>AIエージェントの目線で見ると</a:t>
             </a:r>
@@ -15672,6 +16075,7 @@
                             <a:srgbClr val="243A5E"/>
                           </a:solidFill>
                           <a:latin typeface="Meiryo"/>
+                          <a:ea typeface="Meiryo"/>
                         </a:rPr>
                         <a:t>環境</a:t>
                       </a:r>
@@ -15694,6 +16098,7 @@
                             <a:srgbClr val="243A5E"/>
                           </a:solidFill>
                           <a:latin typeface="Meiryo"/>
+                          <a:ea typeface="Meiryo"/>
                         </a:rPr>
                         <a:t>APIの充実度</a:t>
                       </a:r>
@@ -15716,6 +16121,7 @@
                             <a:srgbClr val="243A5E"/>
                           </a:solidFill>
                           <a:latin typeface="Meiryo"/>
+                          <a:ea typeface="Meiryo"/>
                         </a:rPr>
                         <a:t>エージェントの働ける範囲</a:t>
                       </a:r>
@@ -15740,6 +16146,7 @@
                             <a:srgbClr val="323130"/>
                           </a:solidFill>
                           <a:latin typeface="Meiryo"/>
+                          <a:ea typeface="Meiryo"/>
                         </a:rPr>
                         <a:t>クラウド</a:t>
                       </a:r>
@@ -15758,6 +16165,7 @@
                             <a:srgbClr val="323130"/>
                           </a:solidFill>
                           <a:latin typeface="Meiryo"/>
+                          <a:ea typeface="Meiryo"/>
                         </a:rPr>
                         <a:t>◎ 全操作がAPI化</a:t>
                       </a:r>
@@ -15776,6 +16184,7 @@
                             <a:srgbClr val="323130"/>
                           </a:solidFill>
                           <a:latin typeface="Meiryo"/>
+                          <a:ea typeface="Meiryo"/>
                         </a:rPr>
                         <a:t>自在に仕事できる</a:t>
                       </a:r>
@@ -15796,6 +16205,7 @@
                             <a:srgbClr val="323130"/>
                           </a:solidFill>
                           <a:latin typeface="Meiryo"/>
+                          <a:ea typeface="Meiryo"/>
                         </a:rPr>
                         <a:t>API整備済みオンプレ</a:t>
                       </a:r>
@@ -15814,6 +16224,7 @@
                             <a:srgbClr val="323130"/>
                           </a:solidFill>
                           <a:latin typeface="Meiryo"/>
+                          <a:ea typeface="Meiryo"/>
                         </a:rPr>
                         <a:t>○</a:t>
                       </a:r>
@@ -15832,6 +16243,7 @@
                             <a:srgbClr val="323130"/>
                           </a:solidFill>
                           <a:latin typeface="Meiryo"/>
+                          <a:ea typeface="Meiryo"/>
                         </a:rPr>
                         <a:t>かなり仕事できる</a:t>
                       </a:r>
@@ -15852,6 +16264,7 @@
                             <a:srgbClr val="323130"/>
                           </a:solidFill>
                           <a:latin typeface="Meiryo"/>
+                          <a:ea typeface="Meiryo"/>
                         </a:rPr>
                         <a:t>従来型オンプレ</a:t>
                       </a:r>
@@ -15870,6 +16283,7 @@
                             <a:srgbClr val="323130"/>
                           </a:solidFill>
                           <a:latin typeface="Meiryo"/>
+                          <a:ea typeface="Meiryo"/>
                         </a:rPr>
                         <a:t>△〜×</a:t>
                       </a:r>
@@ -15888,6 +16302,7 @@
                             <a:srgbClr val="323130"/>
                           </a:solidFill>
                           <a:latin typeface="Meiryo"/>
+                          <a:ea typeface="Meiryo"/>
                         </a:rPr>
                         <a:t>手を出せる範囲が限定的</a:t>
                       </a:r>
@@ -15933,6 +16348,7 @@
                   <a:srgbClr val="323130"/>
                 </a:solidFill>
                 <a:latin typeface="Meiryo"/>
+                <a:ea typeface="Meiryo"/>
               </a:rPr>
               <a:t>インフラのAPI化 = エージェントへの「権限委譲」が可能</a:t>
             </a:r>
@@ -16063,6 +16479,7 @@
                   <a:srgbClr val="0078D4"/>
                 </a:solidFill>
                 <a:latin typeface="Meiryo"/>
+                <a:ea typeface="Meiryo"/>
               </a:rPr>
               <a:t>Azure Arcで実現する世界</a:t>
             </a:r>
@@ -16145,6 +16562,7 @@
                   <a:srgbClr val="0078D4"/>
                 </a:solidFill>
                 <a:latin typeface="Meiryo"/>
+                <a:ea typeface="Meiryo"/>
               </a:rPr>
               <a:t>オンプレにも同じAPIと同じセキュリティモデルを</a:t>
             </a:r>
@@ -16161,6 +16579,7 @@
                   <a:srgbClr val="323130"/>
                 </a:solidFill>
                 <a:latin typeface="Meiryo"/>
+                <a:ea typeface="Meiryo"/>
               </a:rPr>
               <a:t>• </a:t>
             </a:r>
@@ -16170,6 +16589,7 @@
                   <a:srgbClr val="323130"/>
                 </a:solidFill>
                 <a:latin typeface="Meiryo"/>
+                <a:ea typeface="Meiryo"/>
               </a:rPr>
               <a:t>Azure Local</a:t>
             </a:r>
@@ -16179,6 +16599,7 @@
                   <a:srgbClr val="323130"/>
                 </a:solidFill>
                 <a:latin typeface="Meiryo"/>
+                <a:ea typeface="Meiryo"/>
               </a:rPr>
               <a:t> → オンプレのインフラをAzure APIで操作</a:t>
             </a:r>
@@ -16195,6 +16616,7 @@
                   <a:srgbClr val="323130"/>
                 </a:solidFill>
                 <a:latin typeface="Meiryo"/>
+                <a:ea typeface="Meiryo"/>
               </a:rPr>
               <a:t>• </a:t>
             </a:r>
@@ -16204,6 +16626,7 @@
                   <a:srgbClr val="323130"/>
                 </a:solidFill>
                 <a:latin typeface="Meiryo"/>
+                <a:ea typeface="Meiryo"/>
               </a:rPr>
               <a:t>Arc-enabled Servers</a:t>
             </a:r>
@@ -16213,6 +16636,7 @@
                   <a:srgbClr val="323130"/>
                 </a:solidFill>
                 <a:latin typeface="Meiryo"/>
+                <a:ea typeface="Meiryo"/>
               </a:rPr>
               <a:t> → 普通のサーバーもAzure Resource Managerで管理</a:t>
             </a:r>
@@ -16229,6 +16653,7 @@
                   <a:srgbClr val="323130"/>
                 </a:solidFill>
                 <a:latin typeface="Meiryo"/>
+                <a:ea typeface="Meiryo"/>
               </a:rPr>
               <a:t>• </a:t>
             </a:r>
@@ -16238,6 +16663,7 @@
                   <a:srgbClr val="323130"/>
                 </a:solidFill>
                 <a:latin typeface="Meiryo"/>
+                <a:ea typeface="Meiryo"/>
               </a:rPr>
               <a:t>Arc-enabled Kubernetes</a:t>
             </a:r>
@@ -16247,6 +16673,7 @@
                   <a:srgbClr val="323130"/>
                 </a:solidFill>
                 <a:latin typeface="Meiryo"/>
+                <a:ea typeface="Meiryo"/>
               </a:rPr>
               <a:t> → 既存のK8sクラスターをAzure APIで管理</a:t>
             </a:r>
@@ -16263,6 +16690,7 @@
                   <a:srgbClr val="323130"/>
                 </a:solidFill>
                 <a:latin typeface="Meiryo"/>
+                <a:ea typeface="Meiryo"/>
               </a:rPr>
               <a:t>• </a:t>
             </a:r>
@@ -16272,6 +16700,7 @@
                   <a:srgbClr val="323130"/>
                 </a:solidFill>
                 <a:latin typeface="Meiryo"/>
+                <a:ea typeface="Meiryo"/>
               </a:rPr>
               <a:t>AKS enabled by Azure Arc</a:t>
             </a:r>
@@ -16281,6 +16710,7 @@
                   <a:srgbClr val="323130"/>
                 </a:solidFill>
                 <a:latin typeface="Meiryo"/>
+                <a:ea typeface="Meiryo"/>
               </a:rPr>
               <a:t> → Azure Local上でAKSを運用</a:t>
             </a:r>
@@ -16297,6 +16727,7 @@
                   <a:srgbClr val="323130"/>
                 </a:solidFill>
                 <a:latin typeface="Meiryo"/>
+                <a:ea typeface="Meiryo"/>
               </a:rPr>
               <a:t>• </a:t>
             </a:r>
@@ -16306,6 +16737,7 @@
                   <a:srgbClr val="323130"/>
                 </a:solidFill>
                 <a:latin typeface="Meiryo"/>
+                <a:ea typeface="Meiryo"/>
               </a:rPr>
               <a:t>Arc-enabled Data Services</a:t>
             </a:r>
@@ -16315,6 +16747,7 @@
                   <a:srgbClr val="323130"/>
                 </a:solidFill>
                 <a:latin typeface="Meiryo"/>
+                <a:ea typeface="Meiryo"/>
               </a:rPr>
               <a:t> → DBもAzure APIで運用</a:t>
             </a:r>
@@ -16331,6 +16764,7 @@
                   <a:srgbClr val="323130"/>
                 </a:solidFill>
                 <a:latin typeface="Meiryo"/>
+                <a:ea typeface="Meiryo"/>
               </a:rPr>
               <a:t>→ </a:t>
             </a:r>
@@ -16340,6 +16774,7 @@
                   <a:srgbClr val="323130"/>
                 </a:solidFill>
                 <a:latin typeface="Meiryo"/>
+                <a:ea typeface="Meiryo"/>
               </a:rPr>
               <a:t>API</a:t>
             </a:r>
@@ -16349,6 +16784,7 @@
                   <a:srgbClr val="323130"/>
                 </a:solidFill>
                 <a:latin typeface="Meiryo"/>
+                <a:ea typeface="Meiryo"/>
               </a:rPr>
               <a:t> だけでなく </a:t>
             </a:r>
@@ -16358,6 +16794,7 @@
                   <a:srgbClr val="323130"/>
                 </a:solidFill>
                 <a:latin typeface="Meiryo"/>
+                <a:ea typeface="Meiryo"/>
               </a:rPr>
               <a:t>Azure RBAC</a:t>
             </a:r>
@@ -16367,6 +16804,7 @@
                   <a:srgbClr val="323130"/>
                 </a:solidFill>
                 <a:latin typeface="Meiryo"/>
+                <a:ea typeface="Meiryo"/>
               </a:rPr>
               <a:t> も統一される</a:t>
             </a:r>
@@ -16383,6 +16821,7 @@
                   <a:srgbClr val="323130"/>
                 </a:solidFill>
                 <a:latin typeface="Meiryo"/>
+                <a:ea typeface="Meiryo"/>
               </a:rPr>
               <a:t>→ エージェントから見ると「クラウドとオンプレの差がなくなる」</a:t>
             </a:r>
@@ -16513,6 +16952,7 @@
                   <a:srgbClr val="0078D4"/>
                 </a:solidFill>
                 <a:latin typeface="Meiryo"/>
+                <a:ea typeface="Meiryo"/>
               </a:rPr>
               <a:t>クラウドとオンプレを同じAPIと同じRBACで</a:t>
             </a:r>
@@ -16603,11 +17043,12 @@
           <a:p>
             <a:pPr algn="ctr"/>
             <a:r>
-              <a:rPr sz="1700">
+              <a:rPr sz="1700" kern="0" spc="0">
                 <a:solidFill>
                   <a:srgbClr val="323130"/>
                 </a:solidFill>
                 <a:latin typeface="MS Gothic"/>
+                <a:ea typeface="MS Gothic"/>
               </a:rPr>
               <a:t>AIエージェント（Claude Code / Cursor / Copilot...）
               | 同じ API + 同じ RBAC
@@ -16658,6 +17099,7 @@
                   <a:srgbClr val="323130"/>
                 </a:solidFill>
                 <a:latin typeface="Meiryo"/>
+                <a:ea typeface="Meiryo"/>
               </a:rPr>
               <a:t>エージェントは自由に動ける。管理者はRBACで権限をコントロールできる。</a:t>
             </a:r>
@@ -16788,6 +17230,7 @@
                   <a:srgbClr val="0078D4"/>
                 </a:solidFill>
                 <a:latin typeface="Meiryo"/>
+                <a:ea typeface="Meiryo"/>
               </a:rPr>
               <a:t>Azure Arc =</a:t>
             </a:r>
@@ -16870,6 +17313,7 @@
                   <a:srgbClr val="0078D4"/>
                 </a:solidFill>
                 <a:latin typeface="Meiryo"/>
+                <a:ea typeface="Meiryo"/>
               </a:rPr>
               <a:t>AIエージェントにとって最高の環境</a:t>
             </a:r>
@@ -16886,6 +17330,7 @@
                   <a:srgbClr val="323130"/>
                 </a:solidFill>
                 <a:latin typeface="Meiryo"/>
+                <a:ea typeface="Meiryo"/>
               </a:rPr>
               <a:t>• </a:t>
             </a:r>
@@ -16895,6 +17340,7 @@
                   <a:srgbClr val="323130"/>
                 </a:solidFill>
                 <a:latin typeface="Meiryo"/>
+                <a:ea typeface="Meiryo"/>
               </a:rPr>
               <a:t>API</a:t>
             </a:r>
@@ -16904,6 +17350,7 @@
                   <a:srgbClr val="323130"/>
                 </a:solidFill>
                 <a:latin typeface="Meiryo"/>
+                <a:ea typeface="Meiryo"/>
               </a:rPr>
               <a:t>: クラウドもオンプレも同じように操作できる</a:t>
             </a:r>
@@ -16920,6 +17367,7 @@
                   <a:srgbClr val="323130"/>
                 </a:solidFill>
                 <a:latin typeface="Meiryo"/>
+                <a:ea typeface="Meiryo"/>
               </a:rPr>
               <a:t>• </a:t>
             </a:r>
@@ -16929,6 +17377,7 @@
                   <a:srgbClr val="323130"/>
                 </a:solidFill>
                 <a:latin typeface="Meiryo"/>
+                <a:ea typeface="Meiryo"/>
               </a:rPr>
               <a:t>RBAC</a:t>
             </a:r>
@@ -16938,6 +17387,7 @@
                   <a:srgbClr val="323130"/>
                 </a:solidFill>
                 <a:latin typeface="Meiryo"/>
+                <a:ea typeface="Meiryo"/>
               </a:rPr>
               <a:t>: 一貫したセキュリティモデルで権限制御</a:t>
             </a:r>
@@ -16954,6 +17404,7 @@
                   <a:srgbClr val="323130"/>
                 </a:solidFill>
                 <a:latin typeface="Meiryo"/>
+                <a:ea typeface="Meiryo"/>
               </a:rPr>
               <a:t>• </a:t>
             </a:r>
@@ -16963,6 +17414,7 @@
                   <a:srgbClr val="323130"/>
                 </a:solidFill>
                 <a:latin typeface="Meiryo"/>
+                <a:ea typeface="Meiryo"/>
               </a:rPr>
               <a:t>自由 × 統制</a:t>
             </a:r>
@@ -16972,6 +17424,7 @@
                   <a:srgbClr val="323130"/>
                 </a:solidFill>
                 <a:latin typeface="Meiryo"/>
+                <a:ea typeface="Meiryo"/>
               </a:rPr>
               <a:t>: エージェントは縦横無尽、管理者はしっかり制御</a:t>
             </a:r>
@@ -17102,6 +17555,7 @@
                   <a:srgbClr val="0078D4"/>
                 </a:solidFill>
                 <a:latin typeface="Meiryo"/>
+                <a:ea typeface="Meiryo"/>
               </a:rPr>
               <a:t>「セルフサービス化・クラウドネイティブ化」の真の意味</a:t>
             </a:r>
@@ -17186,6 +17640,7 @@
                             <a:srgbClr val="243A5E"/>
                           </a:solidFill>
                           <a:latin typeface="Meiryo"/>
+                          <a:ea typeface="Meiryo"/>
                         </a:rPr>
                         <a:t>時代</a:t>
                       </a:r>
@@ -17208,6 +17663,7 @@
                             <a:srgbClr val="243A5E"/>
                           </a:solidFill>
                           <a:latin typeface="Meiryo"/>
+                          <a:ea typeface="Meiryo"/>
                         </a:rPr>
                         <a:t>理解されにくかった理由</a:t>
                       </a:r>
@@ -17230,6 +17686,7 @@
                             <a:srgbClr val="243A5E"/>
                           </a:solidFill>
                           <a:latin typeface="Meiryo"/>
+                          <a:ea typeface="Meiryo"/>
                         </a:rPr>
                         <a:t>AIエージェント時代の説明</a:t>
                       </a:r>
@@ -17254,6 +17711,7 @@
                             <a:srgbClr val="323130"/>
                           </a:solidFill>
                           <a:latin typeface="Meiryo"/>
+                          <a:ea typeface="Meiryo"/>
                         </a:rPr>
                         <a:t>従来</a:t>
                       </a:r>
@@ -17272,6 +17730,7 @@
                             <a:srgbClr val="323130"/>
                           </a:solidFill>
                           <a:latin typeface="Meiryo"/>
+                          <a:ea typeface="Meiryo"/>
                         </a:rPr>
                         <a:t>「手作業で困ってません」</a:t>
                       </a:r>
@@ -17290,6 +17749,7 @@
                             <a:srgbClr val="323130"/>
                           </a:solidFill>
                           <a:latin typeface="Meiryo"/>
+                          <a:ea typeface="Meiryo"/>
                         </a:rPr>
                         <a:t>✗ 刺さらない</a:t>
                       </a:r>
@@ -17310,6 +17770,7 @@
                             <a:srgbClr val="323130"/>
                           </a:solidFill>
                           <a:latin typeface="Meiryo"/>
+                          <a:ea typeface="Meiryo"/>
                         </a:rPr>
                         <a:t>AI時代</a:t>
                       </a:r>
@@ -17328,6 +17789,7 @@
                             <a:srgbClr val="323130"/>
                           </a:solidFill>
                           <a:latin typeface="Meiryo"/>
+                          <a:ea typeface="Meiryo"/>
                         </a:rPr>
                         <a:t>「APIがないとエージェントが仕事できません」</a:t>
                       </a:r>
@@ -17346,6 +17808,7 @@
                             <a:srgbClr val="323130"/>
                           </a:solidFill>
                           <a:latin typeface="Meiryo"/>
+                          <a:ea typeface="Meiryo"/>
                         </a:rPr>
                         <a:t>✓ 即わかる</a:t>
                       </a:r>
@@ -17391,6 +17854,7 @@
                   <a:srgbClr val="323130"/>
                 </a:solidFill>
                 <a:latin typeface="Meiryo"/>
+                <a:ea typeface="Meiryo"/>
               </a:rPr>
               <a:t>インフラを整えることの意味が、初めて全員に伝わる時代</a:t>
             </a:r>
@@ -17526,6 +17990,7 @@
                   <a:srgbClr val="0078D4"/>
                 </a:solidFill>
                 <a:latin typeface="Meiryo"/>
+                <a:ea typeface="Meiryo"/>
               </a:rPr>
               <a:t>まとめ</a:t>
             </a:r>
@@ -17542,6 +18007,7 @@
                   <a:srgbClr val="0078D4"/>
                 </a:solidFill>
                 <a:latin typeface="Meiryo"/>
+                <a:ea typeface="Meiryo"/>
               </a:rPr>
               <a:t>じゃあ、何をすればいいのか</a:t>
             </a:r>
@@ -17696,6 +18162,7 @@
                   <a:srgbClr val="0078D4"/>
                 </a:solidFill>
                 <a:latin typeface="Meiryo"/>
+                <a:ea typeface="Meiryo"/>
               </a:rPr>
               <a:t>HCCJPとは</a:t>
             </a:r>
@@ -17778,6 +18245,7 @@
                   <a:srgbClr val="0078D4"/>
                 </a:solidFill>
                 <a:latin typeface="Meiryo"/>
+                <a:ea typeface="Meiryo"/>
               </a:rPr>
               <a:t>ハイブリッドクラウド研究会</a:t>
             </a:r>
@@ -17794,6 +18262,7 @@
                   <a:srgbClr val="323130"/>
                 </a:solidFill>
                 <a:latin typeface="Meiryo"/>
+                <a:ea typeface="Meiryo"/>
               </a:rPr>
               <a:t>• 毎月第2金曜日 14時から開催</a:t>
             </a:r>
@@ -17810,6 +18279,7 @@
                   <a:srgbClr val="323130"/>
                 </a:solidFill>
                 <a:latin typeface="Meiryo"/>
+                <a:ea typeface="Meiryo"/>
               </a:rPr>
               <a:t>• Azure + ハイブリッドクラウド関連の最新情報</a:t>
             </a:r>
@@ -17826,6 +18296,7 @@
                   <a:srgbClr val="323130"/>
                 </a:solidFill>
                 <a:latin typeface="Meiryo"/>
+                <a:ea typeface="Meiryo"/>
               </a:rPr>
               <a:t>• オンライン配信（YouTube HCCJPチャンネル）</a:t>
             </a:r>
@@ -17842,6 +18313,7 @@
                   <a:srgbClr val="323130"/>
                 </a:solidFill>
                 <a:latin typeface="Meiryo"/>
+                <a:ea typeface="Meiryo"/>
               </a:rPr>
               <a:t>📺チャンネル登録お願いします！</a:t>
             </a:r>
@@ -17972,6 +18444,7 @@
                   <a:srgbClr val="0078D4"/>
                 </a:solidFill>
                 <a:latin typeface="Meiryo"/>
+                <a:ea typeface="Meiryo"/>
               </a:rPr>
               <a:t>もう一度この表を見てみよう</a:t>
             </a:r>
@@ -18069,6 +18542,7 @@
                             <a:srgbClr val="243A5E"/>
                           </a:solidFill>
                           <a:latin typeface="Meiryo"/>
+                          <a:ea typeface="Meiryo"/>
                         </a:rPr>
                         <a:t>オンプレ</a:t>
                       </a:r>
@@ -18091,6 +18565,7 @@
                             <a:srgbClr val="243A5E"/>
                           </a:solidFill>
                           <a:latin typeface="Meiryo"/>
+                          <a:ea typeface="Meiryo"/>
                         </a:rPr>
                         <a:t>クラウド基盤（IaaS/PaaS）</a:t>
                       </a:r>
@@ -18113,6 +18588,7 @@
                             <a:srgbClr val="243A5E"/>
                           </a:solidFill>
                           <a:latin typeface="Meiryo"/>
+                          <a:ea typeface="Meiryo"/>
                         </a:rPr>
                         <a:t>SaaS</a:t>
                       </a:r>
@@ -18137,6 +18613,7 @@
                             <a:srgbClr val="323130"/>
                           </a:solidFill>
                           <a:latin typeface="Meiryo"/>
+                          <a:ea typeface="Meiryo"/>
                         </a:rPr>
                         <a:t>モデル(実行基盤)</a:t>
                       </a:r>
@@ -18155,6 +18632,7 @@
                             <a:srgbClr val="323130"/>
                           </a:solidFill>
                           <a:latin typeface="Meiryo"/>
+                          <a:ea typeface="Meiryo"/>
                         </a:rPr>
                         <a:t>Ollama, vLLM等</a:t>
                       </a:r>
@@ -18173,6 +18651,7 @@
                             <a:srgbClr val="323130"/>
                           </a:solidFill>
                           <a:latin typeface="Meiryo"/>
+                          <a:ea typeface="Meiryo"/>
                         </a:rPr>
                         <a:t>Microsoft Foundry等</a:t>
                       </a:r>
@@ -18191,6 +18670,7 @@
                             <a:srgbClr val="323130"/>
                           </a:solidFill>
                           <a:latin typeface="Meiryo"/>
+                          <a:ea typeface="Meiryo"/>
                         </a:rPr>
                         <a:t>OpenAI API, Anthropic API, Google AI API等</a:t>
                       </a:r>
@@ -18211,6 +18691,7 @@
                             <a:srgbClr val="323130"/>
                           </a:solidFill>
                           <a:latin typeface="Meiryo"/>
+                          <a:ea typeface="Meiryo"/>
                         </a:rPr>
                         <a:t>エージェントソフト</a:t>
                       </a:r>
@@ -18229,6 +18710,7 @@
                             <a:srgbClr val="323130"/>
                           </a:solidFill>
                           <a:latin typeface="Meiryo"/>
+                          <a:ea typeface="Meiryo"/>
                         </a:rPr>
                         <a:t>自作, Claude Code, Codex, Gemini CLI, GitHub Copilot CLI　など</a:t>
                       </a:r>
@@ -18255,6 +18737,7 @@
                             <a:srgbClr val="323130"/>
                           </a:solidFill>
                           <a:latin typeface="Meiryo"/>
+                          <a:ea typeface="Meiryo"/>
                         </a:rPr>
                         <a:t>GitHub Copilot Coding Agent, Claude Code on the Web, Devin　など</a:t>
                       </a:r>
@@ -18275,6 +18758,7 @@
                             <a:srgbClr val="323130"/>
                           </a:solidFill>
                           <a:latin typeface="Meiryo"/>
+                          <a:ea typeface="Meiryo"/>
                         </a:rPr>
                         <a:t>コンテキスト</a:t>
                       </a:r>
@@ -18293,6 +18777,7 @@
                             <a:srgbClr val="323130"/>
                           </a:solidFill>
                           <a:latin typeface="Meiryo"/>
+                          <a:ea typeface="Meiryo"/>
                         </a:rPr>
                         <a:t>ファイル（CLAUDE.md, フォルダ構造で工夫）/ Gitレポジトリ, GitLab / DB・ベクトルストア など</a:t>
                       </a:r>
@@ -18319,6 +18804,7 @@
                             <a:srgbClr val="323130"/>
                           </a:solidFill>
                           <a:latin typeface="Meiryo"/>
+                          <a:ea typeface="Meiryo"/>
                         </a:rPr>
                         <a:t>GitHubレポジトリ, Copilot Spaces, M365, WorkIQ, Google Workspaces, Notion 等(※API, MCP経由でどこでもつながる)</a:t>
                       </a:r>
@@ -18364,6 +18850,7 @@
                   <a:srgbClr val="323130"/>
                 </a:solidFill>
                 <a:latin typeface="Meiryo"/>
+                <a:ea typeface="Meiryo"/>
               </a:rPr>
               <a:t>• 🧠 </a:t>
             </a:r>
@@ -18373,6 +18860,7 @@
                   <a:srgbClr val="323130"/>
                 </a:solidFill>
                 <a:latin typeface="Meiryo"/>
+                <a:ea typeface="Meiryo"/>
               </a:rPr>
               <a:t>モデル</a:t>
             </a:r>
@@ -18382,6 +18870,7 @@
                   <a:srgbClr val="323130"/>
                 </a:solidFill>
                 <a:latin typeface="Meiryo"/>
+                <a:ea typeface="Meiryo"/>
               </a:rPr>
               <a:t> → 用途に合わせて自由に選択すればいい</a:t>
             </a:r>
@@ -18398,6 +18887,7 @@
                   <a:srgbClr val="323130"/>
                 </a:solidFill>
                 <a:latin typeface="Meiryo"/>
+                <a:ea typeface="Meiryo"/>
               </a:rPr>
               <a:t>• 🤖 </a:t>
             </a:r>
@@ -18407,6 +18897,7 @@
                   <a:srgbClr val="323130"/>
                 </a:solidFill>
                 <a:latin typeface="Meiryo"/>
+                <a:ea typeface="Meiryo"/>
               </a:rPr>
               <a:t>エージェントソフト</a:t>
             </a:r>
@@ -18416,6 +18907,7 @@
                   <a:srgbClr val="323130"/>
                 </a:solidFill>
                 <a:latin typeface="Meiryo"/>
+                <a:ea typeface="Meiryo"/>
               </a:rPr>
               <a:t> → その時々の最強を使えばいい</a:t>
             </a:r>
@@ -18432,6 +18924,7 @@
                   <a:srgbClr val="323130"/>
                 </a:solidFill>
                 <a:latin typeface="Meiryo"/>
+                <a:ea typeface="Meiryo"/>
               </a:rPr>
               <a:t>• 🏃 </a:t>
             </a:r>
@@ -18441,6 +18934,7 @@
                   <a:srgbClr val="323130"/>
                 </a:solidFill>
                 <a:latin typeface="Meiryo"/>
+                <a:ea typeface="Meiryo"/>
               </a:rPr>
               <a:t>配置先</a:t>
             </a:r>
@@ -18450,6 +18944,7 @@
                   <a:srgbClr val="323130"/>
                 </a:solidFill>
                 <a:latin typeface="Meiryo"/>
+                <a:ea typeface="Meiryo"/>
               </a:rPr>
               <a:t> → 本質的にどこでもOK。きちんと整備しておけばいい</a:t>
             </a:r>
@@ -18466,6 +18961,7 @@
                   <a:srgbClr val="323130"/>
                 </a:solidFill>
                 <a:latin typeface="Meiryo"/>
+                <a:ea typeface="Meiryo"/>
               </a:rPr>
               <a:t>• ⚡ </a:t>
             </a:r>
@@ -18475,6 +18971,7 @@
                   <a:srgbClr val="323130"/>
                 </a:solidFill>
                 <a:latin typeface="Meiryo"/>
+                <a:ea typeface="Meiryo"/>
               </a:rPr>
               <a:t>前提: すべてにAPIがあること</a:t>
             </a:r>
@@ -18484,6 +18981,7 @@
                   <a:srgbClr val="323130"/>
                 </a:solidFill>
                 <a:latin typeface="Meiryo"/>
+                <a:ea typeface="Meiryo"/>
               </a:rPr>
               <a:t>（APIがなければエージェントは動けない）</a:t>
             </a:r>
@@ -18500,6 +18998,7 @@
                   <a:srgbClr val="323130"/>
                 </a:solidFill>
                 <a:latin typeface="Meiryo"/>
+                <a:ea typeface="Meiryo"/>
               </a:rPr>
               <a:t>→ APIさえあればAIエージェント側は自由に動ける。残るのは…？</a:t>
             </a:r>
@@ -18630,6 +19129,7 @@
                   <a:srgbClr val="0078D4"/>
                 </a:solidFill>
                 <a:latin typeface="Meiryo"/>
+                <a:ea typeface="Meiryo"/>
               </a:rPr>
               <a:t>残るのはコンテキスト</a:t>
             </a:r>
@@ -18712,6 +19212,7 @@
                   <a:srgbClr val="323130"/>
                 </a:solidFill>
                 <a:latin typeface="Meiryo"/>
+                <a:ea typeface="Meiryo"/>
               </a:rPr>
               <a:t>• M365、DB、社内システム、ファイルサーバー…</a:t>
             </a:r>
@@ -18728,6 +19229,7 @@
                   <a:srgbClr val="323130"/>
                 </a:solidFill>
                 <a:latin typeface="Meiryo"/>
+                <a:ea typeface="Meiryo"/>
               </a:rPr>
               <a:t>• </a:t>
             </a:r>
@@ -18737,6 +19239,7 @@
                   <a:srgbClr val="323130"/>
                 </a:solidFill>
                 <a:latin typeface="Meiryo"/>
+                <a:ea typeface="Meiryo"/>
               </a:rPr>
               <a:t>「動かせない既存の大量のデータやシステム」</a:t>
             </a:r>
@@ -18753,6 +19256,7 @@
                   <a:srgbClr val="323130"/>
                 </a:solidFill>
                 <a:latin typeface="Meiryo"/>
+                <a:ea typeface="Meiryo"/>
               </a:rPr>
               <a:t>• これは企業ごとに全く違う。ここだけは自分たちで整備するしかない</a:t>
             </a:r>
@@ -18883,6 +19387,7 @@
                   <a:srgbClr val="0078D4"/>
                 </a:solidFill>
                 <a:latin typeface="Meiryo"/>
+                <a:ea typeface="Meiryo"/>
               </a:rPr>
               <a:t>ここでもArcが効く</a:t>
             </a:r>
@@ -18965,6 +19470,7 @@
                   <a:srgbClr val="323130"/>
                 </a:solidFill>
                 <a:latin typeface="Meiryo"/>
+                <a:ea typeface="Meiryo"/>
               </a:rPr>
               <a:t>• 例：オンプレのファイルサーバーにもArcを入れて管理しておけば → </a:t>
             </a:r>
@@ -18974,6 +19480,7 @@
                   <a:srgbClr val="323130"/>
                 </a:solidFill>
                 <a:latin typeface="Meiryo"/>
+                <a:ea typeface="Meiryo"/>
               </a:rPr>
               <a:t>AIエージェントがそこにアクセスしてコンテキストを取得できる</a:t>
             </a:r>
@@ -18990,6 +19497,7 @@
                   <a:srgbClr val="323130"/>
                 </a:solidFill>
                 <a:latin typeface="Meiryo"/>
+                <a:ea typeface="Meiryo"/>
               </a:rPr>
               <a:t>• Arcは「基盤の管理」だけでなく「コンテキストへの道」でもある</a:t>
             </a:r>
@@ -19006,6 +19514,7 @@
                   <a:srgbClr val="323130"/>
                 </a:solidFill>
                 <a:latin typeface="Meiryo"/>
+                <a:ea typeface="Meiryo"/>
               </a:rPr>
               <a:t>• </a:t>
             </a:r>
@@ -19015,6 +19524,7 @@
                   <a:srgbClr val="323130"/>
                 </a:solidFill>
                 <a:latin typeface="Meiryo"/>
+                <a:ea typeface="Meiryo"/>
               </a:rPr>
               <a:t>どこにあるデータにもエージェントが届く世界</a:t>
             </a:r>
@@ -19024,6 +19534,7 @@
                   <a:srgbClr val="323130"/>
                 </a:solidFill>
                 <a:latin typeface="Meiryo"/>
+                <a:ea typeface="Meiryo"/>
               </a:rPr>
               <a:t>を作る</a:t>
             </a:r>
@@ -19040,6 +19551,7 @@
                   <a:srgbClr val="323130"/>
                 </a:solidFill>
                 <a:latin typeface="Meiryo"/>
+                <a:ea typeface="Meiryo"/>
               </a:rPr>
               <a:t>→ コンテキストをAIエージェント向けに整備して、</a:t>
             </a:r>
@@ -19056,6 +19568,7 @@
                   <a:srgbClr val="323130"/>
                 </a:solidFill>
                 <a:latin typeface="Meiryo"/>
+                <a:ea typeface="Meiryo"/>
               </a:rPr>
               <a:t>エージェントにガンガン動いてもらおう！</a:t>
             </a:r>
@@ -19072,6 +19585,7 @@
                   <a:srgbClr val="323130"/>
                 </a:solidFill>
                 <a:latin typeface="Meiryo"/>
+                <a:ea typeface="Meiryo"/>
               </a:rPr>
               <a:t>これがこれからのインフラ設計の核心</a:t>
             </a:r>
@@ -19088,6 +19602,7 @@
                   <a:srgbClr val="323130"/>
                 </a:solidFill>
                 <a:latin typeface="Meiryo"/>
+                <a:ea typeface="Meiryo"/>
               </a:rPr>
               <a:t>※コンテキスト整備の具体的な方法論は、まだ自分もまとめきれていません。</a:t>
             </a:r>
@@ -19104,6 +19619,7 @@
                   <a:srgbClr val="323130"/>
                 </a:solidFill>
                 <a:latin typeface="Meiryo"/>
+                <a:ea typeface="Meiryo"/>
               </a:rPr>
               <a:t>別の回で詳しく掘り下げたいと思います！</a:t>
             </a:r>
@@ -19234,6 +19750,7 @@
                   <a:srgbClr val="0078D4"/>
                 </a:solidFill>
                 <a:latin typeface="Meiryo"/>
+                <a:ea typeface="Meiryo"/>
               </a:rPr>
               <a:t>これを実現した者が先行できる！</a:t>
             </a:r>
@@ -19316,6 +19833,7 @@
                   <a:srgbClr val="323130"/>
                 </a:solidFill>
                 <a:latin typeface="Meiryo"/>
+                <a:ea typeface="Meiryo"/>
               </a:rPr>
               <a:t>• 🧠 </a:t>
             </a:r>
@@ -19325,6 +19843,7 @@
                   <a:srgbClr val="323130"/>
                 </a:solidFill>
                 <a:latin typeface="Meiryo"/>
+                <a:ea typeface="Meiryo"/>
               </a:rPr>
               <a:t>モデル</a:t>
             </a:r>
@@ -19334,6 +19853,7 @@
                   <a:srgbClr val="323130"/>
                 </a:solidFill>
                 <a:latin typeface="Meiryo"/>
+                <a:ea typeface="Meiryo"/>
               </a:rPr>
               <a:t>: 自由に選び・切り替えられる設計</a:t>
             </a:r>
@@ -19350,6 +19870,7 @@
                   <a:srgbClr val="323130"/>
                 </a:solidFill>
                 <a:latin typeface="Meiryo"/>
+                <a:ea typeface="Meiryo"/>
               </a:rPr>
               <a:t>• 🏃 </a:t>
             </a:r>
@@ -19359,6 +19880,7 @@
                   <a:srgbClr val="323130"/>
                 </a:solidFill>
                 <a:latin typeface="Meiryo"/>
+                <a:ea typeface="Meiryo"/>
               </a:rPr>
               <a:t>実行環境</a:t>
             </a:r>
@@ -19368,6 +19890,7 @@
                   <a:srgbClr val="323130"/>
                 </a:solidFill>
                 <a:latin typeface="Meiryo"/>
+                <a:ea typeface="Meiryo"/>
               </a:rPr>
               <a:t>: API + RBACでどこでも動ける基盤（Arc!）</a:t>
             </a:r>
@@ -19384,6 +19907,7 @@
                   <a:srgbClr val="323130"/>
                 </a:solidFill>
                 <a:latin typeface="Meiryo"/>
+                <a:ea typeface="Meiryo"/>
               </a:rPr>
               <a:t>• 📜 </a:t>
             </a:r>
@@ -19393,6 +19917,7 @@
                   <a:srgbClr val="323130"/>
                 </a:solidFill>
                 <a:latin typeface="Meiryo"/>
+                <a:ea typeface="Meiryo"/>
               </a:rPr>
               <a:t>コンテキスト</a:t>
             </a:r>
@@ -19402,6 +19927,7 @@
                   <a:srgbClr val="323130"/>
                 </a:solidFill>
                 <a:latin typeface="Meiryo"/>
+                <a:ea typeface="Meiryo"/>
               </a:rPr>
               <a:t>: 自社のデータ・システムをエージェントに開放（Arc!）</a:t>
             </a:r>
@@ -19418,6 +19944,7 @@
                   <a:srgbClr val="323130"/>
                 </a:solidFill>
                 <a:latin typeface="Meiryo"/>
+                <a:ea typeface="Meiryo"/>
               </a:rPr>
               <a:t>→ </a:t>
             </a:r>
@@ -19427,6 +19954,7 @@
                   <a:srgbClr val="323130"/>
                 </a:solidFill>
                 <a:latin typeface="Meiryo"/>
+                <a:ea typeface="Meiryo"/>
               </a:rPr>
               <a:t>圧倒的な生産性優位</a:t>
             </a:r>
@@ -19443,6 +19971,7 @@
                   <a:srgbClr val="323130"/>
                 </a:solidFill>
                 <a:latin typeface="Meiryo"/>
+                <a:ea typeface="Meiryo"/>
               </a:rPr>
               <a:t>他社がベンダーロックインや環境制約と格闘している間に、</a:t>
             </a:r>
@@ -19459,6 +19988,7 @@
                   <a:srgbClr val="323130"/>
                 </a:solidFill>
                 <a:latin typeface="Meiryo"/>
+                <a:ea typeface="Meiryo"/>
               </a:rPr>
               <a:t>この問いを解いた組織が次の時代を作る</a:t>
             </a:r>
@@ -19594,6 +20124,7 @@
                   <a:srgbClr val="0078D4"/>
                 </a:solidFill>
                 <a:latin typeface="Meiryo"/>
+                <a:ea typeface="Meiryo"/>
               </a:rPr>
               <a:t>ありがとうございました！</a:t>
             </a:r>
@@ -19610,6 +20141,7 @@
                   <a:srgbClr val="0078D4"/>
                 </a:solidFill>
                 <a:latin typeface="Meiryo"/>
+                <a:ea typeface="Meiryo"/>
               </a:rPr>
               <a:t>AI時代の「本当の」ハイブリッドクラウド</a:t>
             </a:r>
@@ -19626,6 +20158,7 @@
                   <a:srgbClr val="323130"/>
                 </a:solidFill>
                 <a:latin typeface="Meiryo"/>
+                <a:ea typeface="Meiryo"/>
               </a:rPr>
               <a:t>胡田 昌彦</a:t>
             </a:r>
@@ -19780,6 +20313,7 @@
                   <a:srgbClr val="0078D4"/>
                 </a:solidFill>
                 <a:latin typeface="Meiryo"/>
+                <a:ea typeface="Meiryo"/>
               </a:rPr>
               <a:t>📢 勉強会のお知らせ</a:t>
             </a:r>
@@ -19862,6 +20396,7 @@
                   <a:srgbClr val="0078D4"/>
                 </a:solidFill>
                 <a:latin typeface="Meiryo"/>
+                <a:ea typeface="Meiryo"/>
               </a:rPr>
               <a:t>Claude Codeライブ × 制約環境の自動化オフレコ</a:t>
             </a:r>
@@ -19878,6 +20413,7 @@
                   <a:srgbClr val="0078D4"/>
                 </a:solidFill>
                 <a:latin typeface="Meiryo"/>
+                <a:ea typeface="Meiryo"/>
               </a:rPr>
               <a:t>音楽バーで語るAI昼会 #1</a:t>
             </a:r>
@@ -19894,6 +20430,7 @@
                   <a:srgbClr val="323130"/>
                 </a:solidFill>
                 <a:latin typeface="Meiryo"/>
+                <a:ea typeface="Meiryo"/>
               </a:rPr>
               <a:t>• 📅 </a:t>
             </a:r>
@@ -19903,6 +20440,7 @@
                   <a:srgbClr val="323130"/>
                 </a:solidFill>
                 <a:latin typeface="Meiryo"/>
+                <a:ea typeface="Meiryo"/>
               </a:rPr>
               <a:t>2026年4月18日（土）13:30〜16:00</a:t>
             </a:r>
@@ -19919,6 +20457,7 @@
                   <a:srgbClr val="323130"/>
                 </a:solidFill>
                 <a:latin typeface="Meiryo"/>
+                <a:ea typeface="Meiryo"/>
               </a:rPr>
               <a:t>• 📍 </a:t>
             </a:r>
@@ -19928,6 +20467,7 @@
                   <a:srgbClr val="323130"/>
                 </a:solidFill>
                 <a:latin typeface="Meiryo"/>
+                <a:ea typeface="Meiryo"/>
               </a:rPr>
               <a:t>Live Bar CheSara（南柏駅 徒歩1分）</a:t>
             </a:r>
@@ -19944,6 +20484,7 @@
                   <a:srgbClr val="323130"/>
                 </a:solidFill>
                 <a:latin typeface="Meiryo"/>
+                <a:ea typeface="Meiryo"/>
               </a:rPr>
               <a:t>• 💰 </a:t>
             </a:r>
@@ -19953,6 +20494,7 @@
                   <a:srgbClr val="323130"/>
                 </a:solidFill>
                 <a:latin typeface="Meiryo"/>
+                <a:ea typeface="Meiryo"/>
               </a:rPr>
               <a:t>参加費無料</a:t>
             </a:r>
@@ -19962,6 +20504,7 @@
                   <a:srgbClr val="323130"/>
                 </a:solidFill>
                 <a:latin typeface="Meiryo"/>
+                <a:ea typeface="Meiryo"/>
               </a:rPr>
               <a:t>（ドリンクオーダー別途）</a:t>
             </a:r>
@@ -19978,6 +20521,7 @@
                   <a:srgbClr val="323130"/>
                 </a:solidFill>
                 <a:latin typeface="Meiryo"/>
+                <a:ea typeface="Meiryo"/>
               </a:rPr>
               <a:t>内容</a:t>
             </a:r>
@@ -19994,6 +20538,7 @@
                   <a:srgbClr val="323130"/>
                 </a:solidFill>
                 <a:latin typeface="Meiryo"/>
+                <a:ea typeface="Meiryo"/>
               </a:rPr>
               <a:t>• 🤖 参加者全員で「今日作るもの」を決めてClaude Codeに実装させる</a:t>
             </a:r>
@@ -20010,6 +20555,7 @@
                   <a:srgbClr val="323130"/>
                 </a:solidFill>
                 <a:latin typeface="Meiryo"/>
+                <a:ea typeface="Meiryo"/>
               </a:rPr>
               <a:t>• 🎵 AIがコード書いてる間は</a:t>
             </a:r>
@@ -20019,6 +20565,7 @@
                   <a:srgbClr val="323130"/>
                 </a:solidFill>
                 <a:latin typeface="Meiryo"/>
+                <a:ea typeface="Meiryo"/>
               </a:rPr>
               <a:t>生演奏セッション</a:t>
             </a:r>
@@ -20028,6 +20575,7 @@
                   <a:srgbClr val="323130"/>
                 </a:solidFill>
                 <a:latin typeface="Meiryo"/>
+                <a:ea typeface="Meiryo"/>
               </a:rPr>
               <a:t>！</a:t>
             </a:r>
@@ -20044,6 +20592,7 @@
                   <a:srgbClr val="323130"/>
                 </a:solidFill>
                 <a:latin typeface="Meiryo"/>
+                <a:ea typeface="Meiryo"/>
               </a:rPr>
               <a:t>• 🔒 オフレコセッション「会社のルールを守りながら、どこまで自動化できるか」</a:t>
             </a:r>
@@ -20060,6 +20609,7 @@
                   <a:srgbClr val="323130"/>
                 </a:solidFill>
                 <a:latin typeface="Meiryo"/>
+                <a:ea typeface="Meiryo"/>
               </a:rPr>
               <a:t>Connpassで参加受付中！</a:t>
             </a:r>
@@ -20069,6 +20619,7 @@
                   <a:srgbClr val="323130"/>
                 </a:solidFill>
                 <a:latin typeface="Meiryo"/>
+                <a:ea typeface="Meiryo"/>
               </a:rPr>
               <a:t> https://ebisuda.connpass.com/event/385849/</a:t>
             </a:r>
@@ -20204,6 +20755,7 @@
                   <a:srgbClr val="0078D4"/>
                 </a:solidFill>
                 <a:latin typeface="Meiryo"/>
+                <a:ea typeface="Meiryo"/>
               </a:rPr>
               <a:t>Q&amp;A</a:t>
             </a:r>
@@ -20220,6 +20772,7 @@
                   <a:srgbClr val="0078D4"/>
                 </a:solidFill>
                 <a:latin typeface="Meiryo"/>
+                <a:ea typeface="Meiryo"/>
               </a:rPr>
               <a:t>💬 質問にお答えします！</a:t>
             </a:r>
@@ -20236,6 +20789,7 @@
                   <a:srgbClr val="323130"/>
                 </a:solidFill>
                 <a:latin typeface="Meiryo"/>
+                <a:ea typeface="Meiryo"/>
               </a:rPr>
               <a:t>• どんな質問でも大歓迎です</a:t>
             </a:r>
@@ -20252,6 +20806,7 @@
                   <a:srgbClr val="323130"/>
                 </a:solidFill>
                 <a:latin typeface="Meiryo"/>
+                <a:ea typeface="Meiryo"/>
               </a:rPr>
               <a:t>⏱️ 14:45 - 14:55（10分）</a:t>
             </a:r>
@@ -20411,6 +20966,7 @@
                   <a:srgbClr val="0078D4"/>
                 </a:solidFill>
                 <a:latin typeface="Meiryo"/>
+                <a:ea typeface="Meiryo"/>
               </a:rPr>
               <a:t>セッション②</a:t>
             </a:r>
@@ -20427,6 +20983,7 @@
                   <a:srgbClr val="0078D4"/>
                 </a:solidFill>
                 <a:latin typeface="Meiryo"/>
+                <a:ea typeface="Meiryo"/>
               </a:rPr>
               <a:t>Microsoft "Adaptive Cloud" 最新動向</a:t>
             </a:r>
@@ -20443,6 +21000,7 @@
                   <a:srgbClr val="323130"/>
                 </a:solidFill>
                 <a:latin typeface="Meiryo"/>
+                <a:ea typeface="Meiryo"/>
               </a:rPr>
               <a:t>高添 修 氏</a:t>
             </a:r>
@@ -20459,6 +21017,7 @@
                   <a:srgbClr val="606060"/>
                 </a:solidFill>
                 <a:latin typeface="Meiryo"/>
+                <a:ea typeface="Meiryo"/>
               </a:rPr>
               <a:t>日本マイクロソフト株式会社</a:t>
             </a:r>
@@ -20475,6 +21034,7 @@
                   <a:srgbClr val="323130"/>
                 </a:solidFill>
                 <a:latin typeface="Meiryo"/>
+                <a:ea typeface="Meiryo"/>
               </a:rPr>
               <a:t>⏱️ 14:55 - 15:15（20分）</a:t>
             </a:r>
@@ -20610,6 +21170,7 @@
                   <a:srgbClr val="0078D4"/>
                 </a:solidFill>
                 <a:latin typeface="Meiryo"/>
+                <a:ea typeface="Meiryo"/>
               </a:rPr>
               <a:t>Q&amp;A</a:t>
             </a:r>
@@ -20626,6 +21187,7 @@
                   <a:srgbClr val="0078D4"/>
                 </a:solidFill>
                 <a:latin typeface="Meiryo"/>
+                <a:ea typeface="Meiryo"/>
               </a:rPr>
               <a:t>💬 質問にお答えします！</a:t>
             </a:r>
@@ -20642,6 +21204,7 @@
                   <a:srgbClr val="323130"/>
                 </a:solidFill>
                 <a:latin typeface="Meiryo"/>
+                <a:ea typeface="Meiryo"/>
               </a:rPr>
               <a:t>⏱️ 15:15 - 15:25（10分）</a:t>
             </a:r>
@@ -20801,6 +21364,7 @@
                   <a:srgbClr val="0078D4"/>
                 </a:solidFill>
                 <a:latin typeface="Meiryo"/>
+                <a:ea typeface="Meiryo"/>
               </a:rPr>
               <a:t>クロージング</a:t>
             </a:r>
@@ -20817,6 +21381,7 @@
                   <a:srgbClr val="0078D4"/>
                 </a:solidFill>
                 <a:latin typeface="Meiryo"/>
+                <a:ea typeface="Meiryo"/>
               </a:rPr>
               <a:t>本日のご参加ありがとうございました！</a:t>
             </a:r>
@@ -20833,6 +21398,7 @@
                   <a:srgbClr val="323130"/>
                 </a:solidFill>
                 <a:latin typeface="Meiryo"/>
+                <a:ea typeface="Meiryo"/>
               </a:rPr>
               <a:t>• アーカイブはYouTubeチャンネルから視聴可能</a:t>
             </a:r>
@@ -20849,6 +21415,7 @@
                   <a:srgbClr val="323130"/>
                 </a:solidFill>
                 <a:latin typeface="Meiryo"/>
+                <a:ea typeface="Meiryo"/>
               </a:rPr>
               <a:t>• 資料は後日公開予定</a:t>
             </a:r>
@@ -20865,6 +21432,7 @@
                   <a:srgbClr val="323130"/>
                 </a:solidFill>
                 <a:latin typeface="Meiryo"/>
+                <a:ea typeface="Meiryo"/>
               </a:rPr>
               <a:t>• ハッシュタグは </a:t>
             </a:r>
@@ -20874,6 +21442,7 @@
                   <a:srgbClr val="323130"/>
                 </a:solidFill>
                 <a:latin typeface="Meiryo"/>
+                <a:ea typeface="Meiryo"/>
               </a:rPr>
               <a:t>#HCCJP</a:t>
             </a:r>
@@ -21004,6 +21573,7 @@
                   <a:srgbClr val="0078D4"/>
                 </a:solidFill>
                 <a:latin typeface="Meiryo"/>
+                <a:ea typeface="Meiryo"/>
               </a:rPr>
               <a:t>本日の注意事項</a:t>
             </a:r>
@@ -21086,6 +21656,7 @@
                   <a:srgbClr val="323130"/>
                 </a:solidFill>
                 <a:latin typeface="Meiryo"/>
+                <a:ea typeface="Meiryo"/>
               </a:rPr>
               <a:t>• 📹 配信は録画されています（アーカイブ視聴可）</a:t>
             </a:r>
@@ -21102,6 +21673,7 @@
                   <a:srgbClr val="323130"/>
                 </a:solidFill>
                 <a:latin typeface="Meiryo"/>
+                <a:ea typeface="Meiryo"/>
               </a:rPr>
               <a:t>• 💬 質問・コメント大歓迎！</a:t>
             </a:r>
@@ -21118,6 +21690,7 @@
                   <a:srgbClr val="323130"/>
                 </a:solidFill>
                 <a:latin typeface="Meiryo"/>
+                <a:ea typeface="Meiryo"/>
               </a:rPr>
               <a:t>• 📝 Q&amp;Aセッションでまとめてお答えします</a:t>
             </a:r>
@@ -21272,6 +21845,7 @@
                   <a:srgbClr val="0078D4"/>
                 </a:solidFill>
                 <a:latin typeface="Meiryo"/>
+                <a:ea typeface="Meiryo"/>
               </a:rPr>
               <a:t>📺 チャンネル登録を！</a:t>
             </a:r>
@@ -21354,6 +21928,7 @@
                   <a:srgbClr val="0078D4"/>
                 </a:solidFill>
                 <a:latin typeface="Meiryo"/>
+                <a:ea typeface="Meiryo"/>
               </a:rPr>
               <a:t>目指せ 1000人！</a:t>
             </a:r>
@@ -21370,6 +21945,7 @@
                   <a:srgbClr val="323130"/>
                 </a:solidFill>
                 <a:latin typeface="Meiryo"/>
+                <a:ea typeface="Meiryo"/>
               </a:rPr>
               <a:t>YouTube HCCJPチャンネル</a:t>
             </a:r>
@@ -21386,6 +21962,7 @@
                   <a:srgbClr val="323130"/>
                 </a:solidFill>
                 <a:latin typeface="Meiryo"/>
+                <a:ea typeface="Meiryo"/>
               </a:rPr>
               <a:t>毎月第2金曜日の最新情報をお見逃しなく！</a:t>
             </a:r>
@@ -21516,6 +22093,7 @@
                   <a:srgbClr val="0078D4"/>
                 </a:solidFill>
                 <a:latin typeface="Meiryo"/>
+                <a:ea typeface="Meiryo"/>
               </a:rPr>
               <a:t>🙌 HCCJPを一緒に盛り上げませんか？</a:t>
             </a:r>
@@ -21598,6 +22176,7 @@
                   <a:srgbClr val="323130"/>
                 </a:solidFill>
                 <a:latin typeface="Meiryo"/>
+                <a:ea typeface="Meiryo"/>
               </a:rPr>
               <a:t>HCCJPは</a:t>
             </a:r>
@@ -21607,6 +22186,7 @@
                   <a:srgbClr val="323130"/>
                 </a:solidFill>
                 <a:latin typeface="Meiryo"/>
+                <a:ea typeface="Meiryo"/>
               </a:rPr>
               <a:t>企業・個人を問わず、誰でも参加できるオープンなコミュニティ</a:t>
             </a:r>
@@ -21616,6 +22196,7 @@
                   <a:srgbClr val="323130"/>
                 </a:solidFill>
                 <a:latin typeface="Meiryo"/>
+                <a:ea typeface="Meiryo"/>
               </a:rPr>
               <a:t>です。</a:t>
             </a:r>
@@ -21632,6 +22213,7 @@
                   <a:srgbClr val="323130"/>
                 </a:solidFill>
                 <a:latin typeface="Meiryo"/>
+                <a:ea typeface="Meiryo"/>
               </a:rPr>
               <a:t>今、特に</a:t>
             </a:r>
@@ -21641,6 +22223,7 @@
                   <a:srgbClr val="323130"/>
                 </a:solidFill>
                 <a:latin typeface="Meiryo"/>
+                <a:ea typeface="Meiryo"/>
               </a:rPr>
               <a:t>こんな仲間</a:t>
             </a:r>
@@ -21650,6 +22233,7 @@
                   <a:srgbClr val="323130"/>
                 </a:solidFill>
                 <a:latin typeface="Meiryo"/>
+                <a:ea typeface="Meiryo"/>
               </a:rPr>
               <a:t>を募集しています！</a:t>
             </a:r>
@@ -21666,6 +22250,7 @@
                   <a:srgbClr val="323130"/>
                 </a:solidFill>
                 <a:latin typeface="Meiryo"/>
+                <a:ea typeface="Meiryo"/>
               </a:rPr>
               <a:t>• 🏢 </a:t>
             </a:r>
@@ -21675,6 +22260,7 @@
                   <a:srgbClr val="323130"/>
                 </a:solidFill>
                 <a:latin typeface="Meiryo"/>
+                <a:ea typeface="Meiryo"/>
               </a:rPr>
               <a:t>ユーザー企業の担当者</a:t>
             </a:r>
@@ -21684,6 +22270,7 @@
                   <a:srgbClr val="323130"/>
                 </a:solidFill>
                 <a:latin typeface="Meiryo"/>
+                <a:ea typeface="Meiryo"/>
               </a:rPr>
               <a:t> — 「うちはこう使ってる」というリアルな導入事例の共有</a:t>
             </a:r>
@@ -21700,6 +22287,7 @@
                   <a:srgbClr val="323130"/>
                 </a:solidFill>
                 <a:latin typeface="Meiryo"/>
+                <a:ea typeface="Meiryo"/>
               </a:rPr>
               <a:t>• 💬 </a:t>
             </a:r>
@@ -21709,6 +22297,7 @@
                   <a:srgbClr val="323130"/>
                 </a:solidFill>
                 <a:latin typeface="Meiryo"/>
+                <a:ea typeface="Meiryo"/>
               </a:rPr>
               <a:t>構成相談したい方</a:t>
             </a:r>
@@ -21718,6 +22307,7 @@
                   <a:srgbClr val="323130"/>
                 </a:solidFill>
                 <a:latin typeface="Meiryo"/>
+                <a:ea typeface="Meiryo"/>
               </a:rPr>
               <a:t> — 「こういう構成どう？」をみんなで議論しましょう</a:t>
             </a:r>
@@ -21734,6 +22324,7 @@
                   <a:srgbClr val="323130"/>
                 </a:solidFill>
                 <a:latin typeface="Meiryo"/>
+                <a:ea typeface="Meiryo"/>
               </a:rPr>
               <a:t>• 🤖 </a:t>
             </a:r>
@@ -21743,6 +22334,7 @@
                   <a:srgbClr val="323130"/>
                 </a:solidFill>
                 <a:latin typeface="Meiryo"/>
+                <a:ea typeface="Meiryo"/>
               </a:rPr>
               <a:t>生成AI × インフラに興味がある方</a:t>
             </a:r>
@@ -21752,6 +22344,7 @@
                   <a:srgbClr val="323130"/>
                 </a:solidFill>
                 <a:latin typeface="Meiryo"/>
+                <a:ea typeface="Meiryo"/>
               </a:rPr>
               <a:t> — AI活用事例を持ち寄りましょう</a:t>
             </a:r>
@@ -21768,6 +22361,7 @@
                   <a:srgbClr val="323130"/>
                 </a:solidFill>
                 <a:latin typeface="Meiryo"/>
+                <a:ea typeface="Meiryo"/>
               </a:rPr>
               <a:t>• 🎤 </a:t>
             </a:r>
@@ -21777,6 +22371,7 @@
                   <a:srgbClr val="323130"/>
                 </a:solidFill>
                 <a:latin typeface="Meiryo"/>
+                <a:ea typeface="Meiryo"/>
               </a:rPr>
               <a:t>登壇してみたい方</a:t>
             </a:r>
@@ -21786,6 +22381,7 @@
                   <a:srgbClr val="323130"/>
                 </a:solidFill>
                 <a:latin typeface="Meiryo"/>
+                <a:ea typeface="Meiryo"/>
               </a:rPr>
               <a:t> — 初登壇も大歓迎！発表の場を提供します</a:t>
             </a:r>
@@ -21921,6 +22517,7 @@
                   <a:srgbClr val="0078D4"/>
                 </a:solidFill>
                 <a:latin typeface="Meiryo"/>
+                <a:ea typeface="Meiryo"/>
               </a:rPr>
               <a:t>次回予告</a:t>
             </a:r>
@@ -21937,6 +22534,7 @@
                   <a:srgbClr val="0078D4"/>
                 </a:solidFill>
                 <a:latin typeface="Meiryo"/>
+                <a:ea typeface="Meiryo"/>
               </a:rPr>
               <a:t>📅 2026/4/10（金）14:00〜</a:t>
             </a:r>
@@ -21953,6 +22551,7 @@
                   <a:srgbClr val="323130"/>
                 </a:solidFill>
                 <a:latin typeface="Meiryo"/>
+                <a:ea typeface="Meiryo"/>
               </a:rPr>
               <a:t>次回以降のセッション候補</a:t>
             </a:r>
@@ -21969,6 +22568,7 @@
                   <a:srgbClr val="323130"/>
                 </a:solidFill>
                 <a:latin typeface="Meiryo"/>
+                <a:ea typeface="Meiryo"/>
               </a:rPr>
               <a:t>• 🔧 </a:t>
             </a:r>
@@ -21978,6 +22578,7 @@
                   <a:srgbClr val="323130"/>
                 </a:solidFill>
                 <a:latin typeface="Meiryo"/>
+                <a:ea typeface="Meiryo"/>
               </a:rPr>
               <a:t>Arcでつないだら？Arc×AIエージェント実演セッション</a:t>
             </a:r>
@@ -21994,6 +22595,7 @@
                   <a:srgbClr val="323130"/>
                 </a:solidFill>
                 <a:latin typeface="Meiryo"/>
+                <a:ea typeface="Meiryo"/>
               </a:rPr>
               <a:t>• 📜 </a:t>
             </a:r>
@@ -22003,6 +22605,7 @@
                   <a:srgbClr val="323130"/>
                 </a:solidFill>
                 <a:latin typeface="Meiryo"/>
+                <a:ea typeface="Meiryo"/>
               </a:rPr>
               <a:t>AIエージェントのコンテキスト整備の方法論</a:t>
             </a:r>
@@ -22019,6 +22622,7 @@
                   <a:srgbClr val="323130"/>
                 </a:solidFill>
                 <a:latin typeface="Meiryo"/>
+                <a:ea typeface="Meiryo"/>
               </a:rPr>
               <a:t>• 🎤 </a:t>
             </a:r>
@@ -22028,6 +22632,7 @@
                   <a:srgbClr val="323130"/>
                 </a:solidFill>
                 <a:latin typeface="Meiryo"/>
+                <a:ea typeface="Meiryo"/>
               </a:rPr>
               <a:t>ネットワールド 後藤さん登壇！？</a:t>
             </a:r>
@@ -22037,6 +22642,7 @@
                   <a:srgbClr val="323130"/>
                 </a:solidFill>
                 <a:latin typeface="Meiryo"/>
+                <a:ea typeface="Meiryo"/>
               </a:rPr>
               <a:t>（ご快諾いただいてます！）</a:t>
             </a:r>
@@ -22053,6 +22659,7 @@
                   <a:srgbClr val="323130"/>
                 </a:solidFill>
                 <a:latin typeface="Meiryo"/>
+                <a:ea typeface="Meiryo"/>
               </a:rPr>
               <a:t>希望あればコメントで！</a:t>
             </a:r>
@@ -22212,6 +22819,7 @@
                   <a:srgbClr val="0078D4"/>
                 </a:solidFill>
                 <a:latin typeface="Meiryo"/>
+                <a:ea typeface="Meiryo"/>
               </a:rPr>
               <a:t>ご参加ありがとうございました！</a:t>
             </a:r>
@@ -22228,6 +22836,7 @@
                   <a:srgbClr val="0078D4"/>
                 </a:solidFill>
                 <a:latin typeface="Meiryo"/>
+                <a:ea typeface="Meiryo"/>
               </a:rPr>
               <a:t>また次回お会いしましょう！</a:t>
             </a:r>
@@ -22358,6 +22967,7 @@
                   <a:srgbClr val="0078D4"/>
                 </a:solidFill>
                 <a:latin typeface="Meiryo"/>
+                <a:ea typeface="Meiryo"/>
               </a:rPr>
               <a:t>質問・コメント方法</a:t>
             </a:r>
@@ -22440,6 +23050,7 @@
                   <a:srgbClr val="0078D4"/>
                 </a:solidFill>
                 <a:latin typeface="Meiryo"/>
+                <a:ea typeface="Meiryo"/>
               </a:rPr>
               <a:t>💬 YouTubeチャットで質問・コメント大歓迎！</a:t>
             </a:r>
@@ -22456,6 +23067,7 @@
                   <a:srgbClr val="323130"/>
                 </a:solidFill>
                 <a:latin typeface="Meiryo"/>
+                <a:ea typeface="Meiryo"/>
               </a:rPr>
               <a:t>• 右側のライブチャット欄から投稿してください</a:t>
             </a:r>
@@ -22472,6 +23084,7 @@
                   <a:srgbClr val="323130"/>
                 </a:solidFill>
                 <a:latin typeface="Meiryo"/>
+                <a:ea typeface="Meiryo"/>
               </a:rPr>
               <a:t>• セッション中でもお気軽にどうぞ</a:t>
             </a:r>
@@ -22488,6 +23101,7 @@
                   <a:srgbClr val="323130"/>
                 </a:solidFill>
                 <a:latin typeface="Meiryo"/>
+                <a:ea typeface="Meiryo"/>
               </a:rPr>
               <a:t>• 固定コメントに各種リンクを掲載します</a:t>
             </a:r>
@@ -22623,6 +23237,7 @@
                   <a:srgbClr val="0078D4"/>
                 </a:solidFill>
                 <a:latin typeface="Meiryo"/>
+                <a:ea typeface="Meiryo"/>
               </a:rPr>
               <a:t>セッション①</a:t>
             </a:r>
@@ -22639,6 +23254,7 @@
                   <a:srgbClr val="0078D4"/>
                 </a:solidFill>
                 <a:latin typeface="Meiryo"/>
+                <a:ea typeface="Meiryo"/>
               </a:rPr>
               <a:t>AI時代の「本当の」ハイブリッドクラウド</a:t>
             </a:r>
@@ -22655,6 +23271,7 @@
                   <a:srgbClr val="0078D4"/>
                 </a:solidFill>
                 <a:latin typeface="Meiryo"/>
+                <a:ea typeface="Meiryo"/>
               </a:rPr>
               <a:t>エージェントが実現した、あの頃の夢</a:t>
             </a:r>
@@ -22671,6 +23288,7 @@
                   <a:srgbClr val="323130"/>
                 </a:solidFill>
                 <a:latin typeface="Meiryo"/>
+                <a:ea typeface="Meiryo"/>
               </a:rPr>
               <a:t>胡田 昌彦</a:t>
             </a:r>
@@ -22687,6 +23305,7 @@
                   <a:srgbClr val="323130"/>
                 </a:solidFill>
                 <a:latin typeface="Meiryo"/>
+                <a:ea typeface="Meiryo"/>
               </a:rPr>
               <a:t>⏱️ 14:05 - 14:45（40分）</a:t>
             </a:r>
@@ -22817,6 +23436,7 @@
                   <a:srgbClr val="0078D4"/>
                 </a:solidFill>
                 <a:latin typeface="Meiryo"/>
+                <a:ea typeface="Meiryo"/>
               </a:rPr>
               <a:t>👨‍💻 自己紹介</a:t>
             </a:r>
@@ -22899,6 +23519,7 @@
                   <a:srgbClr val="0078D4"/>
                 </a:solidFill>
                 <a:latin typeface="Meiryo"/>
+                <a:ea typeface="Meiryo"/>
               </a:rPr>
               <a:t>胡田 昌彦（えびすだ まさひこ）</a:t>
             </a:r>
@@ -22915,6 +23536,7 @@
                   <a:srgbClr val="323130"/>
                 </a:solidFill>
                 <a:latin typeface="Meiryo"/>
+                <a:ea typeface="Meiryo"/>
               </a:rPr>
               <a:t>• 🏢 </a:t>
             </a:r>
@@ -22924,6 +23546,7 @@
                   <a:srgbClr val="323130"/>
                 </a:solidFill>
                 <a:latin typeface="Meiryo"/>
+                <a:ea typeface="Meiryo"/>
               </a:rPr>
               <a:t>日本ビジネスシステムズ株式会社（JBS）</a:t>
             </a:r>
@@ -22940,6 +23563,7 @@
                   <a:srgbClr val="323130"/>
                 </a:solidFill>
                 <a:latin typeface="Meiryo"/>
+                <a:ea typeface="Meiryo"/>
               </a:rPr>
               <a:t>• 🏆 </a:t>
             </a:r>
@@ -22949,6 +23573,7 @@
                   <a:srgbClr val="323130"/>
                 </a:solidFill>
                 <a:latin typeface="Meiryo"/>
+                <a:ea typeface="Meiryo"/>
               </a:rPr>
               <a:t>Microsoft MVP</a:t>
             </a:r>
@@ -22958,6 +23583,7 @@
                   <a:srgbClr val="323130"/>
                 </a:solidFill>
                 <a:latin typeface="Meiryo"/>
+                <a:ea typeface="Meiryo"/>
               </a:rPr>
               <a:t> — Cloud and Datacenter Management / Microsoft Azure</a:t>
             </a:r>
@@ -22974,6 +23600,7 @@
                   <a:srgbClr val="323130"/>
                 </a:solidFill>
                 <a:latin typeface="Meiryo"/>
+                <a:ea typeface="Meiryo"/>
               </a:rPr>
               <a:t>• 📖 著書: </a:t>
             </a:r>
@@ -22983,6 +23610,7 @@
                   <a:srgbClr val="323130"/>
                 </a:solidFill>
                 <a:latin typeface="Meiryo"/>
+                <a:ea typeface="Meiryo"/>
               </a:rPr>
               <a:t>「Windowsインフラ管理者入門」</a:t>
             </a:r>
@@ -22999,6 +23627,7 @@
                   <a:srgbClr val="323130"/>
                 </a:solidFill>
                 <a:latin typeface="Meiryo"/>
+                <a:ea typeface="Meiryo"/>
               </a:rPr>
               <a:t>• 📺 YouTube: https://youtube.com/@ebibibi</a:t>
             </a:r>
@@ -23015,6 +23644,7 @@
                   <a:srgbClr val="323130"/>
                 </a:solidFill>
                 <a:latin typeface="Meiryo"/>
+                <a:ea typeface="Meiryo"/>
               </a:rPr>
               <a:t>• 🌐 Web: https://ebisuda.net/</a:t>
             </a:r>
@@ -23031,6 +23661,7 @@
                   <a:srgbClr val="323130"/>
                 </a:solidFill>
                 <a:latin typeface="Meiryo"/>
+                <a:ea typeface="Meiryo"/>
               </a:rPr>
               <a:t>• 🎵 趣味: ベース、ドラム、セッション、将棋</a:t>
             </a:r>

--- a/HCCJP_71/AI時代の「本当の」ハイブリッドクラウド — エージェントが実現した、あの頃の夢.pptx
+++ b/HCCJP_71/AI時代の「本当の」ハイブリッドクラウド — エージェントが実現した、あの頃の夢.pptx
@@ -6205,67 +6205,30 @@
           </a:p>
         </p:txBody>
       </p:sp>
-      <p:sp>
-        <p:nvSpPr>
-          <p:cNvPr id="5" name="Rectangle 4"/>
-          <p:cNvSpPr/>
-          <p:nvPr/>
-        </p:nvSpPr>
-        <p:spPr>
-          <a:xfrm>
-            <a:off x="502920" y="1577340"/>
-            <a:ext cx="11183112" cy="3297555"/>
-          </a:xfrm>
-          <a:prstGeom prst="rect">
-            <a:avLst/>
-          </a:prstGeom>
-          <a:solidFill>
-            <a:srgbClr val="F5F5F5"/>
-          </a:solidFill>
-          <a:ln>
-            <a:noFill/>
-          </a:ln>
-        </p:spPr>
-        <p:style>
-          <a:lnRef idx="1">
-            <a:schemeClr val="accent1"/>
-          </a:lnRef>
-          <a:fillRef idx="3">
-            <a:schemeClr val="accent1"/>
-          </a:fillRef>
-          <a:effectRef idx="2">
-            <a:schemeClr val="accent1"/>
-          </a:effectRef>
-          <a:fontRef idx="minor">
-            <a:schemeClr val="lt1"/>
-          </a:fontRef>
-        </p:style>
-        <p:txBody>
-          <a:bodyPr rtlCol="0" anchor="ctr" wrap="none"/>
-          <a:lstStyle/>
-          <a:p>
-            <a:pPr algn="ctr"/>
-            <a:r>
-              <a:rPr sz="1900" kern="0" spc="0">
-                <a:solidFill>
-                  <a:srgbClr val="323130"/>
-                </a:solidFill>
-                <a:latin typeface="MS Gothic"/>
-                <a:ea typeface="MS Gothic"/>
-              </a:rPr>
-              <a:t>+-------------------------------------------------------+
-|                  Microsoft 365 (SaaS)                 |
-|                                                       |
-| +------------+   +--------------+   +--------------+  |
-| |   OpenAI   |   | M365 Copilot |   |    WorkIQ    |  |
-| |  (モデル)  |&lt;--|(エージェント)|&lt;--| SP/Teams/    |  |
-| +------------+   +--------------+   | Outlook/OD   |  |
-|                                     +--------------+  |
-+-------------------------------------------------------+</a:t>
-            </a:r>
-          </a:p>
-        </p:txBody>
-      </p:sp>
+      <p:pic>
+        <p:nvPicPr>
+          <p:cNvPr id="5" name="Picture 4" descr="image.png"/>
+          <p:cNvPicPr>
+            <a:picLocks noChangeAspect="1"/>
+          </p:cNvPicPr>
+          <p:nvPr/>
+        </p:nvPicPr>
+        <p:blipFill>
+          <a:blip r:embed="rId2"/>
+          <a:stretch>
+            <a:fillRect/>
+          </a:stretch>
+        </p:blipFill>
+        <p:spPr>
+          <a:xfrm>
+            <a:off x="504444" y="1577340"/>
+            <a:ext cx="11180064" cy="2767584"/>
+          </a:xfrm>
+          <a:prstGeom prst="rect">
+            <a:avLst/>
+          </a:prstGeom>
+        </p:spPr>
+      </p:pic>
       <p:sp>
         <p:nvSpPr>
           <p:cNvPr id="6" name="TextBox 5"/>
@@ -6274,8 +6237,8 @@
         </p:nvSpPr>
         <p:spPr>
           <a:xfrm>
-            <a:off x="502920" y="4966335"/>
-            <a:ext cx="11183112" cy="1022984"/>
+            <a:off x="502920" y="4436364"/>
+            <a:ext cx="11183112" cy="1552956"/>
           </a:xfrm>
           <a:prstGeom prst="rect">
             <a:avLst/>
@@ -6617,252 +6580,33 @@
           </a:p>
         </p:txBody>
       </p:sp>
-      <p:sp>
-        <p:nvSpPr>
-          <p:cNvPr id="5" name="Rectangle 4"/>
-          <p:cNvSpPr/>
-          <p:nvPr/>
-        </p:nvSpPr>
-        <p:spPr>
-          <a:xfrm>
-            <a:off x="502920" y="1577340"/>
-            <a:ext cx="11183112" cy="3726180"/>
-          </a:xfrm>
-          <a:prstGeom prst="rect">
-            <a:avLst/>
-          </a:prstGeom>
-          <a:solidFill>
-            <a:srgbClr val="F5F5F5"/>
-          </a:solidFill>
-          <a:ln>
-            <a:noFill/>
-          </a:ln>
-        </p:spPr>
-        <p:style>
-          <a:lnRef idx="1">
-            <a:schemeClr val="accent1"/>
-          </a:lnRef>
-          <a:fillRef idx="3">
-            <a:schemeClr val="accent1"/>
-          </a:fillRef>
-          <a:effectRef idx="2">
-            <a:schemeClr val="accent1"/>
-          </a:effectRef>
-          <a:fontRef idx="minor">
-            <a:schemeClr val="lt1"/>
-          </a:fontRef>
-        </p:style>
-        <p:txBody>
-          <a:bodyPr rtlCol="0" anchor="ctr" wrap="none"/>
-          <a:lstStyle/>
-          <a:p>
-            <a:pPr algn="ctr"/>
-            <a:r>
-              <a:rPr sz="1400" kern="0" spc="0">
-                <a:solidFill>
-                  <a:srgbClr val="323130"/>
-                </a:solidFill>
-                <a:latin typeface="MS Gothic"/>
-                <a:ea typeface="MS Gothic"/>
-              </a:rPr>
-              <a:t>+----------------------------------------------------+ 
-|                   Azure (クラウド基盤)              |
-|                                                     |
-| +--------------------+   +-----------------------+  |
-| | Microsoft Foundry  |   | Azure AI Search       |  |
-| | (モデル)           |&lt;--| (ベクトルストア)      |  |
-| +--------------------+   | + Blob Storage        |  |
-|          ^               +-----------------------+  |
-|          |                                          |
-| +--------+-----------+                              |
-| | Azure App Service  |                              |
-| | (自作Webアプリ)    |                              |
-| +--------------------+                              |
-+----------------------------------------------------+ </a:t>
-            </a:r>
-          </a:p>
-        </p:txBody>
-      </p:sp>
+      <p:pic>
+        <p:nvPicPr>
+          <p:cNvPr id="5" name="Picture 4" descr="image.png"/>
+          <p:cNvPicPr>
+            <a:picLocks noChangeAspect="1"/>
+          </p:cNvPicPr>
+          <p:nvPr/>
+        </p:nvPicPr>
+        <p:blipFill>
+          <a:blip r:embed="rId2"/>
+          <a:stretch>
+            <a:fillRect/>
+          </a:stretch>
+        </p:blipFill>
+        <p:spPr>
+          <a:xfrm>
+            <a:off x="504444" y="1577340"/>
+            <a:ext cx="11180064" cy="4169663"/>
+          </a:xfrm>
+          <a:prstGeom prst="rect">
+            <a:avLst/>
+          </a:prstGeom>
+        </p:spPr>
+      </p:pic>
       <p:sp>
         <p:nvSpPr>
           <p:cNvPr id="6" name="TextBox 5"/>
-          <p:cNvSpPr txBox="1"/>
-          <p:nvPr/>
-        </p:nvSpPr>
-        <p:spPr>
-          <a:xfrm>
-            <a:off x="502920" y="5394960"/>
-            <a:ext cx="11183112" cy="594359"/>
-          </a:xfrm>
-          <a:prstGeom prst="rect">
-            <a:avLst/>
-          </a:prstGeom>
-          <a:noFill/>
-        </p:spPr>
-        <p:txBody>
-          <a:bodyPr wrap="square">
-            <a:normAutofit/>
-          </a:bodyPr>
-          <a:lstStyle/>
-          <a:p>
-            <a:pPr>
-              <a:spcAft>
-                <a:spcPts val="500"/>
-              </a:spcAft>
-            </a:pPr>
-            <a:r>
-              <a:rPr sz="2100">
-                <a:solidFill>
-                  <a:srgbClr val="323130"/>
-                </a:solidFill>
-                <a:latin typeface="Meiryo"/>
-                <a:ea typeface="Meiryo"/>
-              </a:rPr>
-              <a:t>• </a:t>
-            </a:r>
-            <a:r>
-              <a:rPr sz="2100" b="1">
-                <a:solidFill>
-                  <a:srgbClr val="323130"/>
-                </a:solidFill>
-                <a:latin typeface="Meiryo"/>
-                <a:ea typeface="Meiryo"/>
-              </a:rPr>
-              <a:t>モデル</a:t>
-            </a:r>
-            <a:r>
-              <a:rPr sz="2100">
-                <a:solidFill>
-                  <a:srgbClr val="323130"/>
-                </a:solidFill>
-                <a:latin typeface="Meiryo"/>
-                <a:ea typeface="Meiryo"/>
-              </a:rPr>
-              <a:t> </a:t>
-            </a:r>
-            <a:r>
-              <a:rPr sz="1700" b="1">
-                <a:solidFill>
-                  <a:srgbClr val="1565C0"/>
-                </a:solidFill>
-                <a:latin typeface="Meiryo"/>
-                <a:ea typeface="Meiryo"/>
-              </a:rPr>
-              <a:t>クラウド基盤</a:t>
-            </a:r>
-            <a:r>
-              <a:rPr sz="2100">
-                <a:solidFill>
-                  <a:srgbClr val="323130"/>
-                </a:solidFill>
-                <a:latin typeface="Meiryo"/>
-                <a:ea typeface="Meiryo"/>
-              </a:rPr>
-              <a:t> / </a:t>
-            </a:r>
-            <a:r>
-              <a:rPr sz="2100" b="1">
-                <a:solidFill>
-                  <a:srgbClr val="323130"/>
-                </a:solidFill>
-                <a:latin typeface="Meiryo"/>
-                <a:ea typeface="Meiryo"/>
-              </a:rPr>
-              <a:t>エージェントソフト</a:t>
-            </a:r>
-            <a:r>
-              <a:rPr sz="2100">
-                <a:solidFill>
-                  <a:srgbClr val="323130"/>
-                </a:solidFill>
-                <a:latin typeface="Meiryo"/>
-                <a:ea typeface="Meiryo"/>
-              </a:rPr>
-              <a:t> </a:t>
-            </a:r>
-            <a:r>
-              <a:rPr sz="1700" b="1">
-                <a:solidFill>
-                  <a:srgbClr val="1565C0"/>
-                </a:solidFill>
-                <a:latin typeface="Meiryo"/>
-                <a:ea typeface="Meiryo"/>
-              </a:rPr>
-              <a:t>クラウド基盤</a:t>
-            </a:r>
-            <a:r>
-              <a:rPr sz="2100">
-                <a:solidFill>
-                  <a:srgbClr val="323130"/>
-                </a:solidFill>
-                <a:latin typeface="Meiryo"/>
-                <a:ea typeface="Meiryo"/>
-              </a:rPr>
-              <a:t> / </a:t>
-            </a:r>
-            <a:r>
-              <a:rPr sz="2100" b="1">
-                <a:solidFill>
-                  <a:srgbClr val="323130"/>
-                </a:solidFill>
-                <a:latin typeface="Meiryo"/>
-                <a:ea typeface="Meiryo"/>
-              </a:rPr>
-              <a:t>コンテキスト</a:t>
-            </a:r>
-            <a:r>
-              <a:rPr sz="2100">
-                <a:solidFill>
-                  <a:srgbClr val="323130"/>
-                </a:solidFill>
-                <a:latin typeface="Meiryo"/>
-                <a:ea typeface="Meiryo"/>
-              </a:rPr>
-              <a:t> </a:t>
-            </a:r>
-            <a:r>
-              <a:rPr sz="1700" b="1">
-                <a:solidFill>
-                  <a:srgbClr val="1565C0"/>
-                </a:solidFill>
-                <a:latin typeface="Meiryo"/>
-                <a:ea typeface="Meiryo"/>
-              </a:rPr>
-              <a:t>クラウド基盤</a:t>
-            </a:r>
-          </a:p>
-          <a:p>
-            <a:pPr>
-              <a:spcAft>
-                <a:spcPts val="500"/>
-              </a:spcAft>
-            </a:pPr>
-            <a:r>
-              <a:rPr sz="2100">
-                <a:solidFill>
-                  <a:srgbClr val="323130"/>
-                </a:solidFill>
-                <a:latin typeface="Meiryo"/>
-                <a:ea typeface="Meiryo"/>
-              </a:rPr>
-              <a:t>• → </a:t>
-            </a:r>
-            <a:r>
-              <a:rPr sz="2100" b="1">
-                <a:solidFill>
-                  <a:srgbClr val="323130"/>
-                </a:solidFill>
-                <a:latin typeface="Meiryo"/>
-                <a:ea typeface="Meiryo"/>
-              </a:rPr>
-              <a:t>すべてクラウド基盤。自前で構築・管理する典型的なエンタープライズ構成</a:t>
-            </a:r>
-          </a:p>
-        </p:txBody>
-      </p:sp>
-      <p:sp>
-        <p:nvSpPr>
-          <p:cNvPr id="7" name="TextBox 6"/>
           <p:cNvSpPr txBox="1"/>
           <p:nvPr/>
         </p:nvSpPr>
@@ -7034,252 +6778,33 @@
           </a:p>
         </p:txBody>
       </p:sp>
-      <p:sp>
-        <p:nvSpPr>
-          <p:cNvPr id="5" name="Rectangle 4"/>
-          <p:cNvSpPr/>
-          <p:nvPr/>
-        </p:nvSpPr>
-        <p:spPr>
-          <a:xfrm>
-            <a:off x="502920" y="1577340"/>
-            <a:ext cx="11183112" cy="3726180"/>
-          </a:xfrm>
-          <a:prstGeom prst="rect">
-            <a:avLst/>
-          </a:prstGeom>
-          <a:solidFill>
-            <a:srgbClr val="F5F5F5"/>
-          </a:solidFill>
-          <a:ln>
-            <a:noFill/>
-          </a:ln>
-        </p:spPr>
-        <p:style>
-          <a:lnRef idx="1">
-            <a:schemeClr val="accent1"/>
-          </a:lnRef>
-          <a:fillRef idx="3">
-            <a:schemeClr val="accent1"/>
-          </a:fillRef>
-          <a:effectRef idx="2">
-            <a:schemeClr val="accent1"/>
-          </a:effectRef>
-          <a:fontRef idx="minor">
-            <a:schemeClr val="lt1"/>
-          </a:fontRef>
-        </p:style>
-        <p:txBody>
-          <a:bodyPr rtlCol="0" anchor="ctr" wrap="none"/>
-          <a:lstStyle/>
-          <a:p>
-            <a:pPr algn="ctr"/>
-            <a:r>
-              <a:rPr sz="1400" kern="0" spc="0">
-                <a:solidFill>
-                  <a:srgbClr val="323130"/>
-                </a:solidFill>
-                <a:latin typeface="MS Gothic"/>
-                <a:ea typeface="MS Gothic"/>
-              </a:rPr>
-              <a:t>+----------------------------------------------------+  
-|                 社内データセンター (オンプレ)        |
-|                                                      |
-| +--------------------+   +-----------------------+   |
-| | Ollama / vLLM      |   | PostgreSQL pgvector   |   |
-| | (GPU搭載サーバー)  |&lt;--| / Elasticsearch       |   |
-| +--------------------+   | (ベクトルストア)      |   |
-|          ^               +-----------------------+   |
-|          |                                           |
-| +--------+-----------+                               |
-| | 自作Webアプリ      |                               |
-| | (社内サーバー)     |                               |
-| +--------------------+                               |
-+----------------------------------------------------+  </a:t>
-            </a:r>
-          </a:p>
-        </p:txBody>
-      </p:sp>
+      <p:pic>
+        <p:nvPicPr>
+          <p:cNvPr id="5" name="Picture 4" descr="image.png"/>
+          <p:cNvPicPr>
+            <a:picLocks noChangeAspect="1"/>
+          </p:cNvPicPr>
+          <p:nvPr/>
+        </p:nvPicPr>
+        <p:blipFill>
+          <a:blip r:embed="rId2"/>
+          <a:stretch>
+            <a:fillRect/>
+          </a:stretch>
+        </p:blipFill>
+        <p:spPr>
+          <a:xfrm>
+            <a:off x="504444" y="1577340"/>
+            <a:ext cx="11180064" cy="4169663"/>
+          </a:xfrm>
+          <a:prstGeom prst="rect">
+            <a:avLst/>
+          </a:prstGeom>
+        </p:spPr>
+      </p:pic>
       <p:sp>
         <p:nvSpPr>
           <p:cNvPr id="6" name="TextBox 5"/>
-          <p:cNvSpPr txBox="1"/>
-          <p:nvPr/>
-        </p:nvSpPr>
-        <p:spPr>
-          <a:xfrm>
-            <a:off x="502920" y="5394960"/>
-            <a:ext cx="11183112" cy="594359"/>
-          </a:xfrm>
-          <a:prstGeom prst="rect">
-            <a:avLst/>
-          </a:prstGeom>
-          <a:noFill/>
-        </p:spPr>
-        <p:txBody>
-          <a:bodyPr wrap="square">
-            <a:normAutofit/>
-          </a:bodyPr>
-          <a:lstStyle/>
-          <a:p>
-            <a:pPr>
-              <a:spcAft>
-                <a:spcPts val="500"/>
-              </a:spcAft>
-            </a:pPr>
-            <a:r>
-              <a:rPr sz="2100">
-                <a:solidFill>
-                  <a:srgbClr val="323130"/>
-                </a:solidFill>
-                <a:latin typeface="Meiryo"/>
-                <a:ea typeface="Meiryo"/>
-              </a:rPr>
-              <a:t>• </a:t>
-            </a:r>
-            <a:r>
-              <a:rPr sz="2100" b="1">
-                <a:solidFill>
-                  <a:srgbClr val="323130"/>
-                </a:solidFill>
-                <a:latin typeface="Meiryo"/>
-                <a:ea typeface="Meiryo"/>
-              </a:rPr>
-              <a:t>モデル</a:t>
-            </a:r>
-            <a:r>
-              <a:rPr sz="2100">
-                <a:solidFill>
-                  <a:srgbClr val="323130"/>
-                </a:solidFill>
-                <a:latin typeface="Meiryo"/>
-                <a:ea typeface="Meiryo"/>
-              </a:rPr>
-              <a:t> </a:t>
-            </a:r>
-            <a:r>
-              <a:rPr sz="1700" b="1">
-                <a:solidFill>
-                  <a:srgbClr val="2E7D32"/>
-                </a:solidFill>
-                <a:latin typeface="Meiryo"/>
-                <a:ea typeface="Meiryo"/>
-              </a:rPr>
-              <a:t>オンプレ</a:t>
-            </a:r>
-            <a:r>
-              <a:rPr sz="2100">
-                <a:solidFill>
-                  <a:srgbClr val="323130"/>
-                </a:solidFill>
-                <a:latin typeface="Meiryo"/>
-                <a:ea typeface="Meiryo"/>
-              </a:rPr>
-              <a:t> / </a:t>
-            </a:r>
-            <a:r>
-              <a:rPr sz="2100" b="1">
-                <a:solidFill>
-                  <a:srgbClr val="323130"/>
-                </a:solidFill>
-                <a:latin typeface="Meiryo"/>
-                <a:ea typeface="Meiryo"/>
-              </a:rPr>
-              <a:t>エージェントソフト</a:t>
-            </a:r>
-            <a:r>
-              <a:rPr sz="2100">
-                <a:solidFill>
-                  <a:srgbClr val="323130"/>
-                </a:solidFill>
-                <a:latin typeface="Meiryo"/>
-                <a:ea typeface="Meiryo"/>
-              </a:rPr>
-              <a:t> </a:t>
-            </a:r>
-            <a:r>
-              <a:rPr sz="1700" b="1">
-                <a:solidFill>
-                  <a:srgbClr val="2E7D32"/>
-                </a:solidFill>
-                <a:latin typeface="Meiryo"/>
-                <a:ea typeface="Meiryo"/>
-              </a:rPr>
-              <a:t>オンプレ</a:t>
-            </a:r>
-            <a:r>
-              <a:rPr sz="2100">
-                <a:solidFill>
-                  <a:srgbClr val="323130"/>
-                </a:solidFill>
-                <a:latin typeface="Meiryo"/>
-                <a:ea typeface="Meiryo"/>
-              </a:rPr>
-              <a:t> / </a:t>
-            </a:r>
-            <a:r>
-              <a:rPr sz="2100" b="1">
-                <a:solidFill>
-                  <a:srgbClr val="323130"/>
-                </a:solidFill>
-                <a:latin typeface="Meiryo"/>
-                <a:ea typeface="Meiryo"/>
-              </a:rPr>
-              <a:t>コンテキスト</a:t>
-            </a:r>
-            <a:r>
-              <a:rPr sz="2100">
-                <a:solidFill>
-                  <a:srgbClr val="323130"/>
-                </a:solidFill>
-                <a:latin typeface="Meiryo"/>
-                <a:ea typeface="Meiryo"/>
-              </a:rPr>
-              <a:t> </a:t>
-            </a:r>
-            <a:r>
-              <a:rPr sz="1700" b="1">
-                <a:solidFill>
-                  <a:srgbClr val="2E7D32"/>
-                </a:solidFill>
-                <a:latin typeface="Meiryo"/>
-                <a:ea typeface="Meiryo"/>
-              </a:rPr>
-              <a:t>オンプレ</a:t>
-            </a:r>
-          </a:p>
-          <a:p>
-            <a:pPr>
-              <a:spcAft>
-                <a:spcPts val="500"/>
-              </a:spcAft>
-            </a:pPr>
-            <a:r>
-              <a:rPr sz="2100">
-                <a:solidFill>
-                  <a:srgbClr val="323130"/>
-                </a:solidFill>
-                <a:latin typeface="Meiryo"/>
-                <a:ea typeface="Meiryo"/>
-              </a:rPr>
-              <a:t>• → </a:t>
-            </a:r>
-            <a:r>
-              <a:rPr sz="2100" b="1">
-                <a:solidFill>
-                  <a:srgbClr val="323130"/>
-                </a:solidFill>
-                <a:latin typeface="Meiryo"/>
-                <a:ea typeface="Meiryo"/>
-              </a:rPr>
-              <a:t>すべてオンプレ。データを外に出せない要件がある場合の構成</a:t>
-            </a:r>
-          </a:p>
-        </p:txBody>
-      </p:sp>
-      <p:sp>
-        <p:nvSpPr>
-          <p:cNvPr id="7" name="TextBox 6"/>
           <p:cNvSpPr txBox="1"/>
           <p:nvPr/>
         </p:nvSpPr>
@@ -7451,70 +6976,30 @@
           </a:p>
         </p:txBody>
       </p:sp>
-      <p:sp>
-        <p:nvSpPr>
-          <p:cNvPr id="5" name="Rectangle 4"/>
-          <p:cNvSpPr/>
-          <p:nvPr/>
-        </p:nvSpPr>
-        <p:spPr>
-          <a:xfrm>
-            <a:off x="502920" y="1577340"/>
-            <a:ext cx="11183112" cy="3246120"/>
-          </a:xfrm>
-          <a:prstGeom prst="rect">
-            <a:avLst/>
-          </a:prstGeom>
-          <a:solidFill>
-            <a:srgbClr val="F5F5F5"/>
-          </a:solidFill>
-          <a:ln>
-            <a:noFill/>
-          </a:ln>
-        </p:spPr>
-        <p:style>
-          <a:lnRef idx="1">
-            <a:schemeClr val="accent1"/>
-          </a:lnRef>
-          <a:fillRef idx="3">
-            <a:schemeClr val="accent1"/>
-          </a:fillRef>
-          <a:effectRef idx="2">
-            <a:schemeClr val="accent1"/>
-          </a:effectRef>
-          <a:fontRef idx="minor">
-            <a:schemeClr val="lt1"/>
-          </a:fontRef>
-        </p:style>
-        <p:txBody>
-          <a:bodyPr rtlCol="0" anchor="ctr" wrap="none"/>
-          <a:lstStyle/>
-          <a:p>
-            <a:pPr algn="ctr"/>
-            <a:r>
-              <a:rPr sz="1400" kern="0" spc="0">
-                <a:solidFill>
-                  <a:srgbClr val="323130"/>
-                </a:solidFill>
-                <a:latin typeface="MS Gothic"/>
-                <a:ea typeface="MS Gothic"/>
-              </a:rPr>
-              <a:t>+-------------------+          +------------------------+
-|    ローカル       |          |    GitHub (クラウド)   |
-|                   |          |                        |
-| +---------------+ |          | Repository             |
-| | ソースコード  | |   API    | Issues / Discussions   |
-| | copilot-      |&lt;|---------&gt;| Copilot Spaces         |
-| | instructions  | |          +------------------------+
-| +---------------+ |          | モデル選択             |
-|        |          |          |  GPT / Claude /        |
-|   Copilot CLI     |          |  Gemini                |
-|  (エージェント)   |          +------------------------+
-+-------------------+</a:t>
-            </a:r>
-          </a:p>
-        </p:txBody>
-      </p:sp>
+      <p:pic>
+        <p:nvPicPr>
+          <p:cNvPr id="5" name="Picture 4" descr="image.png"/>
+          <p:cNvPicPr>
+            <a:picLocks noChangeAspect="1"/>
+          </p:cNvPicPr>
+          <p:nvPr/>
+        </p:nvPicPr>
+        <p:blipFill>
+          <a:blip r:embed="rId2"/>
+          <a:stretch>
+            <a:fillRect/>
+          </a:stretch>
+        </p:blipFill>
+        <p:spPr>
+          <a:xfrm>
+            <a:off x="504444" y="1577340"/>
+            <a:ext cx="11180064" cy="3608832"/>
+          </a:xfrm>
+          <a:prstGeom prst="rect">
+            <a:avLst/>
+          </a:prstGeom>
+        </p:spPr>
+      </p:pic>
       <p:sp>
         <p:nvSpPr>
           <p:cNvPr id="6" name="TextBox 5"/>
@@ -7523,8 +7008,8 @@
         </p:nvSpPr>
         <p:spPr>
           <a:xfrm>
-            <a:off x="502920" y="4914900"/>
-            <a:ext cx="11183112" cy="1074419"/>
+            <a:off x="502920" y="5277612"/>
+            <a:ext cx="11183112" cy="711708"/>
           </a:xfrm>
           <a:prstGeom prst="rect">
             <a:avLst/>
@@ -7903,71 +7388,30 @@
           </a:p>
         </p:txBody>
       </p:sp>
-      <p:sp>
-        <p:nvSpPr>
-          <p:cNvPr id="5" name="Rectangle 4"/>
-          <p:cNvSpPr/>
-          <p:nvPr/>
-        </p:nvSpPr>
-        <p:spPr>
-          <a:xfrm>
-            <a:off x="502920" y="1577340"/>
-            <a:ext cx="11183112" cy="3040380"/>
-          </a:xfrm>
-          <a:prstGeom prst="rect">
-            <a:avLst/>
-          </a:prstGeom>
-          <a:solidFill>
-            <a:srgbClr val="F5F5F5"/>
-          </a:solidFill>
-          <a:ln>
-            <a:noFill/>
-          </a:ln>
-        </p:spPr>
-        <p:style>
-          <a:lnRef idx="1">
-            <a:schemeClr val="accent1"/>
-          </a:lnRef>
-          <a:fillRef idx="3">
-            <a:schemeClr val="accent1"/>
-          </a:fillRef>
-          <a:effectRef idx="2">
-            <a:schemeClr val="accent1"/>
-          </a:effectRef>
-          <a:fontRef idx="minor">
-            <a:schemeClr val="lt1"/>
-          </a:fontRef>
-        </p:style>
-        <p:txBody>
-          <a:bodyPr rtlCol="0" anchor="ctr" wrap="none"/>
-          <a:lstStyle/>
-          <a:p>
-            <a:pPr algn="ctr"/>
-            <a:r>
-              <a:rPr sz="1200" kern="0" spc="0">
-                <a:solidFill>
-                  <a:srgbClr val="323130"/>
-                </a:solidFill>
-                <a:latin typeface="MS Gothic"/>
-                <a:ea typeface="MS Gothic"/>
-              </a:rPr>
-              <a:t>+-------------------+          +------------------------+
-|    ローカル       |          |       クラウド         |
-|                   |          |                        |
-| +---------------+ |          | Anthropic API (推論)   |
-| | Obsidian      | |   API    | Todoist API            |
-| | CLAUDE.md     |&lt;|---------&gt;| Google Calendar API    |
-| | ソースコード  | |          | GitHub                 |
-| | skills/       | |          | Azure                  |
-| +---------------+ |          | Discord API            |
-|        |          |          +------------------------+
-|   Claude Code     |
-|  (エージェント)   |
-+-------------------+</a:t>
-            </a:r>
-          </a:p>
-        </p:txBody>
-      </p:sp>
+      <p:pic>
+        <p:nvPicPr>
+          <p:cNvPr id="5" name="Picture 4" descr="image.png"/>
+          <p:cNvPicPr>
+            <a:picLocks noChangeAspect="1"/>
+          </p:cNvPicPr>
+          <p:nvPr/>
+        </p:nvPicPr>
+        <p:blipFill>
+          <a:blip r:embed="rId2"/>
+          <a:stretch>
+            <a:fillRect/>
+          </a:stretch>
+        </p:blipFill>
+        <p:spPr>
+          <a:xfrm>
+            <a:off x="504444" y="1577340"/>
+            <a:ext cx="11180064" cy="3889247"/>
+          </a:xfrm>
+          <a:prstGeom prst="rect">
+            <a:avLst/>
+          </a:prstGeom>
+        </p:spPr>
+      </p:pic>
       <p:sp>
         <p:nvSpPr>
           <p:cNvPr id="6" name="TextBox 5"/>
@@ -7976,8 +7420,8 @@
         </p:nvSpPr>
         <p:spPr>
           <a:xfrm>
-            <a:off x="502920" y="4709160"/>
-            <a:ext cx="11183112" cy="1280159"/>
+            <a:off x="502920" y="5558028"/>
+            <a:ext cx="11183112" cy="431292"/>
           </a:xfrm>
           <a:prstGeom prst="rect">
             <a:avLst/>
@@ -8373,290 +7817,33 @@
           </a:p>
         </p:txBody>
       </p:sp>
-      <p:sp>
-        <p:nvSpPr>
-          <p:cNvPr id="5" name="Rectangle 4"/>
-          <p:cNvSpPr/>
-          <p:nvPr/>
-        </p:nvSpPr>
-        <p:spPr>
-          <a:xfrm>
-            <a:off x="502920" y="2194560"/>
-            <a:ext cx="11183112" cy="2937510"/>
-          </a:xfrm>
-          <a:prstGeom prst="rect">
-            <a:avLst/>
-          </a:prstGeom>
-          <a:solidFill>
-            <a:srgbClr val="F5F5F5"/>
-          </a:solidFill>
-          <a:ln>
-            <a:noFill/>
-          </a:ln>
-        </p:spPr>
-        <p:style>
-          <a:lnRef idx="1">
-            <a:schemeClr val="accent1"/>
-          </a:lnRef>
-          <a:fillRef idx="3">
-            <a:schemeClr val="accent1"/>
-          </a:fillRef>
-          <a:effectRef idx="2">
-            <a:schemeClr val="accent1"/>
-          </a:effectRef>
-          <a:fontRef idx="minor">
-            <a:schemeClr val="lt1"/>
-          </a:fontRef>
-        </p:style>
-        <p:txBody>
-          <a:bodyPr rtlCol="0" anchor="ctr" wrap="none"/>
-          <a:lstStyle/>
-          <a:p>
-            <a:pPr algn="ctr"/>
-            <a:r>
-              <a:rPr sz="1000" kern="0" spc="0">
-                <a:solidFill>
-                  <a:srgbClr val="323130"/>
-                </a:solidFill>
-                <a:latin typeface="MS Gothic"/>
-                <a:ea typeface="MS Gothic"/>
-              </a:rPr>
-              <a:t>+------------------------+       +----------------------------+
-|         Azure          |       |       オンプレミス         |
-|                        |       |                            |
-| +--------------------+ | HTTPS |  https://spark.xxx.ts.net  |
-| | Azure App Service  |-|------&gt;|            |               |
-| | (自作エージェント) | |       |            v Tailscale     |
-| +--------------------+ |       | +------------------------+ |
-|          |             |       | |       DGX Spark        | |
-|          | Fallback    |       | |   Ollama + LiteLLM     | |
-|          v             |       | +------------------------+ |
-| +--------------------+ |       |                            |
-| | Microsoft Foundry  | |       +----------------------------+
-| | (従量課金)         | |
-| +--------------------+ |
-+------------------------+</a:t>
-            </a:r>
-          </a:p>
-        </p:txBody>
-      </p:sp>
+      <p:pic>
+        <p:nvPicPr>
+          <p:cNvPr id="5" name="Picture 4" descr="image.png"/>
+          <p:cNvPicPr>
+            <a:picLocks noChangeAspect="1"/>
+          </p:cNvPicPr>
+          <p:nvPr/>
+        </p:nvPicPr>
+        <p:blipFill>
+          <a:blip r:embed="rId2"/>
+          <a:stretch>
+            <a:fillRect/>
+          </a:stretch>
+        </p:blipFill>
+        <p:spPr>
+          <a:xfrm>
+            <a:off x="504444" y="2194560"/>
+            <a:ext cx="11180064" cy="3794759"/>
+          </a:xfrm>
+          <a:prstGeom prst="rect">
+            <a:avLst/>
+          </a:prstGeom>
+        </p:spPr>
+      </p:pic>
       <p:sp>
         <p:nvSpPr>
           <p:cNvPr id="6" name="TextBox 5"/>
-          <p:cNvSpPr txBox="1"/>
-          <p:nvPr/>
-        </p:nvSpPr>
-        <p:spPr>
-          <a:xfrm>
-            <a:off x="502920" y="5223509"/>
-            <a:ext cx="11183112" cy="765810"/>
-          </a:xfrm>
-          <a:prstGeom prst="rect">
-            <a:avLst/>
-          </a:prstGeom>
-          <a:noFill/>
-        </p:spPr>
-        <p:txBody>
-          <a:bodyPr wrap="square">
-            <a:normAutofit/>
-          </a:bodyPr>
-          <a:lstStyle/>
-          <a:p>
-            <a:pPr>
-              <a:spcAft>
-                <a:spcPts val="300"/>
-              </a:spcAft>
-            </a:pPr>
-            <a:r>
-              <a:rPr sz="1500">
-                <a:solidFill>
-                  <a:srgbClr val="323130"/>
-                </a:solidFill>
-                <a:latin typeface="Meiryo"/>
-                <a:ea typeface="Meiryo"/>
-              </a:rPr>
-              <a:t>• </a:t>
-            </a:r>
-            <a:r>
-              <a:rPr sz="1500" b="1">
-                <a:solidFill>
-                  <a:srgbClr val="323130"/>
-                </a:solidFill>
-                <a:latin typeface="Meiryo"/>
-                <a:ea typeface="Meiryo"/>
-              </a:rPr>
-              <a:t>モデル</a:t>
-            </a:r>
-            <a:r>
-              <a:rPr sz="1500">
-                <a:solidFill>
-                  <a:srgbClr val="323130"/>
-                </a:solidFill>
-                <a:latin typeface="Meiryo"/>
-                <a:ea typeface="Meiryo"/>
-              </a:rPr>
-              <a:t> </a:t>
-            </a:r>
-            <a:r>
-              <a:rPr sz="1200" b="1">
-                <a:solidFill>
-                  <a:srgbClr val="2E7D32"/>
-                </a:solidFill>
-                <a:latin typeface="Meiryo"/>
-                <a:ea typeface="Meiryo"/>
-              </a:rPr>
-              <a:t>オンプレ</a:t>
-            </a:r>
-            <a:r>
-              <a:rPr sz="1500">
-                <a:solidFill>
-                  <a:srgbClr val="323130"/>
-                </a:solidFill>
-                <a:latin typeface="Meiryo"/>
-                <a:ea typeface="Meiryo"/>
-              </a:rPr>
-              <a:t> DGX Spark + </a:t>
-            </a:r>
-            <a:r>
-              <a:rPr sz="1200" b="1">
-                <a:solidFill>
-                  <a:srgbClr val="1565C0"/>
-                </a:solidFill>
-                <a:latin typeface="Meiryo"/>
-                <a:ea typeface="Meiryo"/>
-              </a:rPr>
-              <a:t>クラウド基盤</a:t>
-            </a:r>
-            <a:r>
-              <a:rPr sz="1500">
-                <a:solidFill>
-                  <a:srgbClr val="323130"/>
-                </a:solidFill>
-                <a:latin typeface="Meiryo"/>
-                <a:ea typeface="Meiryo"/>
-              </a:rPr>
-              <a:t> Microsoft Foundry（フォールバック）</a:t>
-            </a:r>
-          </a:p>
-          <a:p>
-            <a:pPr>
-              <a:spcAft>
-                <a:spcPts val="300"/>
-              </a:spcAft>
-            </a:pPr>
-            <a:r>
-              <a:rPr sz="1500">
-                <a:solidFill>
-                  <a:srgbClr val="323130"/>
-                </a:solidFill>
-                <a:latin typeface="Meiryo"/>
-                <a:ea typeface="Meiryo"/>
-              </a:rPr>
-              <a:t>• </a:t>
-            </a:r>
-            <a:r>
-              <a:rPr sz="1500" b="1">
-                <a:solidFill>
-                  <a:srgbClr val="323130"/>
-                </a:solidFill>
-                <a:latin typeface="Meiryo"/>
-                <a:ea typeface="Meiryo"/>
-              </a:rPr>
-              <a:t>エージェントソフト</a:t>
-            </a:r>
-            <a:r>
-              <a:rPr sz="1500">
-                <a:solidFill>
-                  <a:srgbClr val="323130"/>
-                </a:solidFill>
-                <a:latin typeface="Meiryo"/>
-                <a:ea typeface="Meiryo"/>
-              </a:rPr>
-              <a:t> </a:t>
-            </a:r>
-            <a:r>
-              <a:rPr sz="1200" b="1">
-                <a:solidFill>
-                  <a:srgbClr val="1565C0"/>
-                </a:solidFill>
-                <a:latin typeface="Meiryo"/>
-                <a:ea typeface="Meiryo"/>
-              </a:rPr>
-              <a:t>クラウド基盤</a:t>
-            </a:r>
-            <a:r>
-              <a:rPr sz="1500">
-                <a:solidFill>
-                  <a:srgbClr val="323130"/>
-                </a:solidFill>
-                <a:latin typeface="Meiryo"/>
-                <a:ea typeface="Meiryo"/>
-              </a:rPr>
-              <a:t> 自作（Azure Agent SDK on App Service）</a:t>
-            </a:r>
-          </a:p>
-          <a:p>
-            <a:pPr>
-              <a:spcAft>
-                <a:spcPts val="300"/>
-              </a:spcAft>
-            </a:pPr>
-            <a:r>
-              <a:rPr sz="1500">
-                <a:solidFill>
-                  <a:srgbClr val="323130"/>
-                </a:solidFill>
-                <a:latin typeface="Meiryo"/>
-                <a:ea typeface="Meiryo"/>
-              </a:rPr>
-              <a:t>• </a:t>
-            </a:r>
-            <a:r>
-              <a:rPr sz="1500" b="1">
-                <a:solidFill>
-                  <a:srgbClr val="323130"/>
-                </a:solidFill>
-                <a:latin typeface="Meiryo"/>
-                <a:ea typeface="Meiryo"/>
-              </a:rPr>
-              <a:t>コンテキスト</a:t>
-            </a:r>
-            <a:r>
-              <a:rPr sz="1500">
-                <a:solidFill>
-                  <a:srgbClr val="323130"/>
-                </a:solidFill>
-                <a:latin typeface="Meiryo"/>
-                <a:ea typeface="Meiryo"/>
-              </a:rPr>
-              <a:t> </a:t>
-            </a:r>
-            <a:r>
-              <a:rPr sz="1200" b="1">
-                <a:solidFill>
-                  <a:srgbClr val="C62828"/>
-                </a:solidFill>
-                <a:latin typeface="Meiryo"/>
-                <a:ea typeface="Meiryo"/>
-              </a:rPr>
-              <a:t>SaaS</a:t>
-            </a:r>
-            <a:r>
-              <a:rPr sz="1500">
-                <a:solidFill>
-                  <a:srgbClr val="323130"/>
-                </a:solidFill>
-                <a:latin typeface="Meiryo"/>
-                <a:ea typeface="Meiryo"/>
-              </a:rPr>
-              <a:t> SharePoint内の社内ドキュメント</a:t>
-            </a:r>
-          </a:p>
-        </p:txBody>
-      </p:sp>
-      <p:sp>
-        <p:nvSpPr>
-          <p:cNvPr id="7" name="TextBox 6"/>
           <p:cNvSpPr txBox="1"/>
           <p:nvPr/>
         </p:nvSpPr>
@@ -9443,67 +8630,30 @@
           </a:p>
         </p:txBody>
       </p:sp>
-      <p:sp>
-        <p:nvSpPr>
-          <p:cNvPr id="6" name="Rectangle 5"/>
-          <p:cNvSpPr/>
-          <p:nvPr/>
-        </p:nvSpPr>
-        <p:spPr>
-          <a:xfrm>
-            <a:off x="502920" y="2620772"/>
-            <a:ext cx="11183112" cy="2217420"/>
-          </a:xfrm>
-          <a:prstGeom prst="rect">
-            <a:avLst/>
-          </a:prstGeom>
-          <a:solidFill>
-            <a:srgbClr val="F5F5F5"/>
-          </a:solidFill>
-          <a:ln>
-            <a:noFill/>
-          </a:ln>
-        </p:spPr>
-        <p:style>
-          <a:lnRef idx="1">
-            <a:schemeClr val="accent1"/>
-          </a:lnRef>
-          <a:fillRef idx="3">
-            <a:schemeClr val="accent1"/>
-          </a:fillRef>
-          <a:effectRef idx="2">
-            <a:schemeClr val="accent1"/>
-          </a:effectRef>
-          <a:fontRef idx="minor">
-            <a:schemeClr val="lt1"/>
-          </a:fontRef>
-        </p:style>
-        <p:txBody>
-          <a:bodyPr rtlCol="0" anchor="ctr" wrap="none"/>
-          <a:lstStyle/>
-          <a:p>
-            <a:pPr algn="ctr"/>
-            <a:r>
-              <a:rPr sz="1200" kern="0" spc="0">
-                <a:solidFill>
-                  <a:srgbClr val="323130"/>
-                </a:solidFill>
-                <a:latin typeface="MS Gothic"/>
-                <a:ea typeface="MS Gothic"/>
-              </a:rPr>
-              <a:t>+-----------------------+             +------------------+
-|     ローカルPC        |             |    claude.ai     |
-|                       |             |                  |
-| Claude Code（実行中） |  &lt;--TLS--&gt;  | Web / モバイルUI |
-| - ファイルシステム    |             | QRコードで即接続 |
-| - MCP サーバー        |             | スマホでも操作可 |
-| - プロジェクト設定    |             |                  |
-+-----------------------+             +------------------+
- コードはローカルに留まる！メッセージだけが流れる</a:t>
-            </a:r>
-          </a:p>
-        </p:txBody>
-      </p:sp>
+      <p:pic>
+        <p:nvPicPr>
+          <p:cNvPr id="6" name="Picture 5" descr="image.png"/>
+          <p:cNvPicPr>
+            <a:picLocks noChangeAspect="1"/>
+          </p:cNvPicPr>
+          <p:nvPr/>
+        </p:nvPicPr>
+        <p:blipFill>
+          <a:blip r:embed="rId2"/>
+          <a:stretch>
+            <a:fillRect/>
+          </a:stretch>
+        </p:blipFill>
+        <p:spPr>
+          <a:xfrm>
+            <a:off x="504444" y="2620772"/>
+            <a:ext cx="11180064" cy="2767584"/>
+          </a:xfrm>
+          <a:prstGeom prst="rect">
+            <a:avLst/>
+          </a:prstGeom>
+        </p:spPr>
+      </p:pic>
       <p:sp>
         <p:nvSpPr>
           <p:cNvPr id="7" name="TextBox 6"/>
@@ -9512,8 +8662,8 @@
         </p:nvSpPr>
         <p:spPr>
           <a:xfrm>
-            <a:off x="502920" y="4929632"/>
-            <a:ext cx="11183112" cy="1059688"/>
+            <a:off x="502920" y="5479796"/>
+            <a:ext cx="11183112" cy="509524"/>
           </a:xfrm>
           <a:prstGeom prst="rect">
             <a:avLst/>
@@ -10154,70 +9304,30 @@
           </a:p>
         </p:txBody>
       </p:sp>
-      <p:sp>
-        <p:nvSpPr>
-          <p:cNvPr id="5" name="Rectangle 4"/>
-          <p:cNvSpPr/>
-          <p:nvPr/>
-        </p:nvSpPr>
-        <p:spPr>
-          <a:xfrm>
-            <a:off x="502920" y="1577340"/>
-            <a:ext cx="11183112" cy="2628900"/>
-          </a:xfrm>
-          <a:prstGeom prst="rect">
-            <a:avLst/>
-          </a:prstGeom>
-          <a:solidFill>
-            <a:srgbClr val="F5F5F5"/>
-          </a:solidFill>
-          <a:ln>
-            <a:noFill/>
-          </a:ln>
-        </p:spPr>
-        <p:style>
-          <a:lnRef idx="1">
-            <a:schemeClr val="accent1"/>
-          </a:lnRef>
-          <a:fillRef idx="3">
-            <a:schemeClr val="accent1"/>
-          </a:fillRef>
-          <a:effectRef idx="2">
-            <a:schemeClr val="accent1"/>
-          </a:effectRef>
-          <a:fontRef idx="minor">
-            <a:schemeClr val="lt1"/>
-          </a:fontRef>
-        </p:style>
-        <p:txBody>
-          <a:bodyPr rtlCol="0" anchor="ctr" wrap="none"/>
-          <a:lstStyle/>
-          <a:p>
-            <a:pPr algn="ctr"/>
-            <a:r>
-              <a:rPr sz="1100" kern="0" spc="0">
-                <a:solidFill>
-                  <a:srgbClr val="323130"/>
-                </a:solidFill>
-                <a:latin typeface="MS Gothic"/>
-                <a:ea typeface="MS Gothic"/>
-              </a:rPr>
-              <a:t>PC Terminal:
-  claude --remote "認証バグを修正して"
-        ↓
-+-------------------------------+
-| Anthropic 管理クラウドVM      |
-| - GitHub リポジトリをクローン |
-| - テスト実行・コード修正      |
-| - PR 作成まで自律実行         |
-+-------------------------------+
-        ↓
-  claude --teleport  ← ローカルに持ち帰り可能
-  （会話履歴 + ブランチごと）</a:t>
-            </a:r>
-          </a:p>
-        </p:txBody>
-      </p:sp>
+      <p:pic>
+        <p:nvPicPr>
+          <p:cNvPr id="5" name="Picture 4" descr="image.png"/>
+          <p:cNvPicPr>
+            <a:picLocks noChangeAspect="1"/>
+          </p:cNvPicPr>
+          <p:nvPr/>
+        </p:nvPicPr>
+        <p:blipFill>
+          <a:blip r:embed="rId2"/>
+          <a:stretch>
+            <a:fillRect/>
+          </a:stretch>
+        </p:blipFill>
+        <p:spPr>
+          <a:xfrm>
+            <a:off x="504444" y="1577340"/>
+            <a:ext cx="11180064" cy="3608832"/>
+          </a:xfrm>
+          <a:prstGeom prst="rect">
+            <a:avLst/>
+          </a:prstGeom>
+        </p:spPr>
+      </p:pic>
       <p:sp>
         <p:nvSpPr>
           <p:cNvPr id="6" name="TextBox 5"/>
@@ -10226,8 +9336,8 @@
         </p:nvSpPr>
         <p:spPr>
           <a:xfrm>
-            <a:off x="502920" y="4297679"/>
-            <a:ext cx="11183112" cy="1691640"/>
+            <a:off x="502920" y="5277612"/>
+            <a:ext cx="11183112" cy="711708"/>
           </a:xfrm>
           <a:prstGeom prst="rect">
             <a:avLst/>
@@ -17002,70 +16112,30 @@
           </a:p>
         </p:txBody>
       </p:sp>
-      <p:sp>
-        <p:nvSpPr>
-          <p:cNvPr id="5" name="Rectangle 4"/>
-          <p:cNvSpPr/>
-          <p:nvPr/>
-        </p:nvSpPr>
-        <p:spPr>
-          <a:xfrm>
-            <a:off x="502920" y="1577340"/>
-            <a:ext cx="11183112" cy="3863340"/>
-          </a:xfrm>
-          <a:prstGeom prst="rect">
-            <a:avLst/>
-          </a:prstGeom>
-          <a:solidFill>
-            <a:srgbClr val="F5F5F5"/>
-          </a:solidFill>
-          <a:ln>
-            <a:noFill/>
-          </a:ln>
-        </p:spPr>
-        <p:style>
-          <a:lnRef idx="1">
-            <a:schemeClr val="accent1"/>
-          </a:lnRef>
-          <a:fillRef idx="3">
-            <a:schemeClr val="accent1"/>
-          </a:fillRef>
-          <a:effectRef idx="2">
-            <a:schemeClr val="accent1"/>
-          </a:effectRef>
-          <a:fontRef idx="minor">
-            <a:schemeClr val="lt1"/>
-          </a:fontRef>
-        </p:style>
-        <p:txBody>
-          <a:bodyPr rtlCol="0" anchor="ctr" wrap="none"/>
-          <a:lstStyle/>
-          <a:p>
-            <a:pPr algn="ctr"/>
-            <a:r>
-              <a:rPr sz="1700" kern="0" spc="0">
-                <a:solidFill>
-                  <a:srgbClr val="323130"/>
-                </a:solidFill>
-                <a:latin typeface="MS Gothic"/>
-                <a:ea typeface="MS Gothic"/>
-              </a:rPr>
-              <a:t>AIエージェント（Claude Code / Cursor / Copilot...）
-              | 同じ API + 同じ RBAC
-+-------------------------------------+
-|       Azure Resource Manager        |
-|     (API + RBAC + Azure Policy)     |
-+------------------+------------------+
-| Azure (クラウド) |  オンプレミス    |
-|  - VMs           |  - Azure Local   |
-|  - AKS           |  - Arc Servers   |
-|  - Databases     |  - AKS Arc       |
-|  - Functions     |  - Arc Data Svc  |
-+------------------+------------------+</a:t>
-            </a:r>
-          </a:p>
-        </p:txBody>
-      </p:sp>
+      <p:pic>
+        <p:nvPicPr>
+          <p:cNvPr id="5" name="Picture 4" descr="image.png"/>
+          <p:cNvPicPr>
+            <a:picLocks noChangeAspect="1"/>
+          </p:cNvPicPr>
+          <p:nvPr/>
+        </p:nvPicPr>
+        <p:blipFill>
+          <a:blip r:embed="rId2"/>
+          <a:stretch>
+            <a:fillRect/>
+          </a:stretch>
+        </p:blipFill>
+        <p:spPr>
+          <a:xfrm>
+            <a:off x="504444" y="1577340"/>
+            <a:ext cx="11180064" cy="3608832"/>
+          </a:xfrm>
+          <a:prstGeom prst="rect">
+            <a:avLst/>
+          </a:prstGeom>
+        </p:spPr>
+      </p:pic>
       <p:sp>
         <p:nvSpPr>
           <p:cNvPr id="6" name="TextBox 5"/>
@@ -17074,8 +16144,8 @@
         </p:nvSpPr>
         <p:spPr>
           <a:xfrm>
-            <a:off x="502920" y="5532120"/>
-            <a:ext cx="11183112" cy="457199"/>
+            <a:off x="502920" y="5277612"/>
+            <a:ext cx="11183112" cy="711708"/>
           </a:xfrm>
           <a:prstGeom prst="rect">
             <a:avLst/>

--- a/HCCJP_71/AI時代の「本当の」ハイブリッドクラウド — エージェントが実現した、あの頃の夢.pptx
+++ b/HCCJP_71/AI時代の「本当の」ハイブリッドクラウド — エージェントが実現した、あの頃の夢.pptx
@@ -6222,7 +6222,7 @@
         <p:spPr>
           <a:xfrm>
             <a:off x="504444" y="1577340"/>
-            <a:ext cx="11180064" cy="2767584"/>
+            <a:ext cx="11180064" cy="2205990"/>
           </a:xfrm>
           <a:prstGeom prst="rect">
             <a:avLst/>
@@ -6237,8 +6237,8 @@
         </p:nvSpPr>
         <p:spPr>
           <a:xfrm>
-            <a:off x="502920" y="4436364"/>
-            <a:ext cx="11183112" cy="1552956"/>
+            <a:off x="502920" y="3874770"/>
+            <a:ext cx="11183112" cy="2114550"/>
           </a:xfrm>
           <a:prstGeom prst="rect">
             <a:avLst/>
@@ -6597,7 +6597,7 @@
         <p:spPr>
           <a:xfrm>
             <a:off x="504444" y="1577340"/>
-            <a:ext cx="11180064" cy="4169663"/>
+            <a:ext cx="11180064" cy="3497580"/>
           </a:xfrm>
           <a:prstGeom prst="rect">
             <a:avLst/>
@@ -6607,6 +6607,183 @@
       <p:sp>
         <p:nvSpPr>
           <p:cNvPr id="6" name="TextBox 5"/>
+          <p:cNvSpPr txBox="1"/>
+          <p:nvPr/>
+        </p:nvSpPr>
+        <p:spPr>
+          <a:xfrm>
+            <a:off x="502920" y="5166360"/>
+            <a:ext cx="11183112" cy="822959"/>
+          </a:xfrm>
+          <a:prstGeom prst="rect">
+            <a:avLst/>
+          </a:prstGeom>
+          <a:noFill/>
+        </p:spPr>
+        <p:txBody>
+          <a:bodyPr wrap="square">
+            <a:normAutofit/>
+          </a:bodyPr>
+          <a:lstStyle/>
+          <a:p>
+            <a:pPr>
+              <a:spcAft>
+                <a:spcPts val="300"/>
+              </a:spcAft>
+            </a:pPr>
+            <a:r>
+              <a:rPr sz="1400">
+                <a:solidFill>
+                  <a:srgbClr val="323130"/>
+                </a:solidFill>
+                <a:latin typeface="Meiryo"/>
+                <a:ea typeface="Meiryo"/>
+              </a:rPr>
+              <a:t>• </a:t>
+            </a:r>
+            <a:r>
+              <a:rPr sz="1400" b="1">
+                <a:solidFill>
+                  <a:srgbClr val="323130"/>
+                </a:solidFill>
+                <a:latin typeface="Meiryo"/>
+                <a:ea typeface="Meiryo"/>
+              </a:rPr>
+              <a:t>モデル</a:t>
+            </a:r>
+            <a:r>
+              <a:rPr sz="1400">
+                <a:solidFill>
+                  <a:srgbClr val="323130"/>
+                </a:solidFill>
+                <a:latin typeface="Meiryo"/>
+                <a:ea typeface="Meiryo"/>
+              </a:rPr>
+              <a:t> </a:t>
+            </a:r>
+            <a:r>
+              <a:rPr sz="1100" b="1">
+                <a:solidFill>
+                  <a:srgbClr val="1565C0"/>
+                </a:solidFill>
+                <a:latin typeface="Meiryo"/>
+                <a:ea typeface="Meiryo"/>
+              </a:rPr>
+              <a:t>クラウド基盤</a:t>
+            </a:r>
+            <a:r>
+              <a:rPr sz="1400">
+                <a:solidFill>
+                  <a:srgbClr val="323130"/>
+                </a:solidFill>
+                <a:latin typeface="Meiryo"/>
+                <a:ea typeface="Meiryo"/>
+              </a:rPr>
+              <a:t> / </a:t>
+            </a:r>
+            <a:r>
+              <a:rPr sz="1400" b="1">
+                <a:solidFill>
+                  <a:srgbClr val="323130"/>
+                </a:solidFill>
+                <a:latin typeface="Meiryo"/>
+                <a:ea typeface="Meiryo"/>
+              </a:rPr>
+              <a:t>エージェントソフト</a:t>
+            </a:r>
+            <a:r>
+              <a:rPr sz="1400">
+                <a:solidFill>
+                  <a:srgbClr val="323130"/>
+                </a:solidFill>
+                <a:latin typeface="Meiryo"/>
+                <a:ea typeface="Meiryo"/>
+              </a:rPr>
+              <a:t> </a:t>
+            </a:r>
+            <a:r>
+              <a:rPr sz="1100" b="1">
+                <a:solidFill>
+                  <a:srgbClr val="1565C0"/>
+                </a:solidFill>
+                <a:latin typeface="Meiryo"/>
+                <a:ea typeface="Meiryo"/>
+              </a:rPr>
+              <a:t>クラウド基盤</a:t>
+            </a:r>
+            <a:r>
+              <a:rPr sz="1400">
+                <a:solidFill>
+                  <a:srgbClr val="323130"/>
+                </a:solidFill>
+                <a:latin typeface="Meiryo"/>
+                <a:ea typeface="Meiryo"/>
+              </a:rPr>
+              <a:t> / </a:t>
+            </a:r>
+            <a:r>
+              <a:rPr sz="1400" b="1">
+                <a:solidFill>
+                  <a:srgbClr val="323130"/>
+                </a:solidFill>
+                <a:latin typeface="Meiryo"/>
+                <a:ea typeface="Meiryo"/>
+              </a:rPr>
+              <a:t>コンテキスト</a:t>
+            </a:r>
+            <a:r>
+              <a:rPr sz="1400">
+                <a:solidFill>
+                  <a:srgbClr val="323130"/>
+                </a:solidFill>
+                <a:latin typeface="Meiryo"/>
+                <a:ea typeface="Meiryo"/>
+              </a:rPr>
+              <a:t> </a:t>
+            </a:r>
+            <a:r>
+              <a:rPr sz="1100" b="1">
+                <a:solidFill>
+                  <a:srgbClr val="1565C0"/>
+                </a:solidFill>
+                <a:latin typeface="Meiryo"/>
+                <a:ea typeface="Meiryo"/>
+              </a:rPr>
+              <a:t>クラウド基盤</a:t>
+            </a:r>
+          </a:p>
+          <a:p>
+            <a:pPr>
+              <a:spcAft>
+                <a:spcPts val="300"/>
+              </a:spcAft>
+            </a:pPr>
+            <a:r>
+              <a:rPr sz="1400">
+                <a:solidFill>
+                  <a:srgbClr val="323130"/>
+                </a:solidFill>
+                <a:latin typeface="Meiryo"/>
+                <a:ea typeface="Meiryo"/>
+              </a:rPr>
+              <a:t>• → </a:t>
+            </a:r>
+            <a:r>
+              <a:rPr sz="1400" b="1">
+                <a:solidFill>
+                  <a:srgbClr val="323130"/>
+                </a:solidFill>
+                <a:latin typeface="Meiryo"/>
+                <a:ea typeface="Meiryo"/>
+              </a:rPr>
+              <a:t>すべてクラウド基盤。自前で構築・管理する典型的なエンタープライズ構成</a:t>
+            </a:r>
+          </a:p>
+        </p:txBody>
+      </p:sp>
+      <p:sp>
+        <p:nvSpPr>
+          <p:cNvPr id="7" name="TextBox 6"/>
           <p:cNvSpPr txBox="1"/>
           <p:nvPr/>
         </p:nvSpPr>
@@ -6795,7 +6972,7 @@
         <p:spPr>
           <a:xfrm>
             <a:off x="504444" y="1577340"/>
-            <a:ext cx="11180064" cy="4169663"/>
+            <a:ext cx="11180064" cy="3497580"/>
           </a:xfrm>
           <a:prstGeom prst="rect">
             <a:avLst/>
@@ -6805,6 +6982,183 @@
       <p:sp>
         <p:nvSpPr>
           <p:cNvPr id="6" name="TextBox 5"/>
+          <p:cNvSpPr txBox="1"/>
+          <p:nvPr/>
+        </p:nvSpPr>
+        <p:spPr>
+          <a:xfrm>
+            <a:off x="502920" y="5166360"/>
+            <a:ext cx="11183112" cy="822959"/>
+          </a:xfrm>
+          <a:prstGeom prst="rect">
+            <a:avLst/>
+          </a:prstGeom>
+          <a:noFill/>
+        </p:spPr>
+        <p:txBody>
+          <a:bodyPr wrap="square">
+            <a:normAutofit/>
+          </a:bodyPr>
+          <a:lstStyle/>
+          <a:p>
+            <a:pPr>
+              <a:spcAft>
+                <a:spcPts val="300"/>
+              </a:spcAft>
+            </a:pPr>
+            <a:r>
+              <a:rPr sz="1400">
+                <a:solidFill>
+                  <a:srgbClr val="323130"/>
+                </a:solidFill>
+                <a:latin typeface="Meiryo"/>
+                <a:ea typeface="Meiryo"/>
+              </a:rPr>
+              <a:t>• </a:t>
+            </a:r>
+            <a:r>
+              <a:rPr sz="1400" b="1">
+                <a:solidFill>
+                  <a:srgbClr val="323130"/>
+                </a:solidFill>
+                <a:latin typeface="Meiryo"/>
+                <a:ea typeface="Meiryo"/>
+              </a:rPr>
+              <a:t>モデル</a:t>
+            </a:r>
+            <a:r>
+              <a:rPr sz="1400">
+                <a:solidFill>
+                  <a:srgbClr val="323130"/>
+                </a:solidFill>
+                <a:latin typeface="Meiryo"/>
+                <a:ea typeface="Meiryo"/>
+              </a:rPr>
+              <a:t> </a:t>
+            </a:r>
+            <a:r>
+              <a:rPr sz="1100" b="1">
+                <a:solidFill>
+                  <a:srgbClr val="2E7D32"/>
+                </a:solidFill>
+                <a:latin typeface="Meiryo"/>
+                <a:ea typeface="Meiryo"/>
+              </a:rPr>
+              <a:t>オンプレ</a:t>
+            </a:r>
+            <a:r>
+              <a:rPr sz="1400">
+                <a:solidFill>
+                  <a:srgbClr val="323130"/>
+                </a:solidFill>
+                <a:latin typeface="Meiryo"/>
+                <a:ea typeface="Meiryo"/>
+              </a:rPr>
+              <a:t> / </a:t>
+            </a:r>
+            <a:r>
+              <a:rPr sz="1400" b="1">
+                <a:solidFill>
+                  <a:srgbClr val="323130"/>
+                </a:solidFill>
+                <a:latin typeface="Meiryo"/>
+                <a:ea typeface="Meiryo"/>
+              </a:rPr>
+              <a:t>エージェントソフト</a:t>
+            </a:r>
+            <a:r>
+              <a:rPr sz="1400">
+                <a:solidFill>
+                  <a:srgbClr val="323130"/>
+                </a:solidFill>
+                <a:latin typeface="Meiryo"/>
+                <a:ea typeface="Meiryo"/>
+              </a:rPr>
+              <a:t> </a:t>
+            </a:r>
+            <a:r>
+              <a:rPr sz="1100" b="1">
+                <a:solidFill>
+                  <a:srgbClr val="2E7D32"/>
+                </a:solidFill>
+                <a:latin typeface="Meiryo"/>
+                <a:ea typeface="Meiryo"/>
+              </a:rPr>
+              <a:t>オンプレ</a:t>
+            </a:r>
+            <a:r>
+              <a:rPr sz="1400">
+                <a:solidFill>
+                  <a:srgbClr val="323130"/>
+                </a:solidFill>
+                <a:latin typeface="Meiryo"/>
+                <a:ea typeface="Meiryo"/>
+              </a:rPr>
+              <a:t> / </a:t>
+            </a:r>
+            <a:r>
+              <a:rPr sz="1400" b="1">
+                <a:solidFill>
+                  <a:srgbClr val="323130"/>
+                </a:solidFill>
+                <a:latin typeface="Meiryo"/>
+                <a:ea typeface="Meiryo"/>
+              </a:rPr>
+              <a:t>コンテキスト</a:t>
+            </a:r>
+            <a:r>
+              <a:rPr sz="1400">
+                <a:solidFill>
+                  <a:srgbClr val="323130"/>
+                </a:solidFill>
+                <a:latin typeface="Meiryo"/>
+                <a:ea typeface="Meiryo"/>
+              </a:rPr>
+              <a:t> </a:t>
+            </a:r>
+            <a:r>
+              <a:rPr sz="1100" b="1">
+                <a:solidFill>
+                  <a:srgbClr val="2E7D32"/>
+                </a:solidFill>
+                <a:latin typeface="Meiryo"/>
+                <a:ea typeface="Meiryo"/>
+              </a:rPr>
+              <a:t>オンプレ</a:t>
+            </a:r>
+          </a:p>
+          <a:p>
+            <a:pPr>
+              <a:spcAft>
+                <a:spcPts val="300"/>
+              </a:spcAft>
+            </a:pPr>
+            <a:r>
+              <a:rPr sz="1400">
+                <a:solidFill>
+                  <a:srgbClr val="323130"/>
+                </a:solidFill>
+                <a:latin typeface="Meiryo"/>
+                <a:ea typeface="Meiryo"/>
+              </a:rPr>
+              <a:t>• → </a:t>
+            </a:r>
+            <a:r>
+              <a:rPr sz="1400" b="1">
+                <a:solidFill>
+                  <a:srgbClr val="323130"/>
+                </a:solidFill>
+                <a:latin typeface="Meiryo"/>
+                <a:ea typeface="Meiryo"/>
+              </a:rPr>
+              <a:t>すべてオンプレ。データを外に出せない要件がある場合の構成</a:t>
+            </a:r>
+          </a:p>
+        </p:txBody>
+      </p:sp>
+      <p:sp>
+        <p:nvSpPr>
+          <p:cNvPr id="7" name="TextBox 6"/>
           <p:cNvSpPr txBox="1"/>
           <p:nvPr/>
         </p:nvSpPr>
@@ -6993,7 +7347,7 @@
         <p:spPr>
           <a:xfrm>
             <a:off x="504444" y="1577340"/>
-            <a:ext cx="11180064" cy="3608832"/>
+            <a:ext cx="11180064" cy="3169920"/>
           </a:xfrm>
           <a:prstGeom prst="rect">
             <a:avLst/>
@@ -7008,8 +7362,8 @@
         </p:nvSpPr>
         <p:spPr>
           <a:xfrm>
-            <a:off x="502920" y="5277612"/>
-            <a:ext cx="11183112" cy="711708"/>
+            <a:off x="502920" y="4838699"/>
+            <a:ext cx="11183112" cy="1150620"/>
           </a:xfrm>
           <a:prstGeom prst="rect">
             <a:avLst/>
@@ -7024,11 +7378,11 @@
           <a:p>
             <a:pPr>
               <a:spcAft>
-                <a:spcPts val="500"/>
+                <a:spcPts val="300"/>
               </a:spcAft>
             </a:pPr>
             <a:r>
-              <a:rPr sz="2100">
+              <a:rPr sz="1400">
                 <a:solidFill>
                   <a:srgbClr val="323130"/>
                 </a:solidFill>
@@ -7038,7 +7392,7 @@
               <a:t>• </a:t>
             </a:r>
             <a:r>
-              <a:rPr sz="2100" b="1">
+              <a:rPr sz="1400" b="1">
                 <a:solidFill>
                   <a:srgbClr val="323130"/>
                 </a:solidFill>
@@ -7048,7 +7402,7 @@
               <a:t>モデル</a:t>
             </a:r>
             <a:r>
-              <a:rPr sz="2100">
+              <a:rPr sz="1400">
                 <a:solidFill>
                   <a:srgbClr val="323130"/>
                 </a:solidFill>
@@ -7058,7 +7412,7 @@
               <a:t> </a:t>
             </a:r>
             <a:r>
-              <a:rPr sz="1700" b="1">
+              <a:rPr sz="1100" b="1">
                 <a:solidFill>
                   <a:srgbClr val="C62828"/>
                 </a:solidFill>
@@ -7068,7 +7422,7 @@
               <a:t>SaaS</a:t>
             </a:r>
             <a:r>
-              <a:rPr sz="2100">
+              <a:rPr sz="1400">
                 <a:solidFill>
                   <a:srgbClr val="323130"/>
                 </a:solidFill>
@@ -7081,11 +7435,11 @@
           <a:p>
             <a:pPr>
               <a:spcAft>
-                <a:spcPts val="500"/>
+                <a:spcPts val="300"/>
               </a:spcAft>
             </a:pPr>
             <a:r>
-              <a:rPr sz="2100">
+              <a:rPr sz="1400">
                 <a:solidFill>
                   <a:srgbClr val="323130"/>
                 </a:solidFill>
@@ -7095,7 +7449,7 @@
               <a:t>• </a:t>
             </a:r>
             <a:r>
-              <a:rPr sz="2100" b="1">
+              <a:rPr sz="1400" b="1">
                 <a:solidFill>
                   <a:srgbClr val="323130"/>
                 </a:solidFill>
@@ -7105,7 +7459,7 @@
               <a:t>エージェントソフト</a:t>
             </a:r>
             <a:r>
-              <a:rPr sz="2100">
+              <a:rPr sz="1400">
                 <a:solidFill>
                   <a:srgbClr val="323130"/>
                 </a:solidFill>
@@ -7115,7 +7469,7 @@
               <a:t> </a:t>
             </a:r>
             <a:r>
-              <a:rPr sz="1700" b="1">
+              <a:rPr sz="1100" b="1">
                 <a:solidFill>
                   <a:srgbClr val="2E7D32"/>
                 </a:solidFill>
@@ -7125,7 +7479,7 @@
               <a:t>オンプレ</a:t>
             </a:r>
             <a:r>
-              <a:rPr sz="2100">
+              <a:rPr sz="1400">
                 <a:solidFill>
                   <a:srgbClr val="323130"/>
                 </a:solidFill>
@@ -7138,11 +7492,11 @@
           <a:p>
             <a:pPr>
               <a:spcAft>
-                <a:spcPts val="500"/>
+                <a:spcPts val="300"/>
               </a:spcAft>
             </a:pPr>
             <a:r>
-              <a:rPr sz="2100">
+              <a:rPr sz="1400">
                 <a:solidFill>
                   <a:srgbClr val="323130"/>
                 </a:solidFill>
@@ -7152,7 +7506,7 @@
               <a:t>• </a:t>
             </a:r>
             <a:r>
-              <a:rPr sz="2100" b="1">
+              <a:rPr sz="1400" b="1">
                 <a:solidFill>
                   <a:srgbClr val="323130"/>
                 </a:solidFill>
@@ -7162,7 +7516,7 @@
               <a:t>コンテキスト</a:t>
             </a:r>
             <a:r>
-              <a:rPr sz="2100">
+              <a:rPr sz="1400">
                 <a:solidFill>
                   <a:srgbClr val="323130"/>
                 </a:solidFill>
@@ -7172,7 +7526,7 @@
               <a:t> </a:t>
             </a:r>
             <a:r>
-              <a:rPr sz="1700" b="1">
+              <a:rPr sz="1100" b="1">
                 <a:solidFill>
                   <a:srgbClr val="2E7D32"/>
                 </a:solidFill>
@@ -7182,7 +7536,7 @@
               <a:t>オンプレ</a:t>
             </a:r>
             <a:r>
-              <a:rPr sz="2100">
+              <a:rPr sz="1400">
                 <a:solidFill>
                   <a:srgbClr val="323130"/>
                 </a:solidFill>
@@ -7192,7 +7546,7 @@
               <a:t> ソースコード等 + </a:t>
             </a:r>
             <a:r>
-              <a:rPr sz="1700" b="1">
+              <a:rPr sz="1100" b="1">
                 <a:solidFill>
                   <a:srgbClr val="C62828"/>
                 </a:solidFill>
@@ -7202,7 +7556,7 @@
               <a:t>SaaS</a:t>
             </a:r>
             <a:r>
-              <a:rPr sz="2100">
+              <a:rPr sz="1400">
                 <a:solidFill>
                   <a:srgbClr val="323130"/>
                 </a:solidFill>
@@ -7405,7 +7759,7 @@
         <p:spPr>
           <a:xfrm>
             <a:off x="504444" y="1577340"/>
-            <a:ext cx="11180064" cy="3889247"/>
+            <a:ext cx="11180064" cy="2859024"/>
           </a:xfrm>
           <a:prstGeom prst="rect">
             <a:avLst/>
@@ -7420,8 +7774,8 @@
         </p:nvSpPr>
         <p:spPr>
           <a:xfrm>
-            <a:off x="502920" y="5558028"/>
-            <a:ext cx="11183112" cy="431292"/>
+            <a:off x="502920" y="4527804"/>
+            <a:ext cx="11183112" cy="1461516"/>
           </a:xfrm>
           <a:prstGeom prst="rect">
             <a:avLst/>
@@ -7436,11 +7790,11 @@
           <a:p>
             <a:pPr>
               <a:spcAft>
-                <a:spcPts val="400"/>
+                <a:spcPts val="300"/>
               </a:spcAft>
             </a:pPr>
             <a:r>
-              <a:rPr sz="1800">
+              <a:rPr sz="1400">
                 <a:solidFill>
                   <a:srgbClr val="323130"/>
                 </a:solidFill>
@@ -7450,7 +7804,7 @@
               <a:t>• </a:t>
             </a:r>
             <a:r>
-              <a:rPr sz="1800" b="1">
+              <a:rPr sz="1400" b="1">
                 <a:solidFill>
                   <a:srgbClr val="323130"/>
                 </a:solidFill>
@@ -7460,7 +7814,7 @@
               <a:t>モデル</a:t>
             </a:r>
             <a:r>
-              <a:rPr sz="1800">
+              <a:rPr sz="1400">
                 <a:solidFill>
                   <a:srgbClr val="323130"/>
                 </a:solidFill>
@@ -7470,7 +7824,7 @@
               <a:t> </a:t>
             </a:r>
             <a:r>
-              <a:rPr sz="1500" b="1">
+              <a:rPr sz="1100" b="1">
                 <a:solidFill>
                   <a:srgbClr val="C62828"/>
                 </a:solidFill>
@@ -7480,7 +7834,7 @@
               <a:t>SaaS</a:t>
             </a:r>
             <a:r>
-              <a:rPr sz="1800">
+              <a:rPr sz="1400">
                 <a:solidFill>
                   <a:srgbClr val="323130"/>
                 </a:solidFill>
@@ -7493,11 +7847,11 @@
           <a:p>
             <a:pPr>
               <a:spcAft>
-                <a:spcPts val="400"/>
+                <a:spcPts val="300"/>
               </a:spcAft>
             </a:pPr>
             <a:r>
-              <a:rPr sz="1800">
+              <a:rPr sz="1400">
                 <a:solidFill>
                   <a:srgbClr val="323130"/>
                 </a:solidFill>
@@ -7507,7 +7861,7 @@
               <a:t>• </a:t>
             </a:r>
             <a:r>
-              <a:rPr sz="1800" b="1">
+              <a:rPr sz="1400" b="1">
                 <a:solidFill>
                   <a:srgbClr val="323130"/>
                 </a:solidFill>
@@ -7517,7 +7871,7 @@
               <a:t>エージェントソフト</a:t>
             </a:r>
             <a:r>
-              <a:rPr sz="1800">
+              <a:rPr sz="1400">
                 <a:solidFill>
                   <a:srgbClr val="323130"/>
                 </a:solidFill>
@@ -7527,7 +7881,7 @@
               <a:t> </a:t>
             </a:r>
             <a:r>
-              <a:rPr sz="1500" b="1">
+              <a:rPr sz="1100" b="1">
                 <a:solidFill>
                   <a:srgbClr val="2E7D32"/>
                 </a:solidFill>
@@ -7537,7 +7891,7 @@
               <a:t>オンプレ</a:t>
             </a:r>
             <a:r>
-              <a:rPr sz="1800">
+              <a:rPr sz="1400">
                 <a:solidFill>
                   <a:srgbClr val="323130"/>
                 </a:solidFill>
@@ -7550,11 +7904,11 @@
           <a:p>
             <a:pPr>
               <a:spcAft>
-                <a:spcPts val="400"/>
+                <a:spcPts val="300"/>
               </a:spcAft>
             </a:pPr>
             <a:r>
-              <a:rPr sz="1800">
+              <a:rPr sz="1400">
                 <a:solidFill>
                   <a:srgbClr val="323130"/>
                 </a:solidFill>
@@ -7564,7 +7918,7 @@
               <a:t>• </a:t>
             </a:r>
             <a:r>
-              <a:rPr sz="1800" b="1">
+              <a:rPr sz="1400" b="1">
                 <a:solidFill>
                   <a:srgbClr val="323130"/>
                 </a:solidFill>
@@ -7574,7 +7928,7 @@
               <a:t>コンテキスト</a:t>
             </a:r>
             <a:r>
-              <a:rPr sz="1800">
+              <a:rPr sz="1400">
                 <a:solidFill>
                   <a:srgbClr val="323130"/>
                 </a:solidFill>
@@ -7584,7 +7938,7 @@
               <a:t> </a:t>
             </a:r>
             <a:r>
-              <a:rPr sz="1500" b="1">
+              <a:rPr sz="1100" b="1">
                 <a:solidFill>
                   <a:srgbClr val="2E7D32"/>
                 </a:solidFill>
@@ -7594,7 +7948,7 @@
               <a:t>オンプレ</a:t>
             </a:r>
             <a:r>
-              <a:rPr sz="1800">
+              <a:rPr sz="1400">
                 <a:solidFill>
                   <a:srgbClr val="323130"/>
                 </a:solidFill>
@@ -7604,7 +7958,7 @@
               <a:t> CLAUDE.md, Obsidian等 + </a:t>
             </a:r>
             <a:r>
-              <a:rPr sz="1500" b="1">
+              <a:rPr sz="1100" b="1">
                 <a:solidFill>
                   <a:srgbClr val="C62828"/>
                 </a:solidFill>
@@ -7614,7 +7968,7 @@
               <a:t>SaaS</a:t>
             </a:r>
             <a:r>
-              <a:rPr sz="1800">
+              <a:rPr sz="1400">
                 <a:solidFill>
                   <a:srgbClr val="323130"/>
                 </a:solidFill>
@@ -7627,11 +7981,11 @@
           <a:p>
             <a:pPr>
               <a:spcAft>
-                <a:spcPts val="400"/>
+                <a:spcPts val="300"/>
               </a:spcAft>
             </a:pPr>
             <a:r>
-              <a:rPr sz="1800">
+              <a:rPr sz="1400">
                 <a:solidFill>
                   <a:srgbClr val="323130"/>
                 </a:solidFill>
@@ -7834,7 +8188,7 @@
         <p:spPr>
           <a:xfrm>
             <a:off x="504444" y="2194560"/>
-            <a:ext cx="11180064" cy="3794759"/>
+            <a:ext cx="11180064" cy="2578099"/>
           </a:xfrm>
           <a:prstGeom prst="rect">
             <a:avLst/>
@@ -7844,6 +8198,220 @@
       <p:sp>
         <p:nvSpPr>
           <p:cNvPr id="6" name="TextBox 5"/>
+          <p:cNvSpPr txBox="1"/>
+          <p:nvPr/>
+        </p:nvSpPr>
+        <p:spPr>
+          <a:xfrm>
+            <a:off x="502920" y="4864099"/>
+            <a:ext cx="11183112" cy="1125220"/>
+          </a:xfrm>
+          <a:prstGeom prst="rect">
+            <a:avLst/>
+          </a:prstGeom>
+          <a:noFill/>
+        </p:spPr>
+        <p:txBody>
+          <a:bodyPr wrap="square">
+            <a:normAutofit/>
+          </a:bodyPr>
+          <a:lstStyle/>
+          <a:p>
+            <a:pPr>
+              <a:spcAft>
+                <a:spcPts val="300"/>
+              </a:spcAft>
+            </a:pPr>
+            <a:r>
+              <a:rPr sz="1400">
+                <a:solidFill>
+                  <a:srgbClr val="323130"/>
+                </a:solidFill>
+                <a:latin typeface="Meiryo"/>
+                <a:ea typeface="Meiryo"/>
+              </a:rPr>
+              <a:t>• </a:t>
+            </a:r>
+            <a:r>
+              <a:rPr sz="1400" b="1">
+                <a:solidFill>
+                  <a:srgbClr val="323130"/>
+                </a:solidFill>
+                <a:latin typeface="Meiryo"/>
+                <a:ea typeface="Meiryo"/>
+              </a:rPr>
+              <a:t>モデル</a:t>
+            </a:r>
+            <a:r>
+              <a:rPr sz="1400">
+                <a:solidFill>
+                  <a:srgbClr val="323130"/>
+                </a:solidFill>
+                <a:latin typeface="Meiryo"/>
+                <a:ea typeface="Meiryo"/>
+              </a:rPr>
+              <a:t> </a:t>
+            </a:r>
+            <a:r>
+              <a:rPr sz="1100" b="1">
+                <a:solidFill>
+                  <a:srgbClr val="2E7D32"/>
+                </a:solidFill>
+                <a:latin typeface="Meiryo"/>
+                <a:ea typeface="Meiryo"/>
+              </a:rPr>
+              <a:t>オンプレ</a:t>
+            </a:r>
+            <a:r>
+              <a:rPr sz="1400">
+                <a:solidFill>
+                  <a:srgbClr val="323130"/>
+                </a:solidFill>
+                <a:latin typeface="Meiryo"/>
+                <a:ea typeface="Meiryo"/>
+              </a:rPr>
+              <a:t> DGX Spark + </a:t>
+            </a:r>
+            <a:r>
+              <a:rPr sz="1100" b="1">
+                <a:solidFill>
+                  <a:srgbClr val="1565C0"/>
+                </a:solidFill>
+                <a:latin typeface="Meiryo"/>
+                <a:ea typeface="Meiryo"/>
+              </a:rPr>
+              <a:t>クラウド基盤</a:t>
+            </a:r>
+            <a:r>
+              <a:rPr sz="1400">
+                <a:solidFill>
+                  <a:srgbClr val="323130"/>
+                </a:solidFill>
+                <a:latin typeface="Meiryo"/>
+                <a:ea typeface="Meiryo"/>
+              </a:rPr>
+              <a:t> Microsoft Foundry（フォールバック）</a:t>
+            </a:r>
+          </a:p>
+          <a:p>
+            <a:pPr>
+              <a:spcAft>
+                <a:spcPts val="300"/>
+              </a:spcAft>
+            </a:pPr>
+            <a:r>
+              <a:rPr sz="1400">
+                <a:solidFill>
+                  <a:srgbClr val="323130"/>
+                </a:solidFill>
+                <a:latin typeface="Meiryo"/>
+                <a:ea typeface="Meiryo"/>
+              </a:rPr>
+              <a:t>• </a:t>
+            </a:r>
+            <a:r>
+              <a:rPr sz="1400" b="1">
+                <a:solidFill>
+                  <a:srgbClr val="323130"/>
+                </a:solidFill>
+                <a:latin typeface="Meiryo"/>
+                <a:ea typeface="Meiryo"/>
+              </a:rPr>
+              <a:t>エージェントソフト</a:t>
+            </a:r>
+            <a:r>
+              <a:rPr sz="1400">
+                <a:solidFill>
+                  <a:srgbClr val="323130"/>
+                </a:solidFill>
+                <a:latin typeface="Meiryo"/>
+                <a:ea typeface="Meiryo"/>
+              </a:rPr>
+              <a:t> </a:t>
+            </a:r>
+            <a:r>
+              <a:rPr sz="1100" b="1">
+                <a:solidFill>
+                  <a:srgbClr val="1565C0"/>
+                </a:solidFill>
+                <a:latin typeface="Meiryo"/>
+                <a:ea typeface="Meiryo"/>
+              </a:rPr>
+              <a:t>クラウド基盤</a:t>
+            </a:r>
+            <a:r>
+              <a:rPr sz="1400">
+                <a:solidFill>
+                  <a:srgbClr val="323130"/>
+                </a:solidFill>
+                <a:latin typeface="Meiryo"/>
+                <a:ea typeface="Meiryo"/>
+              </a:rPr>
+              <a:t> 自作（Azure Agent SDK on App Service）</a:t>
+            </a:r>
+          </a:p>
+          <a:p>
+            <a:pPr>
+              <a:spcAft>
+                <a:spcPts val="300"/>
+              </a:spcAft>
+            </a:pPr>
+            <a:r>
+              <a:rPr sz="1400">
+                <a:solidFill>
+                  <a:srgbClr val="323130"/>
+                </a:solidFill>
+                <a:latin typeface="Meiryo"/>
+                <a:ea typeface="Meiryo"/>
+              </a:rPr>
+              <a:t>• </a:t>
+            </a:r>
+            <a:r>
+              <a:rPr sz="1400" b="1">
+                <a:solidFill>
+                  <a:srgbClr val="323130"/>
+                </a:solidFill>
+                <a:latin typeface="Meiryo"/>
+                <a:ea typeface="Meiryo"/>
+              </a:rPr>
+              <a:t>コンテキスト</a:t>
+            </a:r>
+            <a:r>
+              <a:rPr sz="1400">
+                <a:solidFill>
+                  <a:srgbClr val="323130"/>
+                </a:solidFill>
+                <a:latin typeface="Meiryo"/>
+                <a:ea typeface="Meiryo"/>
+              </a:rPr>
+              <a:t> </a:t>
+            </a:r>
+            <a:r>
+              <a:rPr sz="1100" b="1">
+                <a:solidFill>
+                  <a:srgbClr val="C62828"/>
+                </a:solidFill>
+                <a:latin typeface="Meiryo"/>
+                <a:ea typeface="Meiryo"/>
+              </a:rPr>
+              <a:t>SaaS</a:t>
+            </a:r>
+            <a:r>
+              <a:rPr sz="1400">
+                <a:solidFill>
+                  <a:srgbClr val="323130"/>
+                </a:solidFill>
+                <a:latin typeface="Meiryo"/>
+                <a:ea typeface="Meiryo"/>
+              </a:rPr>
+              <a:t> SharePoint内の社内ドキュメント</a:t>
+            </a:r>
+          </a:p>
+        </p:txBody>
+      </p:sp>
+      <p:sp>
+        <p:nvSpPr>
+          <p:cNvPr id="7" name="TextBox 6"/>
           <p:cNvSpPr txBox="1"/>
           <p:nvPr/>
         </p:nvSpPr>
@@ -8599,7 +9167,7 @@
         <p:spPr>
           <a:xfrm>
             <a:off x="502920" y="1577340"/>
-            <a:ext cx="11183112" cy="951992"/>
+            <a:ext cx="11183112" cy="823976"/>
           </a:xfrm>
           <a:prstGeom prst="rect">
             <a:avLst/>
@@ -8614,11 +9182,11 @@
           <a:p>
             <a:pPr>
               <a:spcAft>
-                <a:spcPts val="600"/>
+                <a:spcPts val="400"/>
               </a:spcAft>
             </a:pPr>
             <a:r>
-              <a:rPr sz="2000" b="1">
+              <a:rPr sz="1600" b="1">
                 <a:solidFill>
                   <a:srgbClr val="0078D4"/>
                 </a:solidFill>
@@ -8646,8 +9214,8 @@
         </p:blipFill>
         <p:spPr>
           <a:xfrm>
-            <a:off x="504444" y="2620772"/>
-            <a:ext cx="11180064" cy="2767584"/>
+            <a:off x="504444" y="2492756"/>
+            <a:ext cx="11180064" cy="1977644"/>
           </a:xfrm>
           <a:prstGeom prst="rect">
             <a:avLst/>
@@ -8662,8 +9230,8 @@
         </p:nvSpPr>
         <p:spPr>
           <a:xfrm>
-            <a:off x="502920" y="5479796"/>
-            <a:ext cx="11183112" cy="509524"/>
+            <a:off x="502920" y="4561840"/>
+            <a:ext cx="11183112" cy="1427479"/>
           </a:xfrm>
           <a:prstGeom prst="rect">
             <a:avLst/>
@@ -8678,11 +9246,11 @@
           <a:p>
             <a:pPr>
               <a:spcAft>
-                <a:spcPts val="400"/>
+                <a:spcPts val="300"/>
               </a:spcAft>
             </a:pPr>
             <a:r>
-              <a:rPr sz="1800">
+              <a:rPr sz="1400">
                 <a:solidFill>
                   <a:srgbClr val="323130"/>
                 </a:solidFill>
@@ -8692,7 +9260,7 @@
               <a:t>• </a:t>
             </a:r>
             <a:r>
-              <a:rPr sz="1500">
+              <a:rPr sz="1100">
                 <a:solidFill>
                   <a:srgbClr val="C7254E"/>
                 </a:solidFill>
@@ -8702,7 +9270,7 @@
               <a:t>claude remote-control</a:t>
             </a:r>
             <a:r>
-              <a:rPr sz="1800">
+              <a:rPr sz="1400">
                 <a:solidFill>
                   <a:srgbClr val="323130"/>
                 </a:solidFill>
@@ -8712,7 +9280,7 @@
               <a:t> または </a:t>
             </a:r>
             <a:r>
-              <a:rPr sz="1500">
+              <a:rPr sz="1100">
                 <a:solidFill>
                   <a:srgbClr val="C7254E"/>
                 </a:solidFill>
@@ -8722,7 +9290,7 @@
               <a:t>/rc</a:t>
             </a:r>
             <a:r>
-              <a:rPr sz="1800">
+              <a:rPr sz="1400">
                 <a:solidFill>
                   <a:srgbClr val="323130"/>
                 </a:solidFill>
@@ -8735,11 +9303,11 @@
           <a:p>
             <a:pPr>
               <a:spcAft>
-                <a:spcPts val="400"/>
+                <a:spcPts val="300"/>
               </a:spcAft>
             </a:pPr>
             <a:r>
-              <a:rPr sz="1800">
+              <a:rPr sz="1400">
                 <a:solidFill>
                   <a:srgbClr val="323130"/>
                 </a:solidFill>
@@ -8752,11 +9320,11 @@
           <a:p>
             <a:pPr>
               <a:spcAft>
-                <a:spcPts val="400"/>
+                <a:spcPts val="300"/>
               </a:spcAft>
             </a:pPr>
             <a:r>
-              <a:rPr sz="1800">
+              <a:rPr sz="1400">
                 <a:solidFill>
                   <a:srgbClr val="323130"/>
                 </a:solidFill>
@@ -8766,7 +9334,7 @@
               <a:t>• </a:t>
             </a:r>
             <a:r>
-              <a:rPr sz="1800" b="1">
+              <a:rPr sz="1400" b="1">
                 <a:solidFill>
                   <a:srgbClr val="323130"/>
                 </a:solidFill>
@@ -8776,7 +9344,7 @@
               <a:t>モデル</a:t>
             </a:r>
             <a:r>
-              <a:rPr sz="1800">
+              <a:rPr sz="1400">
                 <a:solidFill>
                   <a:srgbClr val="323130"/>
                 </a:solidFill>
@@ -8786,7 +9354,7 @@
               <a:t> </a:t>
             </a:r>
             <a:r>
-              <a:rPr sz="1500" b="1">
+              <a:rPr sz="1100" b="1">
                 <a:solidFill>
                   <a:srgbClr val="C62828"/>
                 </a:solidFill>
@@ -8796,7 +9364,7 @@
               <a:t>SaaS</a:t>
             </a:r>
             <a:r>
-              <a:rPr sz="1800">
+              <a:rPr sz="1400">
                 <a:solidFill>
                   <a:srgbClr val="323130"/>
                 </a:solidFill>
@@ -8806,7 +9374,7 @@
               <a:t> / </a:t>
             </a:r>
             <a:r>
-              <a:rPr sz="1800" b="1">
+              <a:rPr sz="1400" b="1">
                 <a:solidFill>
                   <a:srgbClr val="323130"/>
                 </a:solidFill>
@@ -8816,7 +9384,7 @@
               <a:t>エージェントソフト</a:t>
             </a:r>
             <a:r>
-              <a:rPr sz="1800">
+              <a:rPr sz="1400">
                 <a:solidFill>
                   <a:srgbClr val="323130"/>
                 </a:solidFill>
@@ -8826,7 +9394,7 @@
               <a:t> </a:t>
             </a:r>
             <a:r>
-              <a:rPr sz="1500" b="1">
+              <a:rPr sz="1100" b="1">
                 <a:solidFill>
                   <a:srgbClr val="2E7D32"/>
                 </a:solidFill>
@@ -8836,7 +9404,7 @@
               <a:t>オンプレ</a:t>
             </a:r>
             <a:r>
-              <a:rPr sz="1800">
+              <a:rPr sz="1400">
                 <a:solidFill>
                   <a:srgbClr val="323130"/>
                 </a:solidFill>
@@ -8846,7 +9414,7 @@
               <a:t> / </a:t>
             </a:r>
             <a:r>
-              <a:rPr sz="1800" b="1">
+              <a:rPr sz="1400" b="1">
                 <a:solidFill>
                   <a:srgbClr val="323130"/>
                 </a:solidFill>
@@ -8856,7 +9424,7 @@
               <a:t>コンテキスト</a:t>
             </a:r>
             <a:r>
-              <a:rPr sz="1800">
+              <a:rPr sz="1400">
                 <a:solidFill>
                   <a:srgbClr val="323130"/>
                 </a:solidFill>
@@ -8866,7 +9434,7 @@
               <a:t> </a:t>
             </a:r>
             <a:r>
-              <a:rPr sz="1500" b="1">
+              <a:rPr sz="1100" b="1">
                 <a:solidFill>
                   <a:srgbClr val="2E7D32"/>
                 </a:solidFill>
@@ -8879,11 +9447,11 @@
           <a:p>
             <a:pPr>
               <a:spcAft>
-                <a:spcPts val="400"/>
+                <a:spcPts val="300"/>
               </a:spcAft>
             </a:pPr>
             <a:r>
-              <a:rPr sz="1800">
+              <a:rPr sz="1400">
                 <a:solidFill>
                   <a:srgbClr val="323130"/>
                 </a:solidFill>
@@ -8893,7 +9461,7 @@
               <a:t>• </a:t>
             </a:r>
             <a:r>
-              <a:rPr sz="1800" b="1">
+              <a:rPr sz="1400" b="1">
                 <a:solidFill>
                   <a:srgbClr val="323130"/>
                 </a:solidFill>
@@ -8903,7 +9471,7 @@
               <a:t>操作UI</a:t>
             </a:r>
             <a:r>
-              <a:rPr sz="1800">
+              <a:rPr sz="1400">
                 <a:solidFill>
                   <a:srgbClr val="323130"/>
                 </a:solidFill>
@@ -8913,7 +9481,7 @@
               <a:t> </a:t>
             </a:r>
             <a:r>
-              <a:rPr sz="1500" b="1">
+              <a:rPr sz="1100" b="1">
                 <a:solidFill>
                   <a:srgbClr val="C62828"/>
                 </a:solidFill>
@@ -8923,7 +9491,7 @@
               <a:t>SaaS</a:t>
             </a:r>
             <a:r>
-              <a:rPr sz="1800">
+              <a:rPr sz="1400">
                 <a:solidFill>
                   <a:srgbClr val="323130"/>
                 </a:solidFill>
@@ -9321,7 +9889,7 @@
         <p:spPr>
           <a:xfrm>
             <a:off x="504444" y="1577340"/>
-            <a:ext cx="11180064" cy="3608832"/>
+            <a:ext cx="11180064" cy="2584704"/>
           </a:xfrm>
           <a:prstGeom prst="rect">
             <a:avLst/>
@@ -9336,8 +9904,8 @@
         </p:nvSpPr>
         <p:spPr>
           <a:xfrm>
-            <a:off x="502920" y="5277612"/>
-            <a:ext cx="11183112" cy="711708"/>
+            <a:off x="502920" y="4253484"/>
+            <a:ext cx="11183112" cy="1735836"/>
           </a:xfrm>
           <a:prstGeom prst="rect">
             <a:avLst/>
@@ -9352,11 +9920,11 @@
           <a:p>
             <a:pPr>
               <a:spcAft>
-                <a:spcPts val="400"/>
+                <a:spcPts val="300"/>
               </a:spcAft>
             </a:pPr>
             <a:r>
-              <a:rPr sz="1700">
+              <a:rPr sz="1400">
                 <a:solidFill>
                   <a:srgbClr val="323130"/>
                 </a:solidFill>
@@ -9366,7 +9934,7 @@
               <a:t>• </a:t>
             </a:r>
             <a:r>
-              <a:rPr sz="1700" b="1">
+              <a:rPr sz="1400" b="1">
                 <a:solidFill>
                   <a:srgbClr val="323130"/>
                 </a:solidFill>
@@ -9376,7 +9944,7 @@
               <a:t>並列実行可能</a:t>
             </a:r>
             <a:r>
-              <a:rPr sz="1700">
+              <a:rPr sz="1400">
                 <a:solidFill>
                   <a:srgbClr val="323130"/>
                 </a:solidFill>
@@ -9386,7 +9954,7 @@
               <a:t>：</a:t>
             </a:r>
             <a:r>
-              <a:rPr sz="1400">
+              <a:rPr sz="1100">
                 <a:solidFill>
                   <a:srgbClr val="C7254E"/>
                 </a:solidFill>
@@ -9396,7 +9964,7 @@
               <a:t>--remote</a:t>
             </a:r>
             <a:r>
-              <a:rPr sz="1700">
+              <a:rPr sz="1400">
                 <a:solidFill>
                   <a:srgbClr val="323130"/>
                 </a:solidFill>
@@ -9409,11 +9977,11 @@
           <a:p>
             <a:pPr>
               <a:spcAft>
-                <a:spcPts val="400"/>
+                <a:spcPts val="300"/>
               </a:spcAft>
             </a:pPr>
             <a:r>
-              <a:rPr sz="1700">
+              <a:rPr sz="1400">
                 <a:solidFill>
                   <a:srgbClr val="323130"/>
                 </a:solidFill>
@@ -9426,11 +9994,11 @@
           <a:p>
             <a:pPr>
               <a:spcAft>
-                <a:spcPts val="400"/>
+                <a:spcPts val="300"/>
               </a:spcAft>
             </a:pPr>
             <a:r>
-              <a:rPr sz="1700">
+              <a:rPr sz="1400">
                 <a:solidFill>
                   <a:srgbClr val="323130"/>
                 </a:solidFill>
@@ -9440,7 +10008,7 @@
               <a:t>• </a:t>
             </a:r>
             <a:r>
-              <a:rPr sz="1700" b="1">
+              <a:rPr sz="1400" b="1">
                 <a:solidFill>
                   <a:srgbClr val="323130"/>
                 </a:solidFill>
@@ -9450,7 +10018,7 @@
               <a:t>クラウド実行時</a:t>
             </a:r>
             <a:r>
-              <a:rPr sz="1700">
+              <a:rPr sz="1400">
                 <a:solidFill>
                   <a:srgbClr val="323130"/>
                 </a:solidFill>
@@ -9460,7 +10028,7 @@
               <a:t>: </a:t>
             </a:r>
             <a:r>
-              <a:rPr sz="1700" b="1">
+              <a:rPr sz="1400" b="1">
                 <a:solidFill>
                   <a:srgbClr val="323130"/>
                 </a:solidFill>
@@ -9470,7 +10038,7 @@
               <a:t>モデル</a:t>
             </a:r>
             <a:r>
-              <a:rPr sz="1700">
+              <a:rPr sz="1400">
                 <a:solidFill>
                   <a:srgbClr val="323130"/>
                 </a:solidFill>
@@ -9480,8 +10048,48 @@
               <a:t> </a:t>
             </a:r>
             <a:r>
+              <a:rPr sz="1100" b="1">
+                <a:solidFill>
+                  <a:srgbClr val="C62828"/>
+                </a:solidFill>
+                <a:latin typeface="Meiryo"/>
+                <a:ea typeface="Meiryo"/>
+              </a:rPr>
+              <a:t>SaaS</a:t>
+            </a:r>
+            <a:r>
+              <a:rPr sz="1400">
+                <a:solidFill>
+                  <a:srgbClr val="323130"/>
+                </a:solidFill>
+                <a:latin typeface="Meiryo"/>
+                <a:ea typeface="Meiryo"/>
+              </a:rPr>
+              <a:t> / </a:t>
+            </a:r>
+            <a:r>
               <a:rPr sz="1400" b="1">
                 <a:solidFill>
+                  <a:srgbClr val="323130"/>
+                </a:solidFill>
+                <a:latin typeface="Meiryo"/>
+                <a:ea typeface="Meiryo"/>
+              </a:rPr>
+              <a:t>エージェントソフト</a:t>
+            </a:r>
+            <a:r>
+              <a:rPr sz="1400">
+                <a:solidFill>
+                  <a:srgbClr val="323130"/>
+                </a:solidFill>
+                <a:latin typeface="Meiryo"/>
+                <a:ea typeface="Meiryo"/>
+              </a:rPr>
+              <a:t> </a:t>
+            </a:r>
+            <a:r>
+              <a:rPr sz="1100" b="1">
+                <a:solidFill>
                   <a:srgbClr val="C62828"/>
                 </a:solidFill>
                 <a:latin typeface="Meiryo"/>
@@ -9490,7 +10098,7 @@
               <a:t>SaaS</a:t>
             </a:r>
             <a:r>
-              <a:rPr sz="1700">
+              <a:rPr sz="1400">
                 <a:solidFill>
                   <a:srgbClr val="323130"/>
                 </a:solidFill>
@@ -9500,17 +10108,17 @@
               <a:t> / </a:t>
             </a:r>
             <a:r>
-              <a:rPr sz="1700" b="1">
-                <a:solidFill>
-                  <a:srgbClr val="323130"/>
-                </a:solidFill>
-                <a:latin typeface="Meiryo"/>
-                <a:ea typeface="Meiryo"/>
-              </a:rPr>
-              <a:t>エージェントソフト</a:t>
-            </a:r>
-            <a:r>
-              <a:rPr sz="1700">
+              <a:rPr sz="1400" b="1">
+                <a:solidFill>
+                  <a:srgbClr val="323130"/>
+                </a:solidFill>
+                <a:latin typeface="Meiryo"/>
+                <a:ea typeface="Meiryo"/>
+              </a:rPr>
+              <a:t>コンテキスト</a:t>
+            </a:r>
+            <a:r>
+              <a:rPr sz="1400">
                 <a:solidFill>
                   <a:srgbClr val="323130"/>
                 </a:solidFill>
@@ -9520,7 +10128,7 @@
               <a:t> </a:t>
             </a:r>
             <a:r>
-              <a:rPr sz="1400" b="1">
+              <a:rPr sz="1100" b="1">
                 <a:solidFill>
                   <a:srgbClr val="C62828"/>
                 </a:solidFill>
@@ -9530,47 +10138,7 @@
               <a:t>SaaS</a:t>
             </a:r>
             <a:r>
-              <a:rPr sz="1700">
-                <a:solidFill>
-                  <a:srgbClr val="323130"/>
-                </a:solidFill>
-                <a:latin typeface="Meiryo"/>
-                <a:ea typeface="Meiryo"/>
-              </a:rPr>
-              <a:t> / </a:t>
-            </a:r>
-            <a:r>
-              <a:rPr sz="1700" b="1">
-                <a:solidFill>
-                  <a:srgbClr val="323130"/>
-                </a:solidFill>
-                <a:latin typeface="Meiryo"/>
-                <a:ea typeface="Meiryo"/>
-              </a:rPr>
-              <a:t>コンテキスト</a:t>
-            </a:r>
-            <a:r>
-              <a:rPr sz="1700">
-                <a:solidFill>
-                  <a:srgbClr val="323130"/>
-                </a:solidFill>
-                <a:latin typeface="Meiryo"/>
-                <a:ea typeface="Meiryo"/>
-              </a:rPr>
-              <a:t> </a:t>
-            </a:r>
-            <a:r>
-              <a:rPr sz="1400" b="1">
-                <a:solidFill>
-                  <a:srgbClr val="C62828"/>
-                </a:solidFill>
-                <a:latin typeface="Meiryo"/>
-                <a:ea typeface="Meiryo"/>
-              </a:rPr>
-              <a:t>SaaS</a:t>
-            </a:r>
-            <a:r>
-              <a:rPr sz="1700">
+              <a:rPr sz="1400">
                 <a:solidFill>
                   <a:srgbClr val="323130"/>
                 </a:solidFill>
@@ -9583,11 +10151,11 @@
           <a:p>
             <a:pPr>
               <a:spcAft>
-                <a:spcPts val="400"/>
+                <a:spcPts val="300"/>
               </a:spcAft>
             </a:pPr>
             <a:r>
-              <a:rPr sz="1700">
+              <a:rPr sz="1400">
                 <a:solidFill>
                   <a:srgbClr val="323130"/>
                 </a:solidFill>
@@ -9597,7 +10165,7 @@
               <a:t>• </a:t>
             </a:r>
             <a:r>
-              <a:rPr sz="1700" b="1">
+              <a:rPr sz="1400" b="1">
                 <a:solidFill>
                   <a:srgbClr val="323130"/>
                 </a:solidFill>
@@ -9607,7 +10175,7 @@
               <a:t>teleport後</a:t>
             </a:r>
             <a:r>
-              <a:rPr sz="1700">
+              <a:rPr sz="1400">
                 <a:solidFill>
                   <a:srgbClr val="323130"/>
                 </a:solidFill>
@@ -9617,7 +10185,7 @@
               <a:t>: </a:t>
             </a:r>
             <a:r>
-              <a:rPr sz="1700" b="1">
+              <a:rPr sz="1400" b="1">
                 <a:solidFill>
                   <a:srgbClr val="323130"/>
                 </a:solidFill>
@@ -9627,7 +10195,7 @@
               <a:t>モデル</a:t>
             </a:r>
             <a:r>
-              <a:rPr sz="1700">
+              <a:rPr sz="1400">
                 <a:solidFill>
                   <a:srgbClr val="323130"/>
                 </a:solidFill>
@@ -9637,17 +10205,57 @@
               <a:t> </a:t>
             </a:r>
             <a:r>
+              <a:rPr sz="1100" b="1">
+                <a:solidFill>
+                  <a:srgbClr val="C62828"/>
+                </a:solidFill>
+                <a:latin typeface="Meiryo"/>
+                <a:ea typeface="Meiryo"/>
+              </a:rPr>
+              <a:t>SaaS</a:t>
+            </a:r>
+            <a:r>
+              <a:rPr sz="1400">
+                <a:solidFill>
+                  <a:srgbClr val="323130"/>
+                </a:solidFill>
+                <a:latin typeface="Meiryo"/>
+                <a:ea typeface="Meiryo"/>
+              </a:rPr>
+              <a:t> / </a:t>
+            </a:r>
+            <a:r>
               <a:rPr sz="1400" b="1">
                 <a:solidFill>
-                  <a:srgbClr val="C62828"/>
-                </a:solidFill>
-                <a:latin typeface="Meiryo"/>
-                <a:ea typeface="Meiryo"/>
-              </a:rPr>
-              <a:t>SaaS</a:t>
-            </a:r>
-            <a:r>
-              <a:rPr sz="1700">
+                  <a:srgbClr val="323130"/>
+                </a:solidFill>
+                <a:latin typeface="Meiryo"/>
+                <a:ea typeface="Meiryo"/>
+              </a:rPr>
+              <a:t>エージェントソフト</a:t>
+            </a:r>
+            <a:r>
+              <a:rPr sz="1400">
+                <a:solidFill>
+                  <a:srgbClr val="323130"/>
+                </a:solidFill>
+                <a:latin typeface="Meiryo"/>
+                <a:ea typeface="Meiryo"/>
+              </a:rPr>
+              <a:t> </a:t>
+            </a:r>
+            <a:r>
+              <a:rPr sz="1100" b="1">
+                <a:solidFill>
+                  <a:srgbClr val="2E7D32"/>
+                </a:solidFill>
+                <a:latin typeface="Meiryo"/>
+                <a:ea typeface="Meiryo"/>
+              </a:rPr>
+              <a:t>オンプレ</a:t>
+            </a:r>
+            <a:r>
+              <a:rPr sz="1400">
                 <a:solidFill>
                   <a:srgbClr val="323130"/>
                 </a:solidFill>
@@ -9657,17 +10265,17 @@
               <a:t> / </a:t>
             </a:r>
             <a:r>
-              <a:rPr sz="1700" b="1">
-                <a:solidFill>
-                  <a:srgbClr val="323130"/>
-                </a:solidFill>
-                <a:latin typeface="Meiryo"/>
-                <a:ea typeface="Meiryo"/>
-              </a:rPr>
-              <a:t>エージェントソフト</a:t>
-            </a:r>
-            <a:r>
-              <a:rPr sz="1700">
+              <a:rPr sz="1400" b="1">
+                <a:solidFill>
+                  <a:srgbClr val="323130"/>
+                </a:solidFill>
+                <a:latin typeface="Meiryo"/>
+                <a:ea typeface="Meiryo"/>
+              </a:rPr>
+              <a:t>コンテキスト</a:t>
+            </a:r>
+            <a:r>
+              <a:rPr sz="1400">
                 <a:solidFill>
                   <a:srgbClr val="323130"/>
                 </a:solidFill>
@@ -9677,7 +10285,7 @@
               <a:t> </a:t>
             </a:r>
             <a:r>
-              <a:rPr sz="1400" b="1">
+              <a:rPr sz="1100" b="1">
                 <a:solidFill>
                   <a:srgbClr val="2E7D32"/>
                 </a:solidFill>
@@ -9687,47 +10295,7 @@
               <a:t>オンプレ</a:t>
             </a:r>
             <a:r>
-              <a:rPr sz="1700">
-                <a:solidFill>
-                  <a:srgbClr val="323130"/>
-                </a:solidFill>
-                <a:latin typeface="Meiryo"/>
-                <a:ea typeface="Meiryo"/>
-              </a:rPr>
-              <a:t> / </a:t>
-            </a:r>
-            <a:r>
-              <a:rPr sz="1700" b="1">
-                <a:solidFill>
-                  <a:srgbClr val="323130"/>
-                </a:solidFill>
-                <a:latin typeface="Meiryo"/>
-                <a:ea typeface="Meiryo"/>
-              </a:rPr>
-              <a:t>コンテキスト</a:t>
-            </a:r>
-            <a:r>
-              <a:rPr sz="1700">
-                <a:solidFill>
-                  <a:srgbClr val="323130"/>
-                </a:solidFill>
-                <a:latin typeface="Meiryo"/>
-                <a:ea typeface="Meiryo"/>
-              </a:rPr>
-              <a:t> </a:t>
-            </a:r>
-            <a:r>
-              <a:rPr sz="1400" b="1">
-                <a:solidFill>
-                  <a:srgbClr val="2E7D32"/>
-                </a:solidFill>
-                <a:latin typeface="Meiryo"/>
-                <a:ea typeface="Meiryo"/>
-              </a:rPr>
-              <a:t>オンプレ</a:t>
-            </a:r>
-            <a:r>
-              <a:rPr sz="1700">
+              <a:rPr sz="1400">
                 <a:solidFill>
                   <a:srgbClr val="323130"/>
                 </a:solidFill>
@@ -9737,7 +10305,7 @@
               <a:t> + </a:t>
             </a:r>
             <a:r>
-              <a:rPr sz="1400" b="1">
+              <a:rPr sz="1100" b="1">
                 <a:solidFill>
                   <a:srgbClr val="C62828"/>
                 </a:solidFill>
@@ -9750,11 +10318,11 @@
           <a:p>
             <a:pPr>
               <a:spcAft>
-                <a:spcPts val="400"/>
+                <a:spcPts val="300"/>
               </a:spcAft>
             </a:pPr>
             <a:r>
-              <a:rPr sz="1700">
+              <a:rPr sz="1400">
                 <a:solidFill>
                   <a:srgbClr val="323130"/>
                 </a:solidFill>
@@ -16129,7 +16697,7 @@
         <p:spPr>
           <a:xfrm>
             <a:off x="504444" y="1577340"/>
-            <a:ext cx="11180064" cy="3608832"/>
+            <a:ext cx="11180064" cy="3093720"/>
           </a:xfrm>
           <a:prstGeom prst="rect">
             <a:avLst/>
@@ -16144,8 +16712,8 @@
         </p:nvSpPr>
         <p:spPr>
           <a:xfrm>
-            <a:off x="502920" y="5277612"/>
-            <a:ext cx="11183112" cy="711708"/>
+            <a:off x="502920" y="4762500"/>
+            <a:ext cx="11183112" cy="1226819"/>
           </a:xfrm>
           <a:prstGeom prst="rect">
             <a:avLst/>
